--- a/static/teaching/Lecture04MarketEfficiency.pptx
+++ b/static/teaching/Lecture04MarketEfficiency.pptx
@@ -5,10 +5,10 @@
     <p:sldMasterId id="2147483648" r:id="rId1"/>
   </p:sldMasterIdLst>
   <p:notesMasterIdLst>
-    <p:notesMasterId r:id="rId54"/>
+    <p:notesMasterId r:id="rId56"/>
   </p:notesMasterIdLst>
   <p:handoutMasterIdLst>
-    <p:handoutMasterId r:id="rId55"/>
+    <p:handoutMasterId r:id="rId57"/>
   </p:handoutMasterIdLst>
   <p:sldIdLst>
     <p:sldId id="258" r:id="rId2"/>
@@ -27,42 +27,44 @@
     <p:sldId id="380" r:id="rId15"/>
     <p:sldId id="381" r:id="rId16"/>
     <p:sldId id="382" r:id="rId17"/>
-    <p:sldId id="383" r:id="rId18"/>
-    <p:sldId id="379" r:id="rId19"/>
-    <p:sldId id="385" r:id="rId20"/>
-    <p:sldId id="386" r:id="rId21"/>
-    <p:sldId id="402" r:id="rId22"/>
-    <p:sldId id="404" r:id="rId23"/>
-    <p:sldId id="477" r:id="rId24"/>
-    <p:sldId id="482" r:id="rId25"/>
-    <p:sldId id="480" r:id="rId26"/>
-    <p:sldId id="481" r:id="rId27"/>
-    <p:sldId id="457" r:id="rId28"/>
-    <p:sldId id="458" r:id="rId29"/>
-    <p:sldId id="459" r:id="rId30"/>
-    <p:sldId id="460" r:id="rId31"/>
-    <p:sldId id="461" r:id="rId32"/>
-    <p:sldId id="588" r:id="rId33"/>
-    <p:sldId id="589" r:id="rId34"/>
-    <p:sldId id="590" r:id="rId35"/>
-    <p:sldId id="546" r:id="rId36"/>
-    <p:sldId id="559" r:id="rId37"/>
-    <p:sldId id="560" r:id="rId38"/>
-    <p:sldId id="561" r:id="rId39"/>
-    <p:sldId id="562" r:id="rId40"/>
-    <p:sldId id="563" r:id="rId41"/>
-    <p:sldId id="564" r:id="rId42"/>
-    <p:sldId id="565" r:id="rId43"/>
-    <p:sldId id="547" r:id="rId44"/>
-    <p:sldId id="497" r:id="rId45"/>
-    <p:sldId id="513" r:id="rId46"/>
-    <p:sldId id="506" r:id="rId47"/>
-    <p:sldId id="502" r:id="rId48"/>
-    <p:sldId id="500" r:id="rId49"/>
-    <p:sldId id="591" r:id="rId50"/>
-    <p:sldId id="592" r:id="rId51"/>
-    <p:sldId id="593" r:id="rId52"/>
-    <p:sldId id="599" r:id="rId53"/>
+    <p:sldId id="595" r:id="rId18"/>
+    <p:sldId id="383" r:id="rId19"/>
+    <p:sldId id="379" r:id="rId20"/>
+    <p:sldId id="385" r:id="rId21"/>
+    <p:sldId id="386" r:id="rId22"/>
+    <p:sldId id="402" r:id="rId23"/>
+    <p:sldId id="404" r:id="rId24"/>
+    <p:sldId id="477" r:id="rId25"/>
+    <p:sldId id="482" r:id="rId26"/>
+    <p:sldId id="480" r:id="rId27"/>
+    <p:sldId id="596" r:id="rId28"/>
+    <p:sldId id="481" r:id="rId29"/>
+    <p:sldId id="457" r:id="rId30"/>
+    <p:sldId id="458" r:id="rId31"/>
+    <p:sldId id="459" r:id="rId32"/>
+    <p:sldId id="460" r:id="rId33"/>
+    <p:sldId id="461" r:id="rId34"/>
+    <p:sldId id="588" r:id="rId35"/>
+    <p:sldId id="589" r:id="rId36"/>
+    <p:sldId id="590" r:id="rId37"/>
+    <p:sldId id="546" r:id="rId38"/>
+    <p:sldId id="559" r:id="rId39"/>
+    <p:sldId id="560" r:id="rId40"/>
+    <p:sldId id="561" r:id="rId41"/>
+    <p:sldId id="562" r:id="rId42"/>
+    <p:sldId id="563" r:id="rId43"/>
+    <p:sldId id="564" r:id="rId44"/>
+    <p:sldId id="565" r:id="rId45"/>
+    <p:sldId id="547" r:id="rId46"/>
+    <p:sldId id="497" r:id="rId47"/>
+    <p:sldId id="513" r:id="rId48"/>
+    <p:sldId id="506" r:id="rId49"/>
+    <p:sldId id="502" r:id="rId50"/>
+    <p:sldId id="500" r:id="rId51"/>
+    <p:sldId id="591" r:id="rId52"/>
+    <p:sldId id="592" r:id="rId53"/>
+    <p:sldId id="593" r:id="rId54"/>
+    <p:sldId id="599" r:id="rId55"/>
   </p:sldIdLst>
   <p:sldSz cx="12192000" cy="6858000"/>
   <p:notesSz cx="7315200" cy="9601200"/>
@@ -263,7 +265,7 @@
             <a:fld id="{A3B2FA39-22FA-47A2-A0CD-DF5491C03A0F}" type="datetimeFigureOut">
               <a:rPr lang="en-US" smtClean="0"/>
               <a:pPr/>
-              <a:t>10/7/2025</a:t>
+              <a:t>9/17/2026</a:t>
             </a:fld>
             <a:endParaRPr lang="en-US"/>
           </a:p>
@@ -430,7 +432,7 @@
             <a:fld id="{CB8C6949-6838-4E3A-AF02-34AFF6CE7584}" type="datetimeFigureOut">
               <a:rPr lang="en-US" smtClean="0"/>
               <a:pPr/>
-              <a:t>10/7/2025</a:t>
+              <a:t>9/17/2026</a:t>
             </a:fld>
             <a:endParaRPr lang="en-US"/>
           </a:p>
@@ -1233,7 +1235,7 @@
             <a:fld id="{31F60441-1890-43DC-95FE-67BFE2A4D994}" type="slidenum">
               <a:rPr lang="en-US" smtClean="0"/>
               <a:pPr/>
-              <a:t>17</a:t>
+              <a:t>18</a:t>
             </a:fld>
             <a:endParaRPr lang="en-US"/>
           </a:p>
@@ -1325,7 +1327,7 @@
             <a:fld id="{31F60441-1890-43DC-95FE-67BFE2A4D994}" type="slidenum">
               <a:rPr lang="en-US" smtClean="0"/>
               <a:pPr/>
-              <a:t>18</a:t>
+              <a:t>19</a:t>
             </a:fld>
             <a:endParaRPr lang="en-US"/>
           </a:p>
@@ -1417,7 +1419,7 @@
             <a:fld id="{31F60441-1890-43DC-95FE-67BFE2A4D994}" type="slidenum">
               <a:rPr lang="en-US" smtClean="0"/>
               <a:pPr/>
-              <a:t>19</a:t>
+              <a:t>20</a:t>
             </a:fld>
             <a:endParaRPr lang="en-US"/>
           </a:p>
@@ -1509,7 +1511,7 @@
             <a:fld id="{31F60441-1890-43DC-95FE-67BFE2A4D994}" type="slidenum">
               <a:rPr lang="en-US" smtClean="0"/>
               <a:pPr/>
-              <a:t>20</a:t>
+              <a:t>21</a:t>
             </a:fld>
             <a:endParaRPr lang="en-US"/>
           </a:p>
@@ -1601,7 +1603,7 @@
             <a:fld id="{31F60441-1890-43DC-95FE-67BFE2A4D994}" type="slidenum">
               <a:rPr lang="en-US" smtClean="0"/>
               <a:pPr/>
-              <a:t>23</a:t>
+              <a:t>24</a:t>
             </a:fld>
             <a:endParaRPr lang="en-US"/>
           </a:p>
@@ -1693,7 +1695,7 @@
             <a:fld id="{31F60441-1890-43DC-95FE-67BFE2A4D994}" type="slidenum">
               <a:rPr lang="en-US" smtClean="0"/>
               <a:pPr/>
-              <a:t>24</a:t>
+              <a:t>25</a:t>
             </a:fld>
             <a:endParaRPr lang="en-US"/>
           </a:p>
@@ -1877,7 +1879,7 @@
             <a:fld id="{31F60441-1890-43DC-95FE-67BFE2A4D994}" type="slidenum">
               <a:rPr lang="en-US" smtClean="0"/>
               <a:pPr/>
-              <a:t>26</a:t>
+              <a:t>28</a:t>
             </a:fld>
             <a:endParaRPr lang="en-US"/>
           </a:p>
@@ -1945,92 +1947,6 @@
           <a:bodyPr/>
           <a:lstStyle/>
           <a:p>
-            <a:r>
-              <a:rPr lang="en-US" dirty="0"/>
-              <a:t>Exchange efficiency:</a:t>
-            </a:r>
-            <a:r>
-              <a:rPr lang="en-US" baseline="0" dirty="0"/>
-              <a:t> This is number of coconuts that F and R would be willing to give up for one more unit of shelter. One coconut gives </a:t>
-            </a:r>
-            <a:r>
-              <a:rPr lang="en-US" baseline="0" dirty="0" err="1"/>
-              <a:t>U_c</a:t>
-            </a:r>
-            <a:r>
-              <a:rPr lang="en-US" baseline="0" dirty="0"/>
-              <a:t> </a:t>
-            </a:r>
-            <a:r>
-              <a:rPr lang="en-US" baseline="0" dirty="0" err="1"/>
-              <a:t>utils</a:t>
-            </a:r>
-            <a:r>
-              <a:rPr lang="en-US" baseline="0" dirty="0"/>
-              <a:t>. One shelter gives U_s. So, to add one </a:t>
-            </a:r>
-            <a:r>
-              <a:rPr lang="en-US" baseline="0" dirty="0" err="1"/>
-              <a:t>util</a:t>
-            </a:r>
-            <a:r>
-              <a:rPr lang="en-US" baseline="0" dirty="0"/>
-              <a:t> add 1/</a:t>
-            </a:r>
-            <a:r>
-              <a:rPr lang="en-US" baseline="0" dirty="0" err="1"/>
-              <a:t>U_c</a:t>
-            </a:r>
-            <a:r>
-              <a:rPr lang="en-US" baseline="0" dirty="0"/>
-              <a:t> coconuts. To add U_s </a:t>
-            </a:r>
-            <a:r>
-              <a:rPr lang="en-US" baseline="0" dirty="0" err="1"/>
-              <a:t>utils</a:t>
-            </a:r>
-            <a:r>
-              <a:rPr lang="en-US" baseline="0" dirty="0"/>
-              <a:t> takes U_s/</a:t>
-            </a:r>
-            <a:r>
-              <a:rPr lang="en-US" baseline="0" dirty="0" err="1"/>
-              <a:t>U_c</a:t>
-            </a:r>
-            <a:r>
-              <a:rPr lang="en-US" baseline="0" dirty="0"/>
-              <a:t> coconuts.</a:t>
-            </a:r>
-          </a:p>
-          <a:p>
-            <a:endParaRPr lang="en-US" baseline="0" dirty="0"/>
-          </a:p>
-          <a:p>
-            <a:r>
-              <a:rPr lang="en-US" baseline="0" dirty="0"/>
-              <a:t>U_Fs/</a:t>
-            </a:r>
-            <a:r>
-              <a:rPr lang="en-US" baseline="0" dirty="0" err="1"/>
-              <a:t>U_Fc</a:t>
-            </a:r>
-            <a:r>
-              <a:rPr lang="en-US" baseline="0" dirty="0"/>
-              <a:t> = 4. This means that if someone offers F 5 coconuts for a unit of shelter he takes it. But if someone offers him a unit of shelter for 3 coconuts, he also takes it. U_Rs/</a:t>
-            </a:r>
-            <a:r>
-              <a:rPr lang="en-US" baseline="0" dirty="0" err="1"/>
-              <a:t>U_Rc</a:t>
-            </a:r>
-            <a:r>
-              <a:rPr lang="en-US" baseline="0" dirty="0"/>
-              <a:t> = 2 means that is someone offers R 3 coconuts for a unit of shelter he takes it. So, F offering R 3 coconuts for a unit of shelter is a trade that makes both better off.</a:t>
-            </a:r>
-          </a:p>
-          <a:p>
-            <a:endParaRPr lang="en-US" baseline="0" dirty="0"/>
-          </a:p>
-          <a:p>
             <a:endParaRPr lang="en-US" baseline="0" dirty="0"/>
           </a:p>
         </p:txBody>
@@ -2058,7 +1974,7 @@
               <a:pPr>
                 <a:defRPr/>
               </a:pPr>
-              <a:t>27</a:t>
+              <a:t>29</a:t>
             </a:fld>
             <a:endParaRPr lang="en-US" dirty="0"/>
           </a:p>
@@ -2150,7 +2066,7 @@
             <a:fld id="{31F60441-1890-43DC-95FE-67BFE2A4D994}" type="slidenum">
               <a:rPr lang="en-US" smtClean="0"/>
               <a:pPr/>
-              <a:t>29</a:t>
+              <a:t>31</a:t>
             </a:fld>
             <a:endParaRPr lang="en-US"/>
           </a:p>
@@ -2218,109 +2134,6 @@
           <a:bodyPr/>
           <a:lstStyle/>
           <a:p>
-            <a:pPr marL="0" marR="0" indent="0" algn="l" defTabSz="914400" rtl="0" eaLnBrk="1" fontAlgn="base" latinLnBrk="0" hangingPunct="1">
-              <a:lnSpc>
-                <a:spcPct val="100000"/>
-              </a:lnSpc>
-              <a:spcBef>
-                <a:spcPct val="30000"/>
-              </a:spcBef>
-              <a:spcAft>
-                <a:spcPct val="0"/>
-              </a:spcAft>
-              <a:buClrTx/>
-              <a:buSzTx/>
-              <a:buFontTx/>
-              <a:buNone/>
-              <a:tabLst/>
-              <a:defRPr/>
-            </a:pPr>
-            <a:r>
-              <a:rPr lang="en-US" baseline="0" dirty="0"/>
-              <a:t>Production efficiency: One coconut gives </a:t>
-            </a:r>
-            <a:r>
-              <a:rPr lang="en-US" baseline="0" dirty="0" err="1"/>
-              <a:t>U_c</a:t>
-            </a:r>
-            <a:r>
-              <a:rPr lang="en-US" baseline="0" dirty="0"/>
-              <a:t> </a:t>
-            </a:r>
-            <a:r>
-              <a:rPr lang="en-US" baseline="0" dirty="0" err="1"/>
-              <a:t>utils</a:t>
-            </a:r>
-            <a:r>
-              <a:rPr lang="en-US" baseline="0" dirty="0"/>
-              <a:t>. So, for one </a:t>
-            </a:r>
-            <a:r>
-              <a:rPr lang="en-US" baseline="0" dirty="0" err="1"/>
-              <a:t>util</a:t>
-            </a:r>
-            <a:r>
-              <a:rPr lang="en-US" baseline="0" dirty="0"/>
-              <a:t> you need 1/</a:t>
-            </a:r>
-            <a:r>
-              <a:rPr lang="en-US" baseline="0" dirty="0" err="1"/>
-              <a:t>U_c</a:t>
-            </a:r>
-            <a:r>
-              <a:rPr lang="en-US" baseline="0" dirty="0"/>
-              <a:t> coconuts. For </a:t>
-            </a:r>
-            <a:r>
-              <a:rPr lang="en-US" baseline="0" dirty="0" err="1"/>
-              <a:t>U_z</a:t>
-            </a:r>
-            <a:r>
-              <a:rPr lang="en-US" baseline="0" dirty="0"/>
-              <a:t> </a:t>
-            </a:r>
-            <a:r>
-              <a:rPr lang="en-US" baseline="0" dirty="0" err="1"/>
-              <a:t>utils</a:t>
-            </a:r>
-            <a:r>
-              <a:rPr lang="en-US" baseline="0" dirty="0"/>
-              <a:t> you need </a:t>
-            </a:r>
-            <a:r>
-              <a:rPr lang="en-US" baseline="0" dirty="0" err="1"/>
-              <a:t>U_z</a:t>
-            </a:r>
-            <a:r>
-              <a:rPr lang="en-US" baseline="0" dirty="0"/>
-              <a:t>/</a:t>
-            </a:r>
-            <a:r>
-              <a:rPr lang="en-US" baseline="0" dirty="0" err="1"/>
-              <a:t>U_c</a:t>
-            </a:r>
-            <a:r>
-              <a:rPr lang="en-US" baseline="0" dirty="0"/>
-              <a:t> coconuts. </a:t>
-            </a:r>
-            <a:r>
-              <a:rPr lang="en-US" baseline="0" dirty="0" err="1"/>
-              <a:t>U_z</a:t>
-            </a:r>
-            <a:r>
-              <a:rPr lang="en-US" baseline="0" dirty="0"/>
-              <a:t> is the number of </a:t>
-            </a:r>
-            <a:r>
-              <a:rPr lang="en-US" baseline="0" dirty="0" err="1"/>
-              <a:t>utils</a:t>
-            </a:r>
-            <a:r>
-              <a:rPr lang="en-US" baseline="0" dirty="0"/>
-              <a:t> for one extra hour of leisure. Now how many coconuts to you get if you supply one extra hour of labor: F_L</a:t>
-            </a:r>
-          </a:p>
-          <a:p>
             <a:endParaRPr lang="en-US" dirty="0"/>
           </a:p>
         </p:txBody>
@@ -2348,7 +2161,7 @@
               <a:pPr>
                 <a:defRPr/>
               </a:pPr>
-              <a:t>30</a:t>
+              <a:t>32</a:t>
             </a:fld>
             <a:endParaRPr lang="en-US" dirty="0"/>
           </a:p>
@@ -2440,7 +2253,7 @@
             <a:fld id="{31F60441-1890-43DC-95FE-67BFE2A4D994}" type="slidenum">
               <a:rPr lang="en-US" smtClean="0"/>
               <a:pPr/>
-              <a:t>31</a:t>
+              <a:t>33</a:t>
             </a:fld>
             <a:endParaRPr lang="en-US"/>
           </a:p>
@@ -2532,7 +2345,7 @@
             <a:fld id="{31F60441-1890-43DC-95FE-67BFE2A4D994}" type="slidenum">
               <a:rPr lang="en-US" smtClean="0"/>
               <a:pPr/>
-              <a:t>36</a:t>
+              <a:t>38</a:t>
             </a:fld>
             <a:endParaRPr lang="en-US"/>
           </a:p>
@@ -2627,7 +2440,7 @@
               <a:pPr>
                 <a:defRPr/>
               </a:pPr>
-              <a:t>40</a:t>
+              <a:t>42</a:t>
             </a:fld>
             <a:endParaRPr lang="en-US" dirty="0"/>
           </a:p>
@@ -2719,7 +2532,7 @@
             <a:fld id="{31F60441-1890-43DC-95FE-67BFE2A4D994}" type="slidenum">
               <a:rPr lang="en-US" smtClean="0"/>
               <a:pPr/>
-              <a:t>46</a:t>
+              <a:t>48</a:t>
             </a:fld>
             <a:endParaRPr lang="en-US"/>
           </a:p>
@@ -2811,7 +2624,7 @@
             <a:fld id="{31F60441-1890-43DC-95FE-67BFE2A4D994}" type="slidenum">
               <a:rPr lang="en-US" smtClean="0"/>
               <a:pPr/>
-              <a:t>48</a:t>
+              <a:t>50</a:t>
             </a:fld>
             <a:endParaRPr lang="en-US"/>
           </a:p>
@@ -2903,7 +2716,7 @@
             <a:fld id="{31F60441-1890-43DC-95FE-67BFE2A4D994}" type="slidenum">
               <a:rPr lang="en-US" smtClean="0"/>
               <a:pPr/>
-              <a:t>50</a:t>
+              <a:t>52</a:t>
             </a:fld>
             <a:endParaRPr lang="en-US"/>
           </a:p>
@@ -3087,7 +2900,7 @@
             <a:fld id="{31F60441-1890-43DC-95FE-67BFE2A4D994}" type="slidenum">
               <a:rPr lang="en-US" smtClean="0"/>
               <a:pPr/>
-              <a:t>51</a:t>
+              <a:t>53</a:t>
             </a:fld>
             <a:endParaRPr lang="en-US"/>
           </a:p>
@@ -3179,7 +2992,7 @@
             <a:fld id="{31F60441-1890-43DC-95FE-67BFE2A4D994}" type="slidenum">
               <a:rPr lang="en-US" smtClean="0"/>
               <a:pPr/>
-              <a:t>52</a:t>
+              <a:t>54</a:t>
             </a:fld>
             <a:endParaRPr lang="en-US"/>
           </a:p>
@@ -3930,7 +3743,7 @@
             <a:fld id="{6413255D-3CA4-4168-97B2-F8560448130A}" type="datetime1">
               <a:rPr lang="en-US" smtClean="0"/>
               <a:pPr/>
-              <a:t>10/7/2025</a:t>
+              <a:t>9/17/2026</a:t>
             </a:fld>
             <a:endParaRPr lang="en-US"/>
           </a:p>
@@ -4095,7 +3908,7 @@
             <a:fld id="{2497FFC0-974F-42B3-8202-D572BD932DD8}" type="datetime1">
               <a:rPr lang="en-US" smtClean="0"/>
               <a:pPr/>
-              <a:t>10/7/2025</a:t>
+              <a:t>9/17/2026</a:t>
             </a:fld>
             <a:endParaRPr lang="en-US"/>
           </a:p>
@@ -4270,7 +4083,7 @@
             <a:fld id="{1F38E247-DE5F-4BDD-8150-E13C213410F8}" type="datetime1">
               <a:rPr lang="en-US" smtClean="0"/>
               <a:pPr/>
-              <a:t>10/7/2025</a:t>
+              <a:t>9/17/2026</a:t>
             </a:fld>
             <a:endParaRPr lang="en-US"/>
           </a:p>
@@ -4435,7 +4248,7 @@
             <a:fld id="{ED2686B2-157E-4127-B032-108D7AB259B0}" type="datetime1">
               <a:rPr lang="en-US" smtClean="0"/>
               <a:pPr/>
-              <a:t>10/7/2025</a:t>
+              <a:t>9/17/2026</a:t>
             </a:fld>
             <a:endParaRPr lang="en-US"/>
           </a:p>
@@ -4677,7 +4490,7 @@
             <a:fld id="{ACC739F0-51BA-4B50-8691-613F6AAC3D5C}" type="datetime1">
               <a:rPr lang="en-US" smtClean="0"/>
               <a:pPr/>
-              <a:t>10/7/2025</a:t>
+              <a:t>9/17/2026</a:t>
             </a:fld>
             <a:endParaRPr lang="en-US"/>
           </a:p>
@@ -4959,7 +4772,7 @@
             <a:fld id="{E3F00017-4D76-4FF9-BFB7-03B1336121E5}" type="datetime1">
               <a:rPr lang="en-US" smtClean="0"/>
               <a:pPr/>
-              <a:t>10/7/2025</a:t>
+              <a:t>9/17/2026</a:t>
             </a:fld>
             <a:endParaRPr lang="en-US"/>
           </a:p>
@@ -5375,7 +5188,7 @@
             <a:fld id="{A3CF83C5-060F-4D8C-B2C0-897873DEC3F4}" type="datetime1">
               <a:rPr lang="en-US" smtClean="0"/>
               <a:pPr/>
-              <a:t>10/7/2025</a:t>
+              <a:t>9/17/2026</a:t>
             </a:fld>
             <a:endParaRPr lang="en-US"/>
           </a:p>
@@ -5489,7 +5302,7 @@
             <a:fld id="{DAF86480-A661-4B4D-B775-90DBB0516FE6}" type="datetime1">
               <a:rPr lang="en-US" smtClean="0"/>
               <a:pPr/>
-              <a:t>10/7/2025</a:t>
+              <a:t>9/17/2026</a:t>
             </a:fld>
             <a:endParaRPr lang="en-US"/>
           </a:p>
@@ -5581,7 +5394,7 @@
             <a:fld id="{89CEC2D5-38C0-41F6-87E3-D237C8FC4D02}" type="datetime1">
               <a:rPr lang="en-US" smtClean="0"/>
               <a:pPr/>
-              <a:t>10/7/2025</a:t>
+              <a:t>9/17/2026</a:t>
             </a:fld>
             <a:endParaRPr lang="en-US"/>
           </a:p>
@@ -5853,7 +5666,7 @@
             <a:fld id="{AD7FF770-5582-4FC2-9C7B-59A0DC438DA8}" type="datetime1">
               <a:rPr lang="en-US" smtClean="0"/>
               <a:pPr/>
-              <a:t>10/7/2025</a:t>
+              <a:t>9/17/2026</a:t>
             </a:fld>
             <a:endParaRPr lang="en-US"/>
           </a:p>
@@ -6102,7 +5915,7 @@
             <a:fld id="{26CAEAA2-1359-4C3D-8DC1-86D61C7F12B3}" type="datetime1">
               <a:rPr lang="en-US" smtClean="0"/>
               <a:pPr/>
-              <a:t>10/7/2025</a:t>
+              <a:t>9/17/2026</a:t>
             </a:fld>
             <a:endParaRPr lang="en-US"/>
           </a:p>
@@ -6310,7 +6123,7 @@
             <a:fld id="{89BBF63D-D11C-483F-9E3E-1AD0A77C035B}" type="datetime1">
               <a:rPr lang="en-US" smtClean="0"/>
               <a:pPr/>
-              <a:t>10/7/2025</a:t>
+              <a:t>9/17/2026</a:t>
             </a:fld>
             <a:endParaRPr lang="en-US"/>
           </a:p>
@@ -6895,15 +6708,12 @@
                 </a:pPr>
                 <a14:m>
                   <m:oMathPara xmlns:m="http://schemas.openxmlformats.org/officeDocument/2006/math">
-                    <m:oMathParaPr>
-                      <m:jc m:val="centerGroup"/>
-                    </m:oMathParaPr>
-                    <m:oMath xmlns:m="http://schemas.openxmlformats.org/officeDocument/2006/math">
+                    <m:oMath>
                       <m:sSub>
                         <m:sSubPr>
                           <m:ctrlPr>
-                            <a:rPr lang="en-US" i="1" smtClean="0">
-                              <a:latin typeface="Cambria Math" panose="02040503050406030204" pitchFamily="18" charset="0"/>
+                            <a:rPr lang="en-US" b="0" i="1" smtClean="0">
+                              <a:latin typeface="Cambria Math"/>
                             </a:rPr>
                           </m:ctrlPr>
                         </m:sSubPr>
@@ -6927,7 +6737,7 @@
                       <m:d>
                         <m:dPr>
                           <m:ctrlPr>
-                            <a:rPr lang="en-US" i="1" smtClean="0">
+                            <a:rPr lang="en-US" b="0" i="1" smtClean="0">
                               <a:latin typeface="Cambria Math" panose="02040503050406030204" pitchFamily="18" charset="0"/>
                             </a:rPr>
                           </m:ctrlPr>
@@ -6936,8 +6746,8 @@
                           <m:sSub>
                             <m:sSubPr>
                               <m:ctrlPr>
-                                <a:rPr lang="en-US" i="1" smtClean="0">
-                                  <a:latin typeface="Cambria Math" panose="02040503050406030204" pitchFamily="18" charset="0"/>
+                                <a:rPr lang="en-US" b="0" i="1" smtClean="0">
+                                  <a:latin typeface="Cambria Math"/>
                                 </a:rPr>
                               </m:ctrlPr>
                             </m:sSubPr>
@@ -6980,7 +6790,7 @@
                             <m:sSubPr>
                               <m:ctrlPr>
                                 <a:rPr lang="en-US" b="0" i="1" smtClean="0">
-                                  <a:latin typeface="Cambria Math" panose="02040503050406030204" pitchFamily="18" charset="0"/>
+                                  <a:latin typeface="Cambria Math"/>
                                 </a:rPr>
                               </m:ctrlPr>
                             </m:sSubPr>
@@ -7023,7 +6833,7 @@
                             <m:sSubPr>
                               <m:ctrlPr>
                                 <a:rPr lang="en-US" b="0" i="1" smtClean="0">
-                                  <a:latin typeface="Cambria Math" panose="02040503050406030204" pitchFamily="18" charset="0"/>
+                                  <a:latin typeface="Cambria Math"/>
                                 </a:rPr>
                               </m:ctrlPr>
                             </m:sSubPr>
@@ -7076,8 +6886,8 @@
                     <m:sSub>
                       <m:sSubPr>
                         <m:ctrlPr>
-                          <a:rPr lang="en-US" i="1" smtClean="0">
-                            <a:latin typeface="Cambria Math" panose="02040503050406030204" pitchFamily="18" charset="0"/>
+                          <a:rPr lang="en-US" b="0" i="1" smtClean="0">
+                            <a:latin typeface="Cambria Math"/>
                           </a:rPr>
                         </m:ctrlPr>
                       </m:sSubPr>
@@ -7125,7 +6935,7 @@
                       <m:sSubPr>
                         <m:ctrlPr>
                           <a:rPr lang="en-US" i="1">
-                            <a:latin typeface="Cambria Math" panose="02040503050406030204" pitchFamily="18" charset="0"/>
+                            <a:latin typeface="Cambria Math"/>
                           </a:rPr>
                         </m:ctrlPr>
                       </m:sSubPr>
@@ -7173,7 +6983,7 @@
                       <m:sSubPr>
                         <m:ctrlPr>
                           <a:rPr lang="en-US" i="1">
-                            <a:latin typeface="Cambria Math" panose="02040503050406030204" pitchFamily="18" charset="0"/>
+                            <a:latin typeface="Cambria Math"/>
                           </a:rPr>
                         </m:ctrlPr>
                       </m:sSubPr>
@@ -7225,15 +7035,12 @@
                 </a:pPr>
                 <a14:m>
                   <m:oMathPara xmlns:m="http://schemas.openxmlformats.org/officeDocument/2006/math">
-                    <m:oMathParaPr>
-                      <m:jc m:val="centerGroup"/>
-                    </m:oMathParaPr>
-                    <m:oMath xmlns:m="http://schemas.openxmlformats.org/officeDocument/2006/math">
+                    <m:oMath>
                       <m:sSub>
                         <m:sSubPr>
                           <m:ctrlPr>
                             <a:rPr lang="en-US" i="1">
-                              <a:latin typeface="Cambria Math" panose="02040503050406030204" pitchFamily="18" charset="0"/>
+                              <a:latin typeface="Cambria Math"/>
                             </a:rPr>
                           </m:ctrlPr>
                         </m:sSubPr>
@@ -7267,7 +7074,7 @@
                             <m:sSubPr>
                               <m:ctrlPr>
                                 <a:rPr lang="en-US" i="1">
-                                  <a:latin typeface="Cambria Math" panose="02040503050406030204" pitchFamily="18" charset="0"/>
+                                  <a:latin typeface="Cambria Math"/>
                                 </a:rPr>
                               </m:ctrlPr>
                             </m:sSubPr>
@@ -7310,7 +7117,7 @@
                             <m:sSubPr>
                               <m:ctrlPr>
                                 <a:rPr lang="en-US" i="1">
-                                  <a:latin typeface="Cambria Math" panose="02040503050406030204" pitchFamily="18" charset="0"/>
+                                  <a:latin typeface="Cambria Math"/>
                                 </a:rPr>
                               </m:ctrlPr>
                             </m:sSubPr>
@@ -7353,7 +7160,7 @@
                             <m:sSubPr>
                               <m:ctrlPr>
                                 <a:rPr lang="en-US" i="1">
-                                  <a:latin typeface="Cambria Math" panose="02040503050406030204" pitchFamily="18" charset="0"/>
+                                  <a:latin typeface="Cambria Math"/>
                                 </a:rPr>
                               </m:ctrlPr>
                             </m:sSubPr>
@@ -7854,8 +7661,8 @@
                     <m:sSub>
                       <m:sSubPr>
                         <m:ctrlPr>
-                          <a:rPr lang="en-US" i="1" smtClean="0">
-                            <a:latin typeface="Cambria Math" panose="02040503050406030204" pitchFamily="18" charset="0"/>
+                          <a:rPr lang="en-US" b="0" i="1" smtClean="0">
+                            <a:latin typeface="Cambria Math"/>
                           </a:rPr>
                         </m:ctrlPr>
                       </m:sSubPr>
@@ -7886,7 +7693,7 @@
                       <m:sSubPr>
                         <m:ctrlPr>
                           <a:rPr lang="en-US" b="0" i="1" smtClean="0">
-                            <a:latin typeface="Cambria Math" panose="02040503050406030204" pitchFamily="18" charset="0"/>
+                            <a:latin typeface="Cambria Math"/>
                           </a:rPr>
                         </m:ctrlPr>
                       </m:sSubPr>
@@ -7917,7 +7724,7 @@
                       <m:sSubPr>
                         <m:ctrlPr>
                           <a:rPr lang="en-US" b="0" i="1" smtClean="0">
-                            <a:latin typeface="Cambria Math" panose="02040503050406030204" pitchFamily="18" charset="0"/>
+                            <a:latin typeface="Cambria Math"/>
                           </a:rPr>
                         </m:ctrlPr>
                       </m:sSubPr>
@@ -7948,7 +7755,7 @@
                       <m:sSubPr>
                         <m:ctrlPr>
                           <a:rPr lang="en-US" b="0" i="1" smtClean="0">
-                            <a:latin typeface="Cambria Math" panose="02040503050406030204" pitchFamily="18" charset="0"/>
+                            <a:latin typeface="Cambria Math"/>
                           </a:rPr>
                         </m:ctrlPr>
                       </m:sSubPr>
@@ -7984,8 +7791,8 @@
                     <m:sSub>
                       <m:sSubPr>
                         <m:ctrlPr>
-                          <a:rPr lang="en-US" i="1" smtClean="0">
-                            <a:latin typeface="Cambria Math" panose="02040503050406030204" pitchFamily="18" charset="0"/>
+                          <a:rPr lang="en-US" b="0" i="1" smtClean="0">
+                            <a:latin typeface="Cambria Math"/>
                           </a:rPr>
                         </m:ctrlPr>
                       </m:sSubPr>
@@ -8016,7 +7823,7 @@
                       <m:sSubPr>
                         <m:ctrlPr>
                           <a:rPr lang="en-US" b="0" i="1" smtClean="0">
-                            <a:latin typeface="Cambria Math" panose="02040503050406030204" pitchFamily="18" charset="0"/>
+                            <a:latin typeface="Cambria Math"/>
                           </a:rPr>
                         </m:ctrlPr>
                       </m:sSubPr>
@@ -8052,8 +7859,8 @@
                     <m:sSub>
                       <m:sSubPr>
                         <m:ctrlPr>
-                          <a:rPr lang="en-US" i="1" smtClean="0">
-                            <a:latin typeface="Cambria Math" panose="02040503050406030204" pitchFamily="18" charset="0"/>
+                          <a:rPr lang="en-US" b="0" i="1" smtClean="0">
+                            <a:latin typeface="Cambria Math"/>
                           </a:rPr>
                         </m:ctrlPr>
                       </m:sSubPr>
@@ -8096,7 +7903,7 @@
                       <m:sSubPr>
                         <m:ctrlPr>
                           <a:rPr lang="en-US" b="0" i="1" smtClean="0">
-                            <a:latin typeface="Cambria Math" panose="02040503050406030204" pitchFamily="18" charset="0"/>
+                            <a:latin typeface="Cambria Math"/>
                           </a:rPr>
                         </m:ctrlPr>
                       </m:sSubPr>
@@ -8139,7 +7946,7 @@
                       <m:sSubPr>
                         <m:ctrlPr>
                           <a:rPr lang="en-US" b="0" i="1" smtClean="0">
-                            <a:latin typeface="Cambria Math" panose="02040503050406030204" pitchFamily="18" charset="0"/>
+                            <a:latin typeface="Cambria Math"/>
                           </a:rPr>
                         </m:ctrlPr>
                       </m:sSubPr>
@@ -8182,7 +7989,7 @@
                       <m:sSubPr>
                         <m:ctrlPr>
                           <a:rPr lang="en-US" b="0" i="1" smtClean="0">
-                            <a:latin typeface="Cambria Math" panose="02040503050406030204" pitchFamily="18" charset="0"/>
+                            <a:latin typeface="Cambria Math"/>
                           </a:rPr>
                         </m:ctrlPr>
                       </m:sSubPr>
@@ -8225,7 +8032,7 @@
                       <m:sSubPr>
                         <m:ctrlPr>
                           <a:rPr lang="en-US" i="1">
-                            <a:latin typeface="Cambria Math" panose="02040503050406030204" pitchFamily="18" charset="0"/>
+                            <a:latin typeface="Cambria Math"/>
                           </a:rPr>
                         </m:ctrlPr>
                       </m:sSubPr>
@@ -8268,7 +8075,7 @@
                       <m:sSubPr>
                         <m:ctrlPr>
                           <a:rPr lang="en-US" i="1">
-                            <a:latin typeface="Cambria Math" panose="02040503050406030204" pitchFamily="18" charset="0"/>
+                            <a:latin typeface="Cambria Math"/>
                           </a:rPr>
                         </m:ctrlPr>
                       </m:sSubPr>
@@ -8724,8 +8531,8 @@
                     <m:sSub>
                       <m:sSubPr>
                         <m:ctrlPr>
-                          <a:rPr lang="en-US" i="1" smtClean="0">
-                            <a:latin typeface="Cambria Math" panose="02040503050406030204" pitchFamily="18" charset="0"/>
+                          <a:rPr lang="en-US" b="0" i="1" smtClean="0">
+                            <a:latin typeface="Cambria Math"/>
                           </a:rPr>
                         </m:ctrlPr>
                       </m:sSubPr>
@@ -8756,7 +8563,7 @@
                       <m:sSubPr>
                         <m:ctrlPr>
                           <a:rPr lang="en-US" b="0" i="1" smtClean="0">
-                            <a:latin typeface="Cambria Math" panose="02040503050406030204" pitchFamily="18" charset="0"/>
+                            <a:latin typeface="Cambria Math"/>
                           </a:rPr>
                         </m:ctrlPr>
                       </m:sSubPr>
@@ -8787,7 +8594,8 @@
                       <m:sSubPr>
                         <m:ctrlPr>
                           <a:rPr lang="en-US" b="0" i="1" smtClean="0">
-                            <a:latin typeface="Cambria Math" panose="02040503050406030204" pitchFamily="18" charset="0"/>
+                            <a:latin typeface="Cambria Math"/>
+                            <a:ea typeface="Cambria Math"/>
                           </a:rPr>
                         </m:ctrlPr>
                       </m:sSubPr>
@@ -8824,8 +8632,8 @@
                     <m:sSub>
                       <m:sSubPr>
                         <m:ctrlPr>
-                          <a:rPr lang="en-US" i="1" smtClean="0">
-                            <a:latin typeface="Cambria Math" panose="02040503050406030204" pitchFamily="18" charset="0"/>
+                          <a:rPr lang="en-US" b="0" i="1" smtClean="0">
+                            <a:latin typeface="Cambria Math"/>
                           </a:rPr>
                         </m:ctrlPr>
                       </m:sSubPr>
@@ -8856,7 +8664,7 @@
                       <m:sSubPr>
                         <m:ctrlPr>
                           <a:rPr lang="en-US" b="0" i="1" smtClean="0">
-                            <a:latin typeface="Cambria Math" panose="02040503050406030204" pitchFamily="18" charset="0"/>
+                            <a:latin typeface="Cambria Math"/>
                           </a:rPr>
                         </m:ctrlPr>
                       </m:sSubPr>
@@ -8887,7 +8695,7 @@
                       <m:sSubPr>
                         <m:ctrlPr>
                           <a:rPr lang="en-US" b="0" i="1" smtClean="0">
-                            <a:latin typeface="Cambria Math" panose="02040503050406030204" pitchFamily="18" charset="0"/>
+                            <a:latin typeface="Cambria Math"/>
                           </a:rPr>
                         </m:ctrlPr>
                       </m:sSubPr>
@@ -8930,7 +8738,7 @@
                       <m:sSubPr>
                         <m:ctrlPr>
                           <a:rPr lang="en-US" b="0" i="1" smtClean="0">
-                            <a:latin typeface="Cambria Math" panose="02040503050406030204" pitchFamily="18" charset="0"/>
+                            <a:latin typeface="Cambria Math"/>
                           </a:rPr>
                         </m:ctrlPr>
                       </m:sSubPr>
@@ -8973,7 +8781,8 @@
                       <m:sSubPr>
                         <m:ctrlPr>
                           <a:rPr lang="en-US" b="0" i="1" smtClean="0">
-                            <a:latin typeface="Cambria Math" panose="02040503050406030204" pitchFamily="18" charset="0"/>
+                            <a:latin typeface="Cambria Math"/>
+                            <a:ea typeface="Cambria Math"/>
                           </a:rPr>
                         </m:ctrlPr>
                       </m:sSubPr>
@@ -9013,8 +8822,8 @@
                     <m:sSub>
                       <m:sSubPr>
                         <m:ctrlPr>
-                          <a:rPr lang="en-US" i="1" smtClean="0">
-                            <a:latin typeface="Cambria Math" panose="02040503050406030204" pitchFamily="18" charset="0"/>
+                          <a:rPr lang="en-US" b="0" i="1" smtClean="0">
+                            <a:latin typeface="Cambria Math"/>
                           </a:rPr>
                         </m:ctrlPr>
                       </m:sSubPr>
@@ -9057,7 +8866,7 @@
                       <m:sSubPr>
                         <m:ctrlPr>
                           <a:rPr lang="en-US" b="0" i="1" smtClean="0">
-                            <a:latin typeface="Cambria Math" panose="02040503050406030204" pitchFamily="18" charset="0"/>
+                            <a:latin typeface="Cambria Math"/>
                           </a:rPr>
                         </m:ctrlPr>
                       </m:sSubPr>
@@ -9100,7 +8909,7 @@
                       <m:sSubPr>
                         <m:ctrlPr>
                           <a:rPr lang="en-US" b="0" i="1" smtClean="0">
-                            <a:latin typeface="Cambria Math" panose="02040503050406030204" pitchFamily="18" charset="0"/>
+                            <a:latin typeface="Cambria Math"/>
                           </a:rPr>
                         </m:ctrlPr>
                       </m:sSubPr>
@@ -9136,8 +8945,8 @@
                     <m:sSub>
                       <m:sSubPr>
                         <m:ctrlPr>
-                          <a:rPr lang="en-US" i="1" smtClean="0">
-                            <a:latin typeface="Cambria Math" panose="02040503050406030204" pitchFamily="18" charset="0"/>
+                          <a:rPr lang="en-US" b="0" i="1" smtClean="0">
+                            <a:latin typeface="Cambria Math"/>
                           </a:rPr>
                         </m:ctrlPr>
                       </m:sSubPr>
@@ -9180,7 +8989,7 @@
                       <m:sSubPr>
                         <m:ctrlPr>
                           <a:rPr lang="en-US" b="0" i="1" smtClean="0">
-                            <a:latin typeface="Cambria Math" panose="02040503050406030204" pitchFamily="18" charset="0"/>
+                            <a:latin typeface="Cambria Math"/>
                           </a:rPr>
                         </m:ctrlPr>
                       </m:sSubPr>
@@ -9223,7 +9032,7 @@
                       <m:sSubPr>
                         <m:ctrlPr>
                           <a:rPr lang="en-US" b="0" i="1" smtClean="0">
-                            <a:latin typeface="Cambria Math" panose="02040503050406030204" pitchFamily="18" charset="0"/>
+                            <a:latin typeface="Cambria Math"/>
                           </a:rPr>
                         </m:ctrlPr>
                       </m:sSubPr>
@@ -9264,7 +9073,7 @@
                       <m:sSubPr>
                         <m:ctrlPr>
                           <a:rPr lang="en-US" i="1">
-                            <a:latin typeface="Cambria Math" panose="02040503050406030204" pitchFamily="18" charset="0"/>
+                            <a:latin typeface="Cambria Math"/>
                           </a:rPr>
                         </m:ctrlPr>
                       </m:sSubPr>
@@ -9294,7 +9103,7 @@
                     <m:sSub>
                       <m:sSubPr>
                         <m:ctrlPr>
-                          <a:rPr lang="en-US" i="1">
+                          <a:rPr lang="en-US" b="0" i="1" smtClean="0">
                             <a:latin typeface="Cambria Math" panose="02040503050406030204" pitchFamily="18" charset="0"/>
                           </a:rPr>
                         </m:ctrlPr>
@@ -9329,7 +9138,7 @@
                           <m:sSubPr>
                             <m:ctrlPr>
                               <a:rPr lang="en-US" i="1">
-                                <a:latin typeface="Cambria Math" panose="02040503050406030204" pitchFamily="18" charset="0"/>
+                                <a:latin typeface="Cambria Math"/>
                               </a:rPr>
                             </m:ctrlPr>
                           </m:sSubPr>
@@ -9360,7 +9169,7 @@
                           <m:sSubPr>
                             <m:ctrlPr>
                               <a:rPr lang="en-US" i="1">
-                                <a:latin typeface="Cambria Math" panose="02040503050406030204" pitchFamily="18" charset="0"/>
+                                <a:latin typeface="Cambria Math"/>
                               </a:rPr>
                             </m:ctrlPr>
                           </m:sSubPr>
@@ -9395,7 +9204,7 @@
                       <m:sSubPr>
                         <m:ctrlPr>
                           <a:rPr lang="en-US" i="1">
-                            <a:latin typeface="Cambria Math" panose="02040503050406030204" pitchFamily="18" charset="0"/>
+                            <a:latin typeface="Cambria Math"/>
                           </a:rPr>
                         </m:ctrlPr>
                       </m:sSubPr>
@@ -9425,7 +9234,7 @@
                     <m:sSub>
                       <m:sSubPr>
                         <m:ctrlPr>
-                          <a:rPr lang="en-US" i="1">
+                          <a:rPr lang="en-US" b="0" i="1" smtClean="0">
                             <a:latin typeface="Cambria Math" panose="02040503050406030204" pitchFamily="18" charset="0"/>
                           </a:rPr>
                         </m:ctrlPr>
@@ -9460,7 +9269,7 @@
                           <m:sSubPr>
                             <m:ctrlPr>
                               <a:rPr lang="en-US" i="1">
-                                <a:latin typeface="Cambria Math" panose="02040503050406030204" pitchFamily="18" charset="0"/>
+                                <a:latin typeface="Cambria Math"/>
                               </a:rPr>
                             </m:ctrlPr>
                           </m:sSubPr>
@@ -9491,7 +9300,7 @@
                           <m:sSubPr>
                             <m:ctrlPr>
                               <a:rPr lang="en-US" i="1">
-                                <a:latin typeface="Cambria Math" panose="02040503050406030204" pitchFamily="18" charset="0"/>
+                                <a:latin typeface="Cambria Math"/>
                               </a:rPr>
                             </m:ctrlPr>
                           </m:sSubPr>
@@ -10239,8 +10048,8 @@
                     <m:sSub>
                       <m:sSubPr>
                         <m:ctrlPr>
-                          <a:rPr lang="en-US" i="1" smtClean="0">
-                            <a:latin typeface="Cambria Math" panose="02040503050406030204" pitchFamily="18" charset="0"/>
+                          <a:rPr lang="en-US" b="0" i="1" smtClean="0">
+                            <a:latin typeface="Cambria Math"/>
                           </a:rPr>
                         </m:ctrlPr>
                       </m:sSubPr>
@@ -10292,7 +10101,7 @@
                       <m:sSubPr>
                         <m:ctrlPr>
                           <a:rPr lang="en-US" i="1">
-                            <a:latin typeface="Cambria Math" panose="02040503050406030204" pitchFamily="18" charset="0"/>
+                            <a:latin typeface="Cambria Math"/>
                           </a:rPr>
                         </m:ctrlPr>
                       </m:sSubPr>
@@ -10358,7 +10167,7 @@
                       <m:sSubPr>
                         <m:ctrlPr>
                           <a:rPr lang="en-US" i="1">
-                            <a:latin typeface="Cambria Math" panose="02040503050406030204" pitchFamily="18" charset="0"/>
+                            <a:latin typeface="Cambria Math"/>
                           </a:rPr>
                         </m:ctrlPr>
                       </m:sSubPr>
@@ -10401,7 +10210,7 @@
                       <m:sSubPr>
                         <m:ctrlPr>
                           <a:rPr lang="en-US" i="1">
-                            <a:latin typeface="Cambria Math" panose="02040503050406030204" pitchFamily="18" charset="0"/>
+                            <a:latin typeface="Cambria Math"/>
                           </a:rPr>
                         </m:ctrlPr>
                       </m:sSubPr>
@@ -11256,6 +11065,156 @@
       </p:grpSpPr>
       <p:sp>
         <p:nvSpPr>
+          <p:cNvPr id="2" name="Title 1">
+            <a:extLst>
+              <a:ext uri="{FF2B5EF4-FFF2-40B4-BE49-F238E27FC236}">
+                <a16:creationId xmlns:a16="http://schemas.microsoft.com/office/drawing/2014/main" id="{7124F0AE-E276-E907-3A47-71D7F8D54AC1}"/>
+              </a:ext>
+            </a:extLst>
+          </p:cNvPr>
+          <p:cNvSpPr>
+            <a:spLocks noGrp="1"/>
+          </p:cNvSpPr>
+          <p:nvPr>
+            <p:ph type="title"/>
+          </p:nvPr>
+        </p:nvSpPr>
+        <p:spPr/>
+        <p:txBody>
+          <a:bodyPr/>
+          <a:lstStyle/>
+          <a:p>
+            <a:r>
+              <a:rPr lang="is-IS" dirty="0"/>
+              <a:t>iClicker Poll</a:t>
+            </a:r>
+            <a:endParaRPr lang="en-US" dirty="0"/>
+          </a:p>
+        </p:txBody>
+      </p:sp>
+      <p:sp>
+        <p:nvSpPr>
+          <p:cNvPr id="3" name="Content Placeholder 2">
+            <a:extLst>
+              <a:ext uri="{FF2B5EF4-FFF2-40B4-BE49-F238E27FC236}">
+                <a16:creationId xmlns:a16="http://schemas.microsoft.com/office/drawing/2014/main" id="{A98125A2-1145-7BEA-2EA0-4596ED007124}"/>
+              </a:ext>
+            </a:extLst>
+          </p:cNvPr>
+          <p:cNvSpPr>
+            <a:spLocks noGrp="1"/>
+          </p:cNvSpPr>
+          <p:nvPr>
+            <p:ph idx="1"/>
+          </p:nvPr>
+        </p:nvSpPr>
+        <p:spPr>
+          <a:xfrm>
+            <a:off x="609600" y="2209800"/>
+            <a:ext cx="10972800" cy="3916364"/>
+          </a:xfrm>
+        </p:spPr>
+        <p:txBody>
+          <a:bodyPr/>
+          <a:lstStyle/>
+          <a:p>
+            <a:r>
+              <a:rPr lang="is-IS" dirty="0"/>
+              <a:t>Consider the allocation where one person owns everything. </a:t>
+            </a:r>
+            <a:br>
+              <a:rPr lang="is-IS" dirty="0"/>
+            </a:br>
+            <a:r>
+              <a:rPr lang="is-IS" dirty="0"/>
+              <a:t>Is this allocation Pareto efficient?</a:t>
+            </a:r>
+          </a:p>
+          <a:p>
+            <a:pPr marL="514350" indent="-514350">
+              <a:buFont typeface="+mj-lt"/>
+              <a:buAutoNum type="alphaLcParenR"/>
+            </a:pPr>
+            <a:r>
+              <a:rPr lang="is-IS" dirty="0"/>
+              <a:t>Yes</a:t>
+            </a:r>
+          </a:p>
+          <a:p>
+            <a:pPr marL="514350" indent="-514350">
+              <a:buFont typeface="+mj-lt"/>
+              <a:buAutoNum type="alphaLcParenR"/>
+            </a:pPr>
+            <a:r>
+              <a:rPr lang="is-IS" dirty="0"/>
+              <a:t>No</a:t>
+            </a:r>
+            <a:endParaRPr lang="en-US" dirty="0"/>
+          </a:p>
+        </p:txBody>
+      </p:sp>
+      <p:sp>
+        <p:nvSpPr>
+          <p:cNvPr id="4" name="Slide Number Placeholder 3">
+            <a:extLst>
+              <a:ext uri="{FF2B5EF4-FFF2-40B4-BE49-F238E27FC236}">
+                <a16:creationId xmlns:a16="http://schemas.microsoft.com/office/drawing/2014/main" id="{24F29F77-3C3B-C0D2-B925-6679E5E12F12}"/>
+              </a:ext>
+            </a:extLst>
+          </p:cNvPr>
+          <p:cNvSpPr>
+            <a:spLocks noGrp="1"/>
+          </p:cNvSpPr>
+          <p:nvPr>
+            <p:ph type="sldNum" sz="quarter" idx="12"/>
+          </p:nvPr>
+        </p:nvSpPr>
+        <p:spPr/>
+        <p:txBody>
+          <a:bodyPr/>
+          <a:lstStyle/>
+          <a:p>
+            <a:fld id="{CFF8E9C2-617A-4D65-AFBD-F489864C0492}" type="slidenum">
+              <a:rPr lang="en-US" smtClean="0"/>
+              <a:pPr/>
+              <a:t>17</a:t>
+            </a:fld>
+            <a:endParaRPr lang="en-US"/>
+          </a:p>
+        </p:txBody>
+      </p:sp>
+    </p:spTree>
+    <p:extLst>
+      <p:ext uri="{BB962C8B-B14F-4D97-AF65-F5344CB8AC3E}">
+        <p14:creationId xmlns:p14="http://schemas.microsoft.com/office/powerpoint/2010/main" val="3975705822"/>
+      </p:ext>
+    </p:extLst>
+  </p:cSld>
+  <p:clrMapOvr>
+    <a:masterClrMapping/>
+  </p:clrMapOvr>
+</p:sld>
+</file>
+
+<file path=ppt/slides/slide18.xml><?xml version="1.0" encoding="utf-8"?>
+<p:sld xmlns:a="http://schemas.openxmlformats.org/drawingml/2006/main" xmlns:r="http://schemas.openxmlformats.org/officeDocument/2006/relationships" xmlns:p="http://schemas.openxmlformats.org/presentationml/2006/main">
+  <p:cSld>
+    <p:spTree>
+      <p:nvGrpSpPr>
+        <p:cNvPr id="1" name=""/>
+        <p:cNvGrpSpPr/>
+        <p:nvPr/>
+      </p:nvGrpSpPr>
+      <p:grpSpPr>
+        <a:xfrm>
+          <a:off x="0" y="0"/>
+          <a:ext cx="0" cy="0"/>
+          <a:chOff x="0" y="0"/>
+          <a:chExt cx="0" cy="0"/>
+        </a:xfrm>
+      </p:grpSpPr>
+      <p:sp>
+        <p:nvSpPr>
           <p:cNvPr id="2" name="Title 1"/>
           <p:cNvSpPr>
             <a:spLocks noGrp="1"/>
@@ -11357,7 +11316,7 @@
             <a:fld id="{CFF8E9C2-617A-4D65-AFBD-F489864C0492}" type="slidenum">
               <a:rPr lang="en-US" smtClean="0"/>
               <a:pPr/>
-              <a:t>17</a:t>
+              <a:t>18</a:t>
             </a:fld>
             <a:endParaRPr lang="en-US"/>
           </a:p>
@@ -11615,7 +11574,7 @@
 </p:sld>
 </file>
 
-<file path=ppt/slides/slide18.xml><?xml version="1.0" encoding="utf-8"?>
+<file path=ppt/slides/slide19.xml><?xml version="1.0" encoding="utf-8"?>
 <p:sld xmlns:a="http://schemas.openxmlformats.org/drawingml/2006/main" xmlns:r="http://schemas.openxmlformats.org/officeDocument/2006/relationships" xmlns:p="http://schemas.openxmlformats.org/presentationml/2006/main">
   <p:cSld>
     <p:spTree>
@@ -11703,15 +11662,13 @@
                 </a:pPr>
                 <a14:m>
                   <m:oMathPara xmlns:m="http://schemas.openxmlformats.org/officeDocument/2006/math">
-                    <m:oMathParaPr>
-                      <m:jc m:val="centerGroup"/>
-                    </m:oMathParaPr>
-                    <m:oMath xmlns:m="http://schemas.openxmlformats.org/officeDocument/2006/math">
+                    <m:oMath>
                       <m:sSub>
                         <m:sSubPr>
                           <m:ctrlPr>
                             <a:rPr lang="en-US" i="1" smtClean="0">
-                              <a:latin typeface="Cambria Math" panose="02040503050406030204" pitchFamily="18" charset="0"/>
+                              <a:latin typeface="Cambria Math"/>
+                              <a:ea typeface="Cambria Math"/>
                             </a:rPr>
                           </m:ctrlPr>
                         </m:sSubPr>
@@ -11737,7 +11694,7 @@
                         <m:sSubPr>
                           <m:ctrlPr>
                             <a:rPr lang="en-US" i="1">
-                              <a:latin typeface="Cambria Math" panose="02040503050406030204" pitchFamily="18" charset="0"/>
+                              <a:latin typeface="Cambria Math"/>
                             </a:rPr>
                           </m:ctrlPr>
                         </m:sSubPr>
@@ -11771,7 +11728,7 @@
                             <m:sSubPr>
                               <m:ctrlPr>
                                 <a:rPr lang="en-US" i="1">
-                                  <a:latin typeface="Cambria Math" panose="02040503050406030204" pitchFamily="18" charset="0"/>
+                                  <a:latin typeface="Cambria Math"/>
                                 </a:rPr>
                               </m:ctrlPr>
                             </m:sSubPr>
@@ -11814,7 +11771,7 @@
                             <m:sSubPr>
                               <m:ctrlPr>
                                 <a:rPr lang="en-US" i="1">
-                                  <a:latin typeface="Cambria Math" panose="02040503050406030204" pitchFamily="18" charset="0"/>
+                                  <a:latin typeface="Cambria Math"/>
                                 </a:rPr>
                               </m:ctrlPr>
                             </m:sSubPr>
@@ -11857,7 +11814,7 @@
                             <m:sSubPr>
                               <m:ctrlPr>
                                 <a:rPr lang="en-US" i="1">
-                                  <a:latin typeface="Cambria Math" panose="02040503050406030204" pitchFamily="18" charset="0"/>
+                                  <a:latin typeface="Cambria Math"/>
                                 </a:rPr>
                               </m:ctrlPr>
                             </m:sSubPr>
@@ -11901,8 +11858,9 @@
                       <m:sSub>
                         <m:sSubPr>
                           <m:ctrlPr>
-                            <a:rPr lang="en-US" i="1">
-                              <a:latin typeface="Cambria Math" panose="02040503050406030204" pitchFamily="18" charset="0"/>
+                            <a:rPr lang="en-US" i="1" smtClean="0">
+                              <a:latin typeface="Cambria Math"/>
+                              <a:ea typeface="Cambria Math"/>
                             </a:rPr>
                           </m:ctrlPr>
                         </m:sSubPr>
@@ -11929,7 +11887,7 @@
                         <m:sSubPr>
                           <m:ctrlPr>
                             <a:rPr lang="en-US" i="1">
-                              <a:latin typeface="Cambria Math" panose="02040503050406030204" pitchFamily="18" charset="0"/>
+                              <a:latin typeface="Cambria Math"/>
                             </a:rPr>
                           </m:ctrlPr>
                         </m:sSubPr>
@@ -11963,7 +11921,7 @@
                             <m:sSubPr>
                               <m:ctrlPr>
                                 <a:rPr lang="en-US" i="1">
-                                  <a:latin typeface="Cambria Math" panose="02040503050406030204" pitchFamily="18" charset="0"/>
+                                  <a:latin typeface="Cambria Math"/>
                                 </a:rPr>
                               </m:ctrlPr>
                             </m:sSubPr>
@@ -12006,7 +11964,7 @@
                             <m:sSubPr>
                               <m:ctrlPr>
                                 <a:rPr lang="en-US" i="1">
-                                  <a:latin typeface="Cambria Math" panose="02040503050406030204" pitchFamily="18" charset="0"/>
+                                  <a:latin typeface="Cambria Math"/>
                                 </a:rPr>
                               </m:ctrlPr>
                             </m:sSubPr>
@@ -12049,7 +12007,7 @@
                             <m:sSubPr>
                               <m:ctrlPr>
                                 <a:rPr lang="en-US" i="1">
-                                  <a:latin typeface="Cambria Math" panose="02040503050406030204" pitchFamily="18" charset="0"/>
+                                  <a:latin typeface="Cambria Math"/>
                                 </a:rPr>
                               </m:ctrlPr>
                             </m:sSubPr>
@@ -12212,7 +12170,7 @@
             <a:fld id="{CFF8E9C2-617A-4D65-AFBD-F489864C0492}" type="slidenum">
               <a:rPr lang="en-US" smtClean="0"/>
               <a:pPr/>
-              <a:t>18</a:t>
+              <a:t>19</a:t>
             </a:fld>
             <a:endParaRPr lang="en-US"/>
           </a:p>
@@ -12555,256 +12513,6 @@
 </p:sld>
 </file>
 
-<file path=ppt/slides/slide19.xml><?xml version="1.0" encoding="utf-8"?>
-<p:sld xmlns:a="http://schemas.openxmlformats.org/drawingml/2006/main" xmlns:r="http://schemas.openxmlformats.org/officeDocument/2006/relationships" xmlns:p="http://schemas.openxmlformats.org/presentationml/2006/main">
-  <p:cSld>
-    <p:spTree>
-      <p:nvGrpSpPr>
-        <p:cNvPr id="1" name=""/>
-        <p:cNvGrpSpPr/>
-        <p:nvPr/>
-      </p:nvGrpSpPr>
-      <p:grpSpPr>
-        <a:xfrm>
-          <a:off x="0" y="0"/>
-          <a:ext cx="0" cy="0"/>
-          <a:chOff x="0" y="0"/>
-          <a:chExt cx="0" cy="0"/>
-        </a:xfrm>
-      </p:grpSpPr>
-      <p:sp>
-        <p:nvSpPr>
-          <p:cNvPr id="2" name="Title 1"/>
-          <p:cNvSpPr>
-            <a:spLocks noGrp="1"/>
-          </p:cNvSpPr>
-          <p:nvPr>
-            <p:ph type="title"/>
-          </p:nvPr>
-        </p:nvSpPr>
-        <p:spPr/>
-        <p:txBody>
-          <a:bodyPr/>
-          <a:lstStyle/>
-          <a:p>
-            <a:r>
-              <a:rPr lang="en-US" dirty="0"/>
-              <a:t>Conditions for Pareto Efficiency</a:t>
-            </a:r>
-          </a:p>
-        </p:txBody>
-      </p:sp>
-      <p:sp>
-        <p:nvSpPr>
-          <p:cNvPr id="3" name="Content Placeholder 2"/>
-          <p:cNvSpPr>
-            <a:spLocks noGrp="1"/>
-          </p:cNvSpPr>
-          <p:nvPr>
-            <p:ph idx="1"/>
-          </p:nvPr>
-        </p:nvSpPr>
-        <p:spPr>
-          <a:xfrm>
-            <a:off x="609600" y="2057400"/>
-            <a:ext cx="10972800" cy="4495800"/>
-          </a:xfrm>
-        </p:spPr>
-        <p:txBody>
-          <a:bodyPr>
-            <a:normAutofit/>
-          </a:bodyPr>
-          <a:lstStyle/>
-          <a:p>
-            <a:pPr marL="514350" indent="-514350">
-              <a:buFont typeface="+mj-lt"/>
-              <a:buAutoNum type="arabicPeriod"/>
-            </a:pPr>
-            <a:r>
-              <a:rPr lang="en-US" dirty="0"/>
-              <a:t>Exchange Efficiency</a:t>
-            </a:r>
-          </a:p>
-          <a:p>
-            <a:pPr lvl="1"/>
-            <a:r>
-              <a:rPr lang="en-US" dirty="0"/>
-              <a:t>There cannot be any scope for mutually advantageous trade </a:t>
-            </a:r>
-            <a:br>
-              <a:rPr lang="en-US" dirty="0"/>
-            </a:br>
-            <a:r>
-              <a:rPr lang="en-US" dirty="0"/>
-              <a:t>in final goods</a:t>
-            </a:r>
-          </a:p>
-          <a:p>
-            <a:pPr marL="514350" indent="-514350">
-              <a:buFont typeface="+mj-lt"/>
-              <a:buAutoNum type="arabicPeriod"/>
-            </a:pPr>
-            <a:r>
-              <a:rPr lang="en-US" dirty="0"/>
-              <a:t>Production Efficiency</a:t>
-            </a:r>
-          </a:p>
-          <a:p>
-            <a:pPr lvl="1"/>
-            <a:r>
-              <a:rPr lang="en-US" dirty="0"/>
-              <a:t>There cannot be any scope for Pareto improving reallocation of factors of production between their different uses.</a:t>
-            </a:r>
-          </a:p>
-        </p:txBody>
-      </p:sp>
-      <p:sp>
-        <p:nvSpPr>
-          <p:cNvPr id="4" name="Slide Number Placeholder 3"/>
-          <p:cNvSpPr>
-            <a:spLocks noGrp="1"/>
-          </p:cNvSpPr>
-          <p:nvPr>
-            <p:ph type="sldNum" sz="quarter" idx="12"/>
-          </p:nvPr>
-        </p:nvSpPr>
-        <p:spPr/>
-        <p:txBody>
-          <a:bodyPr/>
-          <a:lstStyle/>
-          <a:p>
-            <a:fld id="{CFF8E9C2-617A-4D65-AFBD-F489864C0492}" type="slidenum">
-              <a:rPr lang="en-US" smtClean="0"/>
-              <a:pPr/>
-              <a:t>19</a:t>
-            </a:fld>
-            <a:endParaRPr lang="en-US"/>
-          </a:p>
-        </p:txBody>
-      </p:sp>
-    </p:spTree>
-    <p:extLst>
-      <p:ext uri="{BB962C8B-B14F-4D97-AF65-F5344CB8AC3E}">
-        <p14:creationId xmlns:p14="http://schemas.microsoft.com/office/powerpoint/2010/main" val="3761780243"/>
-      </p:ext>
-    </p:extLst>
-  </p:cSld>
-  <p:clrMapOvr>
-    <a:masterClrMapping/>
-  </p:clrMapOvr>
-  <p:timing>
-    <p:tnLst>
-      <p:par>
-        <p:cTn id="1" dur="indefinite" restart="never" nodeType="tmRoot">
-          <p:childTnLst>
-            <p:seq concurrent="1" nextAc="seek">
-              <p:cTn id="2" dur="indefinite" nodeType="mainSeq">
-                <p:childTnLst>
-                  <p:par>
-                    <p:cTn id="3" fill="hold">
-                      <p:stCondLst>
-                        <p:cond delay="indefinite"/>
-                      </p:stCondLst>
-                      <p:childTnLst>
-                        <p:par>
-                          <p:cTn id="4" fill="hold">
-                            <p:stCondLst>
-                              <p:cond delay="0"/>
-                            </p:stCondLst>
-                            <p:childTnLst>
-                              <p:par>
-                                <p:cTn id="5" presetID="1" presetClass="entr" presetSubtype="0" fill="hold" nodeType="clickEffect">
-                                  <p:stCondLst>
-                                    <p:cond delay="0"/>
-                                  </p:stCondLst>
-                                  <p:childTnLst>
-                                    <p:set>
-                                      <p:cBhvr>
-                                        <p:cTn id="6" dur="1" fill="hold">
-                                          <p:stCondLst>
-                                            <p:cond delay="0"/>
-                                          </p:stCondLst>
-                                        </p:cTn>
-                                        <p:tgtEl>
-                                          <p:spTgt spid="3">
-                                            <p:txEl>
-                                              <p:pRg st="2" end="2"/>
-                                            </p:txEl>
-                                          </p:spTgt>
-                                        </p:tgtEl>
-                                        <p:attrNameLst>
-                                          <p:attrName>style.visibility</p:attrName>
-                                        </p:attrNameLst>
-                                      </p:cBhvr>
-                                      <p:to>
-                                        <p:strVal val="visible"/>
-                                      </p:to>
-                                    </p:set>
-                                  </p:childTnLst>
-                                </p:cTn>
-                              </p:par>
-                              <p:par>
-                                <p:cTn id="7" presetID="1" presetClass="entr" presetSubtype="0" fill="hold" nodeType="withEffect">
-                                  <p:stCondLst>
-                                    <p:cond delay="0"/>
-                                  </p:stCondLst>
-                                  <p:childTnLst>
-                                    <p:set>
-                                      <p:cBhvr>
-                                        <p:cTn id="8" dur="1" fill="hold">
-                                          <p:stCondLst>
-                                            <p:cond delay="0"/>
-                                          </p:stCondLst>
-                                        </p:cTn>
-                                        <p:tgtEl>
-                                          <p:spTgt spid="3">
-                                            <p:txEl>
-                                              <p:pRg st="3" end="3"/>
-                                            </p:txEl>
-                                          </p:spTgt>
-                                        </p:tgtEl>
-                                        <p:attrNameLst>
-                                          <p:attrName>style.visibility</p:attrName>
-                                        </p:attrNameLst>
-                                      </p:cBhvr>
-                                      <p:to>
-                                        <p:strVal val="visible"/>
-                                      </p:to>
-                                    </p:set>
-                                  </p:childTnLst>
-                                </p:cTn>
-                              </p:par>
-                            </p:childTnLst>
-                          </p:cTn>
-                        </p:par>
-                      </p:childTnLst>
-                    </p:cTn>
-                  </p:par>
-                </p:childTnLst>
-              </p:cTn>
-              <p:prevCondLst>
-                <p:cond evt="onPrev" delay="0">
-                  <p:tgtEl>
-                    <p:sldTgt/>
-                  </p:tgtEl>
-                </p:cond>
-              </p:prevCondLst>
-              <p:nextCondLst>
-                <p:cond evt="onNext" delay="0">
-                  <p:tgtEl>
-                    <p:sldTgt/>
-                  </p:tgtEl>
-                </p:cond>
-              </p:nextCondLst>
-            </p:seq>
-          </p:childTnLst>
-        </p:cTn>
-      </p:par>
-    </p:tnLst>
-  </p:timing>
-</p:sld>
-</file>
-
 <file path=ppt/slides/slide2.xml><?xml version="1.0" encoding="utf-8"?>
 <p:sld xmlns:a="http://schemas.openxmlformats.org/drawingml/2006/main" xmlns:r="http://schemas.openxmlformats.org/officeDocument/2006/relationships" xmlns:p="http://schemas.openxmlformats.org/presentationml/2006/main">
   <p:cSld>
@@ -13155,6 +12863,256 @@
           <a:p>
             <a:r>
               <a:rPr lang="en-US" dirty="0"/>
+              <a:t>Conditions for Pareto Efficiency</a:t>
+            </a:r>
+          </a:p>
+        </p:txBody>
+      </p:sp>
+      <p:sp>
+        <p:nvSpPr>
+          <p:cNvPr id="3" name="Content Placeholder 2"/>
+          <p:cNvSpPr>
+            <a:spLocks noGrp="1"/>
+          </p:cNvSpPr>
+          <p:nvPr>
+            <p:ph idx="1"/>
+          </p:nvPr>
+        </p:nvSpPr>
+        <p:spPr>
+          <a:xfrm>
+            <a:off x="609600" y="2057400"/>
+            <a:ext cx="10972800" cy="4495800"/>
+          </a:xfrm>
+        </p:spPr>
+        <p:txBody>
+          <a:bodyPr>
+            <a:normAutofit/>
+          </a:bodyPr>
+          <a:lstStyle/>
+          <a:p>
+            <a:pPr marL="514350" indent="-514350">
+              <a:buFont typeface="+mj-lt"/>
+              <a:buAutoNum type="arabicPeriod"/>
+            </a:pPr>
+            <a:r>
+              <a:rPr lang="en-US" dirty="0"/>
+              <a:t>Exchange Efficiency</a:t>
+            </a:r>
+          </a:p>
+          <a:p>
+            <a:pPr lvl="1"/>
+            <a:r>
+              <a:rPr lang="en-US" dirty="0"/>
+              <a:t>There cannot be any scope for mutually advantageous trade </a:t>
+            </a:r>
+            <a:br>
+              <a:rPr lang="en-US" dirty="0"/>
+            </a:br>
+            <a:r>
+              <a:rPr lang="en-US" dirty="0"/>
+              <a:t>in final goods</a:t>
+            </a:r>
+          </a:p>
+          <a:p>
+            <a:pPr marL="514350" indent="-514350">
+              <a:buFont typeface="+mj-lt"/>
+              <a:buAutoNum type="arabicPeriod"/>
+            </a:pPr>
+            <a:r>
+              <a:rPr lang="en-US" dirty="0"/>
+              <a:t>Production Efficiency</a:t>
+            </a:r>
+          </a:p>
+          <a:p>
+            <a:pPr lvl="1"/>
+            <a:r>
+              <a:rPr lang="en-US" dirty="0"/>
+              <a:t>There cannot be any scope for Pareto improving reallocation of factors of production between their different uses.</a:t>
+            </a:r>
+          </a:p>
+        </p:txBody>
+      </p:sp>
+      <p:sp>
+        <p:nvSpPr>
+          <p:cNvPr id="4" name="Slide Number Placeholder 3"/>
+          <p:cNvSpPr>
+            <a:spLocks noGrp="1"/>
+          </p:cNvSpPr>
+          <p:nvPr>
+            <p:ph type="sldNum" sz="quarter" idx="12"/>
+          </p:nvPr>
+        </p:nvSpPr>
+        <p:spPr/>
+        <p:txBody>
+          <a:bodyPr/>
+          <a:lstStyle/>
+          <a:p>
+            <a:fld id="{CFF8E9C2-617A-4D65-AFBD-F489864C0492}" type="slidenum">
+              <a:rPr lang="en-US" smtClean="0"/>
+              <a:pPr/>
+              <a:t>20</a:t>
+            </a:fld>
+            <a:endParaRPr lang="en-US"/>
+          </a:p>
+        </p:txBody>
+      </p:sp>
+    </p:spTree>
+    <p:extLst>
+      <p:ext uri="{BB962C8B-B14F-4D97-AF65-F5344CB8AC3E}">
+        <p14:creationId xmlns:p14="http://schemas.microsoft.com/office/powerpoint/2010/main" val="3761780243"/>
+      </p:ext>
+    </p:extLst>
+  </p:cSld>
+  <p:clrMapOvr>
+    <a:masterClrMapping/>
+  </p:clrMapOvr>
+  <p:timing>
+    <p:tnLst>
+      <p:par>
+        <p:cTn id="1" dur="indefinite" restart="never" nodeType="tmRoot">
+          <p:childTnLst>
+            <p:seq concurrent="1" nextAc="seek">
+              <p:cTn id="2" dur="indefinite" nodeType="mainSeq">
+                <p:childTnLst>
+                  <p:par>
+                    <p:cTn id="3" fill="hold">
+                      <p:stCondLst>
+                        <p:cond delay="indefinite"/>
+                      </p:stCondLst>
+                      <p:childTnLst>
+                        <p:par>
+                          <p:cTn id="4" fill="hold">
+                            <p:stCondLst>
+                              <p:cond delay="0"/>
+                            </p:stCondLst>
+                            <p:childTnLst>
+                              <p:par>
+                                <p:cTn id="5" presetID="1" presetClass="entr" presetSubtype="0" fill="hold" nodeType="clickEffect">
+                                  <p:stCondLst>
+                                    <p:cond delay="0"/>
+                                  </p:stCondLst>
+                                  <p:childTnLst>
+                                    <p:set>
+                                      <p:cBhvr>
+                                        <p:cTn id="6" dur="1" fill="hold">
+                                          <p:stCondLst>
+                                            <p:cond delay="0"/>
+                                          </p:stCondLst>
+                                        </p:cTn>
+                                        <p:tgtEl>
+                                          <p:spTgt spid="3">
+                                            <p:txEl>
+                                              <p:pRg st="2" end="2"/>
+                                            </p:txEl>
+                                          </p:spTgt>
+                                        </p:tgtEl>
+                                        <p:attrNameLst>
+                                          <p:attrName>style.visibility</p:attrName>
+                                        </p:attrNameLst>
+                                      </p:cBhvr>
+                                      <p:to>
+                                        <p:strVal val="visible"/>
+                                      </p:to>
+                                    </p:set>
+                                  </p:childTnLst>
+                                </p:cTn>
+                              </p:par>
+                              <p:par>
+                                <p:cTn id="7" presetID="1" presetClass="entr" presetSubtype="0" fill="hold" nodeType="withEffect">
+                                  <p:stCondLst>
+                                    <p:cond delay="0"/>
+                                  </p:stCondLst>
+                                  <p:childTnLst>
+                                    <p:set>
+                                      <p:cBhvr>
+                                        <p:cTn id="8" dur="1" fill="hold">
+                                          <p:stCondLst>
+                                            <p:cond delay="0"/>
+                                          </p:stCondLst>
+                                        </p:cTn>
+                                        <p:tgtEl>
+                                          <p:spTgt spid="3">
+                                            <p:txEl>
+                                              <p:pRg st="3" end="3"/>
+                                            </p:txEl>
+                                          </p:spTgt>
+                                        </p:tgtEl>
+                                        <p:attrNameLst>
+                                          <p:attrName>style.visibility</p:attrName>
+                                        </p:attrNameLst>
+                                      </p:cBhvr>
+                                      <p:to>
+                                        <p:strVal val="visible"/>
+                                      </p:to>
+                                    </p:set>
+                                  </p:childTnLst>
+                                </p:cTn>
+                              </p:par>
+                            </p:childTnLst>
+                          </p:cTn>
+                        </p:par>
+                      </p:childTnLst>
+                    </p:cTn>
+                  </p:par>
+                </p:childTnLst>
+              </p:cTn>
+              <p:prevCondLst>
+                <p:cond evt="onPrev" delay="0">
+                  <p:tgtEl>
+                    <p:sldTgt/>
+                  </p:tgtEl>
+                </p:cond>
+              </p:prevCondLst>
+              <p:nextCondLst>
+                <p:cond evt="onNext" delay="0">
+                  <p:tgtEl>
+                    <p:sldTgt/>
+                  </p:tgtEl>
+                </p:cond>
+              </p:nextCondLst>
+            </p:seq>
+          </p:childTnLst>
+        </p:cTn>
+      </p:par>
+    </p:tnLst>
+  </p:timing>
+</p:sld>
+</file>
+
+<file path=ppt/slides/slide21.xml><?xml version="1.0" encoding="utf-8"?>
+<p:sld xmlns:a="http://schemas.openxmlformats.org/drawingml/2006/main" xmlns:r="http://schemas.openxmlformats.org/officeDocument/2006/relationships" xmlns:p="http://schemas.openxmlformats.org/presentationml/2006/main">
+  <p:cSld>
+    <p:spTree>
+      <p:nvGrpSpPr>
+        <p:cNvPr id="1" name=""/>
+        <p:cNvGrpSpPr/>
+        <p:nvPr/>
+      </p:nvGrpSpPr>
+      <p:grpSpPr>
+        <a:xfrm>
+          <a:off x="0" y="0"/>
+          <a:ext cx="0" cy="0"/>
+          <a:chOff x="0" y="0"/>
+          <a:chExt cx="0" cy="0"/>
+        </a:xfrm>
+      </p:grpSpPr>
+      <p:sp>
+        <p:nvSpPr>
+          <p:cNvPr id="2" name="Title 1"/>
+          <p:cNvSpPr>
+            <a:spLocks noGrp="1"/>
+          </p:cNvSpPr>
+          <p:nvPr>
+            <p:ph type="title"/>
+          </p:nvPr>
+        </p:nvSpPr>
+        <p:spPr/>
+        <p:txBody>
+          <a:bodyPr/>
+          <a:lstStyle/>
+          <a:p>
+            <a:r>
+              <a:rPr lang="en-US" dirty="0"/>
               <a:t>Exchange Efficiency</a:t>
             </a:r>
           </a:p>
@@ -13193,8 +13151,8 @@
                     <m:sSubSup>
                       <m:sSubSupPr>
                         <m:ctrlPr>
-                          <a:rPr lang="en-US" i="1" smtClean="0">
-                            <a:latin typeface="Cambria Math" panose="02040503050406030204" pitchFamily="18" charset="0"/>
+                          <a:rPr lang="en-US" b="0" i="1" smtClean="0">
+                            <a:latin typeface="Cambria Math"/>
                           </a:rPr>
                         </m:ctrlPr>
                       </m:sSubSupPr>
@@ -13325,7 +13283,7 @@
             <a:fld id="{CFF8E9C2-617A-4D65-AFBD-F489864C0492}" type="slidenum">
               <a:rPr lang="en-US" smtClean="0"/>
               <a:pPr/>
-              <a:t>20</a:t>
+              <a:t>21</a:t>
             </a:fld>
             <a:endParaRPr lang="en-US"/>
           </a:p>
@@ -13503,7 +13461,7 @@
 </p:sld>
 </file>
 
-<file path=ppt/slides/slide21.xml><?xml version="1.0" encoding="utf-8"?>
+<file path=ppt/slides/slide22.xml><?xml version="1.0" encoding="utf-8"?>
 <p:sld xmlns:a="http://schemas.openxmlformats.org/drawingml/2006/main" xmlns:r="http://schemas.openxmlformats.org/officeDocument/2006/relationships" xmlns:p="http://schemas.openxmlformats.org/presentationml/2006/main">
   <p:cSld>
     <p:spTree>
@@ -13709,7 +13667,7 @@
             <a:fld id="{CFF8E9C2-617A-4D65-AFBD-F489864C0492}" type="slidenum">
               <a:rPr lang="en-US" smtClean="0"/>
               <a:pPr/>
-              <a:t>21</a:t>
+              <a:t>22</a:t>
             </a:fld>
             <a:endParaRPr lang="en-US"/>
           </a:p>
@@ -13807,7 +13765,7 @@
 </p:sld>
 </file>
 
-<file path=ppt/slides/slide22.xml><?xml version="1.0" encoding="utf-8"?>
+<file path=ppt/slides/slide23.xml><?xml version="1.0" encoding="utf-8"?>
 <p:sld xmlns:a="http://schemas.openxmlformats.org/drawingml/2006/main" xmlns:r="http://schemas.openxmlformats.org/officeDocument/2006/relationships" xmlns:p="http://schemas.openxmlformats.org/presentationml/2006/main">
   <p:cSld>
     <p:spTree>
@@ -13879,15 +13837,12 @@
                 </a:pPr>
                 <a14:m>
                   <m:oMathPara xmlns:m="http://schemas.openxmlformats.org/officeDocument/2006/math">
-                    <m:oMathParaPr>
-                      <m:jc m:val="centerGroup"/>
-                    </m:oMathParaPr>
-                    <m:oMath xmlns:m="http://schemas.openxmlformats.org/officeDocument/2006/math">
+                    <m:oMath>
                       <m:sSubSup>
                         <m:sSubSupPr>
                           <m:ctrlPr>
                             <a:rPr lang="en-US" i="1">
-                              <a:latin typeface="Cambria Math" panose="02040503050406030204" pitchFamily="18" charset="0"/>
+                              <a:latin typeface="Cambria Math"/>
                             </a:rPr>
                           </m:ctrlPr>
                         </m:sSubSupPr>
@@ -13938,7 +13893,7 @@
                         <m:fPr>
                           <m:ctrlPr>
                             <a:rPr lang="en-US" i="1">
-                              <a:latin typeface="Cambria Math" panose="02040503050406030204" pitchFamily="18" charset="0"/>
+                              <a:latin typeface="Cambria Math"/>
                             </a:rPr>
                           </m:ctrlPr>
                         </m:fPr>
@@ -13961,7 +13916,7 @@
                             <m:sSubPr>
                               <m:ctrlPr>
                                 <a:rPr lang="en-US" i="1">
-                                  <a:latin typeface="Cambria Math" panose="02040503050406030204" pitchFamily="18" charset="0"/>
+                                  <a:latin typeface="Cambria Math"/>
                                 </a:rPr>
                               </m:ctrlPr>
                             </m:sSubPr>
@@ -14000,7 +13955,7 @@
                         <m:sSubPr>
                           <m:ctrlPr>
                             <a:rPr lang="en-US" i="1">
-                              <a:latin typeface="Cambria Math" panose="02040503050406030204" pitchFamily="18" charset="0"/>
+                              <a:latin typeface="Cambria Math"/>
                             </a:rPr>
                           </m:ctrlPr>
                         </m:sSubPr>
@@ -14034,7 +13989,7 @@
                             <m:sSubSupPr>
                               <m:ctrlPr>
                                 <a:rPr lang="en-US" i="1">
-                                  <a:latin typeface="Cambria Math" panose="02040503050406030204" pitchFamily="18" charset="0"/>
+                                  <a:latin typeface="Cambria Math"/>
                                 </a:rPr>
                               </m:ctrlPr>
                             </m:sSubSupPr>
@@ -14086,7 +14041,7 @@
                             <m:sSubSupPr>
                               <m:ctrlPr>
                                 <a:rPr lang="en-US" i="1">
-                                  <a:latin typeface="Cambria Math" panose="02040503050406030204" pitchFamily="18" charset="0"/>
+                                  <a:latin typeface="Cambria Math"/>
                                 </a:rPr>
                               </m:ctrlPr>
                             </m:sSubSupPr>
@@ -14137,7 +14092,7 @@
                             <m:sSubSupPr>
                               <m:ctrlPr>
                                 <a:rPr lang="en-US" i="1">
-                                  <a:latin typeface="Cambria Math" panose="02040503050406030204" pitchFamily="18" charset="0"/>
+                                  <a:latin typeface="Cambria Math"/>
                                 </a:rPr>
                               </m:ctrlPr>
                             </m:sSubSupPr>
@@ -14197,7 +14152,7 @@
                       <m:sSubSupPr>
                         <m:ctrlPr>
                           <a:rPr lang="en-US" i="1">
-                            <a:latin typeface="Cambria Math" panose="02040503050406030204" pitchFamily="18" charset="0"/>
+                            <a:latin typeface="Cambria Math"/>
                           </a:rPr>
                         </m:ctrlPr>
                       </m:sSubSupPr>
@@ -14250,7 +14205,7 @@
                       <m:sSubPr>
                         <m:ctrlPr>
                           <a:rPr lang="en-US" i="1">
-                            <a:latin typeface="Cambria Math" panose="02040503050406030204" pitchFamily="18" charset="0"/>
+                            <a:latin typeface="Cambria Math"/>
                           </a:rPr>
                         </m:ctrlPr>
                       </m:sSubPr>
@@ -14283,7 +14238,7 @@
                       <m:sSubPr>
                         <m:ctrlPr>
                           <a:rPr lang="en-US" i="1">
-                            <a:latin typeface="Cambria Math" panose="02040503050406030204" pitchFamily="18" charset="0"/>
+                            <a:latin typeface="Cambria Math"/>
                           </a:rPr>
                         </m:ctrlPr>
                       </m:sSubPr>
@@ -14337,7 +14292,7 @@
                           <m:sSubSupPr>
                             <m:ctrlPr>
                               <a:rPr lang="en-US" i="1">
-                                <a:latin typeface="Cambria Math" panose="02040503050406030204" pitchFamily="18" charset="0"/>
+                                <a:latin typeface="Cambria Math"/>
                               </a:rPr>
                             </m:ctrlPr>
                           </m:sSubSupPr>
@@ -14389,7 +14344,7 @@
                           <m:sSubSupPr>
                             <m:ctrlPr>
                               <a:rPr lang="en-US" i="1">
-                                <a:latin typeface="Cambria Math" panose="02040503050406030204" pitchFamily="18" charset="0"/>
+                                <a:latin typeface="Cambria Math"/>
                               </a:rPr>
                             </m:ctrlPr>
                           </m:sSubSupPr>
@@ -14440,7 +14395,7 @@
                           <m:sSubSupPr>
                             <m:ctrlPr>
                               <a:rPr lang="en-US" i="1">
-                                <a:latin typeface="Cambria Math" panose="02040503050406030204" pitchFamily="18" charset="0"/>
+                                <a:latin typeface="Cambria Math"/>
                               </a:rPr>
                             </m:ctrlPr>
                           </m:sSubSupPr>
@@ -14555,7 +14510,7 @@
             <a:fld id="{CFF8E9C2-617A-4D65-AFBD-F489864C0492}" type="slidenum">
               <a:rPr lang="en-US" smtClean="0"/>
               <a:pPr/>
-              <a:t>22</a:t>
+              <a:t>23</a:t>
             </a:fld>
             <a:endParaRPr lang="en-US"/>
           </a:p>
@@ -14574,7 +14529,7 @@
 </p:sld>
 </file>
 
-<file path=ppt/slides/slide23.xml><?xml version="1.0" encoding="utf-8"?>
+<file path=ppt/slides/slide24.xml><?xml version="1.0" encoding="utf-8"?>
 <p:sld xmlns:a="http://schemas.openxmlformats.org/drawingml/2006/main" xmlns:r="http://schemas.openxmlformats.org/officeDocument/2006/relationships" xmlns:p="http://schemas.openxmlformats.org/presentationml/2006/main">
   <p:cSld>
     <p:spTree>
@@ -14647,15 +14602,12 @@
                 </a:pPr>
                 <a14:m>
                   <m:oMathPara xmlns:m="http://schemas.openxmlformats.org/officeDocument/2006/math">
-                    <m:oMathParaPr>
-                      <m:jc m:val="centerGroup"/>
-                    </m:oMathParaPr>
-                    <m:oMath xmlns:m="http://schemas.openxmlformats.org/officeDocument/2006/math">
+                    <m:oMath>
                       <m:sSub>
                         <m:sSubPr>
                           <m:ctrlPr>
                             <a:rPr lang="en-US" i="1">
-                              <a:latin typeface="Cambria Math" panose="02040503050406030204" pitchFamily="18" charset="0"/>
+                              <a:latin typeface="Cambria Math"/>
                             </a:rPr>
                           </m:ctrlPr>
                         </m:sSubPr>
@@ -14689,7 +14641,7 @@
                             <m:sSubSupPr>
                               <m:ctrlPr>
                                 <a:rPr lang="en-US" i="1">
-                                  <a:latin typeface="Cambria Math" panose="02040503050406030204" pitchFamily="18" charset="0"/>
+                                  <a:latin typeface="Cambria Math"/>
                                 </a:rPr>
                               </m:ctrlPr>
                             </m:sSubSupPr>
@@ -14754,7 +14706,7 @@
                             <m:sSubSupPr>
                               <m:ctrlPr>
                                 <a:rPr lang="en-US" i="1">
-                                  <a:latin typeface="Cambria Math" panose="02040503050406030204" pitchFamily="18" charset="0"/>
+                                  <a:latin typeface="Cambria Math"/>
                                 </a:rPr>
                               </m:ctrlPr>
                             </m:sSubSupPr>
@@ -14818,7 +14770,7 @@
                             <m:sSubSupPr>
                               <m:ctrlPr>
                                 <a:rPr lang="en-US" i="1">
-                                  <a:latin typeface="Cambria Math" panose="02040503050406030204" pitchFamily="18" charset="0"/>
+                                  <a:latin typeface="Cambria Math"/>
                                 </a:rPr>
                               </m:ctrlPr>
                             </m:sSubSupPr>
@@ -14920,10 +14872,7 @@
                 </a:pPr>
                 <a14:m>
                   <m:oMathPara xmlns:m="http://schemas.openxmlformats.org/officeDocument/2006/math">
-                    <m:oMathParaPr>
-                      <m:jc m:val="centerGroup"/>
-                    </m:oMathParaPr>
-                    <m:oMath xmlns:m="http://schemas.openxmlformats.org/officeDocument/2006/math">
+                    <m:oMath>
                       <m:f>
                         <m:fPr>
                           <m:ctrlPr>
@@ -14995,7 +14944,7 @@
                         <m:sSubSupPr>
                           <m:ctrlPr>
                             <a:rPr lang="en-US" i="1">
-                              <a:latin typeface="Cambria Math" panose="02040503050406030204" pitchFamily="18" charset="0"/>
+                              <a:latin typeface="Cambria Math"/>
                             </a:rPr>
                           </m:ctrlPr>
                         </m:sSubSupPr>
@@ -15054,7 +15003,7 @@
                         <m:sSubSupPr>
                           <m:ctrlPr>
                             <a:rPr lang="en-US" i="1">
-                              <a:latin typeface="Cambria Math" panose="02040503050406030204" pitchFamily="18" charset="0"/>
+                              <a:latin typeface="Cambria Math"/>
                             </a:rPr>
                           </m:ctrlPr>
                         </m:sSubSupPr>
@@ -15175,15 +15124,12 @@
                 </a:pPr>
                 <a14:m>
                   <m:oMathPara xmlns:m="http://schemas.openxmlformats.org/officeDocument/2006/math">
-                    <m:oMathParaPr>
-                      <m:jc m:val="centerGroup"/>
-                    </m:oMathParaPr>
-                    <m:oMath xmlns:m="http://schemas.openxmlformats.org/officeDocument/2006/math">
+                    <m:oMath>
                       <m:sSub>
                         <m:sSubPr>
                           <m:ctrlPr>
                             <a:rPr lang="en-US" i="1">
-                              <a:latin typeface="Cambria Math" panose="02040503050406030204" pitchFamily="18" charset="0"/>
+                              <a:latin typeface="Cambria Math"/>
                             </a:rPr>
                           </m:ctrlPr>
                         </m:sSubPr>
@@ -15217,7 +15163,7 @@
                             <m:sSubSupPr>
                               <m:ctrlPr>
                                 <a:rPr lang="en-US" i="1">
-                                  <a:latin typeface="Cambria Math" panose="02040503050406030204" pitchFamily="18" charset="0"/>
+                                  <a:latin typeface="Cambria Math"/>
                                 </a:rPr>
                               </m:ctrlPr>
                             </m:sSubSupPr>
@@ -15282,7 +15228,7 @@
                             <m:sSubSupPr>
                               <m:ctrlPr>
                                 <a:rPr lang="en-US" i="1">
-                                  <a:latin typeface="Cambria Math" panose="02040503050406030204" pitchFamily="18" charset="0"/>
+                                  <a:latin typeface="Cambria Math"/>
                                 </a:rPr>
                               </m:ctrlPr>
                             </m:sSubSupPr>
@@ -15346,7 +15292,7 @@
                             <m:sSubSupPr>
                               <m:ctrlPr>
                                 <a:rPr lang="en-US" i="1">
-                                  <a:latin typeface="Cambria Math" panose="02040503050406030204" pitchFamily="18" charset="0"/>
+                                  <a:latin typeface="Cambria Math"/>
                                 </a:rPr>
                               </m:ctrlPr>
                             </m:sSubSupPr>
@@ -15448,10 +15394,7 @@
                 </a:pPr>
                 <a14:m>
                   <m:oMathPara xmlns:m="http://schemas.openxmlformats.org/officeDocument/2006/math">
-                    <m:oMathParaPr>
-                      <m:jc m:val="centerGroup"/>
-                    </m:oMathParaPr>
-                    <m:oMath xmlns:m="http://schemas.openxmlformats.org/officeDocument/2006/math">
+                    <m:oMath>
                       <m:f>
                         <m:fPr>
                           <m:ctrlPr>
@@ -15524,7 +15467,7 @@
                         <m:sSubSupPr>
                           <m:ctrlPr>
                             <a:rPr lang="en-US" i="1">
-                              <a:latin typeface="Cambria Math" panose="02040503050406030204" pitchFamily="18" charset="0"/>
+                              <a:latin typeface="Cambria Math"/>
                             </a:rPr>
                           </m:ctrlPr>
                         </m:sSubSupPr>
@@ -15583,7 +15526,7 @@
                         <m:sSubSupPr>
                           <m:ctrlPr>
                             <a:rPr lang="en-US" i="1">
-                              <a:latin typeface="Cambria Math" panose="02040503050406030204" pitchFamily="18" charset="0"/>
+                              <a:latin typeface="Cambria Math"/>
                             </a:rPr>
                           </m:ctrlPr>
                         </m:sSubSupPr>
@@ -15693,7 +15636,7 @@
             <a:fld id="{CFF8E9C2-617A-4D65-AFBD-F489864C0492}" type="slidenum">
               <a:rPr lang="en-US" smtClean="0"/>
               <a:pPr/>
-              <a:t>23</a:t>
+              <a:t>24</a:t>
             </a:fld>
             <a:endParaRPr lang="en-US"/>
           </a:p>
@@ -15982,7 +15925,7 @@
 </p:sld>
 </file>
 
-<file path=ppt/slides/slide24.xml><?xml version="1.0" encoding="utf-8"?>
+<file path=ppt/slides/slide25.xml><?xml version="1.0" encoding="utf-8"?>
 <p:sld xmlns:a="http://schemas.openxmlformats.org/drawingml/2006/main" xmlns:r="http://schemas.openxmlformats.org/officeDocument/2006/relationships" xmlns:p="http://schemas.openxmlformats.org/presentationml/2006/main">
   <p:cSld>
     <p:spTree>
@@ -16185,10 +16128,7 @@
                 </a:pPr>
                 <a14:m>
                   <m:oMathPara xmlns:m="http://schemas.openxmlformats.org/officeDocument/2006/math">
-                    <m:oMathParaPr>
-                      <m:jc m:val="centerGroup"/>
-                    </m:oMathParaPr>
-                    <m:oMath xmlns:m="http://schemas.openxmlformats.org/officeDocument/2006/math">
+                    <m:oMath>
                       <m:f>
                         <m:fPr>
                           <m:ctrlPr>
@@ -16260,7 +16200,7 @@
                         <m:sSubSupPr>
                           <m:ctrlPr>
                             <a:rPr lang="en-US" i="1">
-                              <a:latin typeface="Cambria Math" panose="02040503050406030204" pitchFamily="18" charset="0"/>
+                              <a:latin typeface="Cambria Math"/>
                             </a:rPr>
                           </m:ctrlPr>
                         </m:sSubSupPr>
@@ -16319,7 +16259,7 @@
                         <m:sSubSupPr>
                           <m:ctrlPr>
                             <a:rPr lang="en-US" i="1">
-                              <a:latin typeface="Cambria Math" panose="02040503050406030204" pitchFamily="18" charset="0"/>
+                              <a:latin typeface="Cambria Math"/>
                             </a:rPr>
                           </m:ctrlPr>
                         </m:sSubSupPr>
@@ -16386,10 +16326,7 @@
                 </a:pPr>
                 <a14:m>
                   <m:oMathPara xmlns:m="http://schemas.openxmlformats.org/officeDocument/2006/math">
-                    <m:oMathParaPr>
-                      <m:jc m:val="centerGroup"/>
-                    </m:oMathParaPr>
-                    <m:oMath xmlns:m="http://schemas.openxmlformats.org/officeDocument/2006/math">
+                    <m:oMath>
                       <m:r>
                         <a:rPr lang="en-US" i="1">
                           <a:latin typeface="Cambria Math"/>
@@ -16409,7 +16346,6 @@
                           <m:ctrlPr>
                             <a:rPr lang="en-US" i="1">
                               <a:latin typeface="Cambria Math" panose="02040503050406030204" pitchFamily="18" charset="0"/>
-                              <a:ea typeface="Cambria Math"/>
                             </a:rPr>
                           </m:ctrlPr>
                         </m:fPr>
@@ -16418,7 +16354,7 @@
                             <m:sSubSupPr>
                               <m:ctrlPr>
                                 <a:rPr lang="en-US" i="1">
-                                  <a:latin typeface="Cambria Math" panose="02040503050406030204" pitchFamily="18" charset="0"/>
+                                  <a:latin typeface="Cambria Math"/>
                                 </a:rPr>
                               </m:ctrlPr>
                             </m:sSubSupPr>
@@ -16465,7 +16401,7 @@
                             <m:sSubSupPr>
                               <m:ctrlPr>
                                 <a:rPr lang="en-US" i="1">
-                                  <a:latin typeface="Cambria Math" panose="02040503050406030204" pitchFamily="18" charset="0"/>
+                                  <a:latin typeface="Cambria Math"/>
                                 </a:rPr>
                               </m:ctrlPr>
                             </m:sSubSupPr>
@@ -16574,7 +16510,7 @@
             <a:fld id="{CFF8E9C2-617A-4D65-AFBD-F489864C0492}" type="slidenum">
               <a:rPr lang="en-US" smtClean="0"/>
               <a:pPr/>
-              <a:t>24</a:t>
+              <a:t>25</a:t>
             </a:fld>
             <a:endParaRPr lang="en-US"/>
           </a:p>
@@ -16868,7 +16804,7 @@
 </p:sld>
 </file>
 
-<file path=ppt/slides/slide25.xml><?xml version="1.0" encoding="utf-8"?>
+<file path=ppt/slides/slide26.xml><?xml version="1.0" encoding="utf-8"?>
 <p:sld xmlns:a="http://schemas.openxmlformats.org/drawingml/2006/main" xmlns:r="http://schemas.openxmlformats.org/officeDocument/2006/relationships" xmlns:p="http://schemas.openxmlformats.org/presentationml/2006/main">
   <p:cSld>
     <p:spTree>
@@ -16957,14 +16893,11 @@
                 </a:pPr>
                 <a14:m>
                   <m:oMathPara xmlns:m="http://schemas.openxmlformats.org/officeDocument/2006/math">
-                    <m:oMathParaPr>
-                      <m:jc m:val="centerGroup"/>
-                    </m:oMathParaPr>
-                    <m:oMath xmlns:m="http://schemas.openxmlformats.org/officeDocument/2006/math">
+                    <m:oMath>
                       <m:f>
                         <m:fPr>
                           <m:ctrlPr>
-                            <a:rPr lang="en-US" i="1">
+                            <a:rPr lang="en-US" b="0" i="1" smtClean="0">
                               <a:latin typeface="Cambria Math" panose="02040503050406030204" pitchFamily="18" charset="0"/>
                             </a:rPr>
                           </m:ctrlPr>
@@ -17033,7 +16966,7 @@
                         <m:sSubSupPr>
                           <m:ctrlPr>
                             <a:rPr lang="en-US" i="1">
-                              <a:latin typeface="Cambria Math" panose="02040503050406030204" pitchFamily="18" charset="0"/>
+                              <a:latin typeface="Cambria Math"/>
                             </a:rPr>
                           </m:ctrlPr>
                         </m:sSubSupPr>
@@ -17079,7 +17012,6 @@
                           <m:ctrlPr>
                             <a:rPr lang="en-US" i="1">
                               <a:latin typeface="Cambria Math" panose="02040503050406030204" pitchFamily="18" charset="0"/>
-                              <a:ea typeface="Cambria Math"/>
                             </a:rPr>
                           </m:ctrlPr>
                         </m:fPr>
@@ -17088,7 +17020,7 @@
                             <m:sSubSupPr>
                               <m:ctrlPr>
                                 <a:rPr lang="en-US" i="1">
-                                  <a:latin typeface="Cambria Math" panose="02040503050406030204" pitchFamily="18" charset="0"/>
+                                  <a:latin typeface="Cambria Math"/>
                                 </a:rPr>
                               </m:ctrlPr>
                             </m:sSubSupPr>
@@ -17135,7 +17067,7 @@
                             <m:sSubSupPr>
                               <m:ctrlPr>
                                 <a:rPr lang="en-US" i="1">
-                                  <a:latin typeface="Cambria Math" panose="02040503050406030204" pitchFamily="18" charset="0"/>
+                                  <a:latin typeface="Cambria Math"/>
                                 </a:rPr>
                               </m:ctrlPr>
                             </m:sSubSupPr>
@@ -17188,7 +17120,7 @@
                         <m:sSubSupPr>
                           <m:ctrlPr>
                             <a:rPr lang="en-US" i="1">
-                              <a:latin typeface="Cambria Math" panose="02040503050406030204" pitchFamily="18" charset="0"/>
+                              <a:latin typeface="Cambria Math"/>
                             </a:rPr>
                           </m:ctrlPr>
                         </m:sSubSupPr>
@@ -17331,7 +17263,7 @@
             <a:fld id="{CFF8E9C2-617A-4D65-AFBD-F489864C0492}" type="slidenum">
               <a:rPr lang="en-US" smtClean="0"/>
               <a:pPr/>
-              <a:t>25</a:t>
+              <a:t>26</a:t>
             </a:fld>
             <a:endParaRPr lang="en-US"/>
           </a:p>
@@ -17509,7 +17441,641 @@
 </p:sld>
 </file>
 
-<file path=ppt/slides/slide26.xml><?xml version="1.0" encoding="utf-8"?>
+<file path=ppt/slides/slide27.xml><?xml version="1.0" encoding="utf-8"?>
+<p:sld xmlns:a="http://schemas.openxmlformats.org/drawingml/2006/main" xmlns:r="http://schemas.openxmlformats.org/officeDocument/2006/relationships" xmlns:p="http://schemas.openxmlformats.org/presentationml/2006/main">
+  <p:cSld>
+    <p:spTree>
+      <p:nvGrpSpPr>
+        <p:cNvPr id="1" name=""/>
+        <p:cNvGrpSpPr/>
+        <p:nvPr/>
+      </p:nvGrpSpPr>
+      <p:grpSpPr>
+        <a:xfrm>
+          <a:off x="0" y="0"/>
+          <a:ext cx="0" cy="0"/>
+          <a:chOff x="0" y="0"/>
+          <a:chExt cx="0" cy="0"/>
+        </a:xfrm>
+      </p:grpSpPr>
+      <p:sp>
+        <p:nvSpPr>
+          <p:cNvPr id="2" name="Title 1">
+            <a:extLst>
+              <a:ext uri="{FF2B5EF4-FFF2-40B4-BE49-F238E27FC236}">
+                <a16:creationId xmlns:a16="http://schemas.microsoft.com/office/drawing/2014/main" id="{8D3B8AC3-7880-AED7-F70C-7DCA9E304D49}"/>
+              </a:ext>
+            </a:extLst>
+          </p:cNvPr>
+          <p:cNvSpPr>
+            <a:spLocks noGrp="1"/>
+          </p:cNvSpPr>
+          <p:nvPr>
+            <p:ph type="title"/>
+          </p:nvPr>
+        </p:nvSpPr>
+        <p:spPr/>
+        <p:txBody>
+          <a:bodyPr/>
+          <a:lstStyle/>
+          <a:p>
+            <a:r>
+              <a:rPr lang="is-IS" dirty="0"/>
+              <a:t>iClicker Poll</a:t>
+            </a:r>
+            <a:endParaRPr lang="en-US" dirty="0"/>
+          </a:p>
+        </p:txBody>
+      </p:sp>
+      <mc:AlternateContent xmlns:mc="http://schemas.openxmlformats.org/markup-compatibility/2006" xmlns:a14="http://schemas.microsoft.com/office/drawing/2010/main">
+        <mc:Choice Requires="a14">
+          <p:sp>
+            <p:nvSpPr>
+              <p:cNvPr id="3" name="Content Placeholder 2">
+                <a:extLst>
+                  <a:ext uri="{FF2B5EF4-FFF2-40B4-BE49-F238E27FC236}">
+                    <a16:creationId xmlns:a16="http://schemas.microsoft.com/office/drawing/2014/main" id="{D64D9254-EA68-C36D-6664-EC6AB7A8A737}"/>
+                  </a:ext>
+                </a:extLst>
+              </p:cNvPr>
+              <p:cNvSpPr>
+                <a:spLocks noGrp="1"/>
+              </p:cNvSpPr>
+              <p:nvPr>
+                <p:ph idx="1"/>
+              </p:nvPr>
+            </p:nvSpPr>
+            <p:spPr>
+              <a:xfrm>
+                <a:off x="609600" y="1600201"/>
+                <a:ext cx="10972800" cy="4876799"/>
+              </a:xfrm>
+            </p:spPr>
+            <p:txBody>
+              <a:bodyPr/>
+              <a:lstStyle/>
+              <a:p>
+                <a:r>
+                  <a:rPr lang="is-IS" dirty="0"/>
+                  <a:t>Suppose </a:t>
+                </a:r>
+                <a14:m>
+                  <m:oMath xmlns:m="http://schemas.openxmlformats.org/officeDocument/2006/math">
+                    <m:sSubSup>
+                      <m:sSubSupPr>
+                        <m:ctrlPr>
+                          <a:rPr lang="en-US" i="1">
+                            <a:latin typeface="Cambria Math"/>
+                          </a:rPr>
+                        </m:ctrlPr>
+                      </m:sSubSupPr>
+                      <m:e>
+                        <m:r>
+                          <a:rPr lang="en-US" i="1">
+                            <a:latin typeface="Cambria Math"/>
+                          </a:rPr>
+                          <m:t>𝑈</m:t>
+                        </m:r>
+                      </m:e>
+                      <m:sub>
+                        <m:r>
+                          <a:rPr lang="en-US" i="1">
+                            <a:latin typeface="Cambria Math" panose="02040503050406030204" pitchFamily="18" charset="0"/>
+                          </a:rPr>
+                          <m:t>𝐹</m:t>
+                        </m:r>
+                        <m:r>
+                          <a:rPr lang="en-US" i="1">
+                            <a:latin typeface="Cambria Math"/>
+                          </a:rPr>
+                          <m:t>,</m:t>
+                        </m:r>
+                        <m:r>
+                          <a:rPr lang="en-US" i="1">
+                            <a:latin typeface="Cambria Math"/>
+                          </a:rPr>
+                          <m:t>𝐶</m:t>
+                        </m:r>
+                      </m:sub>
+                      <m:sup>
+                        <m:r>
+                          <a:rPr lang="en-US" i="1">
+                            <a:latin typeface="Cambria Math"/>
+                          </a:rPr>
+                          <m:t>∗</m:t>
+                        </m:r>
+                      </m:sup>
+                    </m:sSubSup>
+                    <m:f>
+                      <m:fPr>
+                        <m:ctrlPr>
+                          <a:rPr lang="en-US" i="1">
+                            <a:latin typeface="Cambria Math" panose="02040503050406030204" pitchFamily="18" charset="0"/>
+                          </a:rPr>
+                        </m:ctrlPr>
+                      </m:fPr>
+                      <m:num>
+                        <m:sSubSup>
+                          <m:sSubSupPr>
+                            <m:ctrlPr>
+                              <a:rPr lang="en-US" i="1">
+                                <a:latin typeface="Cambria Math"/>
+                              </a:rPr>
+                            </m:ctrlPr>
+                          </m:sSubSupPr>
+                          <m:e>
+                            <m:r>
+                              <a:rPr lang="en-US" i="1">
+                                <a:latin typeface="Cambria Math"/>
+                              </a:rPr>
+                              <m:t>𝑈</m:t>
+                            </m:r>
+                          </m:e>
+                          <m:sub>
+                            <m:r>
+                              <a:rPr lang="en-US" i="1">
+                                <a:latin typeface="Cambria Math"/>
+                              </a:rPr>
+                              <m:t>𝑅</m:t>
+                            </m:r>
+                            <m:r>
+                              <a:rPr lang="en-US" i="1">
+                                <a:latin typeface="Cambria Math"/>
+                              </a:rPr>
+                              <m:t>,</m:t>
+                            </m:r>
+                            <m:r>
+                              <a:rPr lang="is-IS" i="1">
+                                <a:latin typeface="Cambria Math" panose="02040503050406030204" pitchFamily="18" charset="0"/>
+                              </a:rPr>
+                              <m:t>𝑆</m:t>
+                            </m:r>
+                          </m:sub>
+                          <m:sup>
+                            <m:r>
+                              <a:rPr lang="en-US" i="1">
+                                <a:latin typeface="Cambria Math"/>
+                              </a:rPr>
+                              <m:t>∗</m:t>
+                            </m:r>
+                          </m:sup>
+                        </m:sSubSup>
+                      </m:num>
+                      <m:den>
+                        <m:sSubSup>
+                          <m:sSubSupPr>
+                            <m:ctrlPr>
+                              <a:rPr lang="en-US" i="1">
+                                <a:latin typeface="Cambria Math"/>
+                              </a:rPr>
+                            </m:ctrlPr>
+                          </m:sSubSupPr>
+                          <m:e>
+                            <m:r>
+                              <a:rPr lang="en-US" i="1">
+                                <a:latin typeface="Cambria Math"/>
+                              </a:rPr>
+                              <m:t>𝑈</m:t>
+                            </m:r>
+                          </m:e>
+                          <m:sub>
+                            <m:r>
+                              <a:rPr lang="en-US" i="1">
+                                <a:latin typeface="Cambria Math"/>
+                              </a:rPr>
+                              <m:t>𝑅</m:t>
+                            </m:r>
+                            <m:r>
+                              <a:rPr lang="en-US" i="1">
+                                <a:latin typeface="Cambria Math"/>
+                              </a:rPr>
+                              <m:t>,</m:t>
+                            </m:r>
+                            <m:r>
+                              <a:rPr lang="is-IS" i="1">
+                                <a:latin typeface="Cambria Math" panose="02040503050406030204" pitchFamily="18" charset="0"/>
+                              </a:rPr>
+                              <m:t>𝐶</m:t>
+                            </m:r>
+                          </m:sub>
+                          <m:sup>
+                            <m:r>
+                              <a:rPr lang="en-US" i="1">
+                                <a:latin typeface="Cambria Math"/>
+                              </a:rPr>
+                              <m:t>∗</m:t>
+                            </m:r>
+                          </m:sup>
+                        </m:sSubSup>
+                      </m:den>
+                    </m:f>
+                    <m:r>
+                      <a:rPr lang="en-US" i="1">
+                        <a:latin typeface="Cambria Math" panose="02040503050406030204" pitchFamily="18" charset="0"/>
+                      </a:rPr>
+                      <m:t>−</m:t>
+                    </m:r>
+                    <m:sSubSup>
+                      <m:sSubSupPr>
+                        <m:ctrlPr>
+                          <a:rPr lang="en-US" i="1">
+                            <a:latin typeface="Cambria Math"/>
+                          </a:rPr>
+                        </m:ctrlPr>
+                      </m:sSubSupPr>
+                      <m:e>
+                        <m:r>
+                          <a:rPr lang="en-US" i="1">
+                            <a:latin typeface="Cambria Math"/>
+                          </a:rPr>
+                          <m:t>𝑈</m:t>
+                        </m:r>
+                      </m:e>
+                      <m:sub>
+                        <m:r>
+                          <a:rPr lang="en-US" i="1">
+                            <a:latin typeface="Cambria Math" panose="02040503050406030204" pitchFamily="18" charset="0"/>
+                          </a:rPr>
+                          <m:t>𝐹</m:t>
+                        </m:r>
+                        <m:r>
+                          <a:rPr lang="en-US" i="1">
+                            <a:latin typeface="Cambria Math"/>
+                          </a:rPr>
+                          <m:t>,</m:t>
+                        </m:r>
+                        <m:r>
+                          <a:rPr lang="en-US" i="1">
+                            <a:latin typeface="Cambria Math"/>
+                          </a:rPr>
+                          <m:t>𝑆</m:t>
+                        </m:r>
+                      </m:sub>
+                      <m:sup>
+                        <m:r>
+                          <a:rPr lang="en-US" i="1">
+                            <a:latin typeface="Cambria Math"/>
+                          </a:rPr>
+                          <m:t>∗</m:t>
+                        </m:r>
+                      </m:sup>
+                    </m:sSubSup>
+                    <m:r>
+                      <a:rPr lang="en-US" b="0" i="1" smtClean="0">
+                        <a:latin typeface="Cambria Math" panose="02040503050406030204" pitchFamily="18" charset="0"/>
+                      </a:rPr>
+                      <m:t>&gt;0</m:t>
+                    </m:r>
+                  </m:oMath>
+                </a14:m>
+                <a:r>
+                  <a:rPr lang="en-US" dirty="0"/>
+                  <a:t>.</a:t>
+                </a:r>
+              </a:p>
+              <a:p>
+                <a:pPr marL="514350" indent="-514350">
+                  <a:buFont typeface="+mj-lt"/>
+                  <a:buAutoNum type="alphaLcParenR"/>
+                </a:pPr>
+                <a:r>
+                  <a:rPr lang="en-US" dirty="0"/>
+                  <a:t>Friday better off receiving </a:t>
+                </a:r>
+                <a14:m>
+                  <m:oMath xmlns:m="http://schemas.openxmlformats.org/officeDocument/2006/math">
+                    <m:f>
+                      <m:fPr>
+                        <m:ctrlPr>
+                          <a:rPr lang="en-US" i="1">
+                            <a:latin typeface="Cambria Math" panose="02040503050406030204" pitchFamily="18" charset="0"/>
+                          </a:rPr>
+                        </m:ctrlPr>
+                      </m:fPr>
+                      <m:num>
+                        <m:sSubSup>
+                          <m:sSubSupPr>
+                            <m:ctrlPr>
+                              <a:rPr lang="en-US" i="1">
+                                <a:latin typeface="Cambria Math"/>
+                              </a:rPr>
+                            </m:ctrlPr>
+                          </m:sSubSupPr>
+                          <m:e>
+                            <m:r>
+                              <a:rPr lang="en-US" i="1">
+                                <a:latin typeface="Cambria Math"/>
+                              </a:rPr>
+                              <m:t>𝑈</m:t>
+                            </m:r>
+                          </m:e>
+                          <m:sub>
+                            <m:r>
+                              <a:rPr lang="en-US" i="1">
+                                <a:latin typeface="Cambria Math"/>
+                              </a:rPr>
+                              <m:t>𝑅</m:t>
+                            </m:r>
+                            <m:r>
+                              <a:rPr lang="en-US" i="1">
+                                <a:latin typeface="Cambria Math"/>
+                              </a:rPr>
+                              <m:t>,</m:t>
+                            </m:r>
+                            <m:r>
+                              <a:rPr lang="is-IS" i="1">
+                                <a:latin typeface="Cambria Math" panose="02040503050406030204" pitchFamily="18" charset="0"/>
+                              </a:rPr>
+                              <m:t>𝑆</m:t>
+                            </m:r>
+                          </m:sub>
+                          <m:sup>
+                            <m:r>
+                              <a:rPr lang="en-US" i="1">
+                                <a:latin typeface="Cambria Math"/>
+                              </a:rPr>
+                              <m:t>∗</m:t>
+                            </m:r>
+                          </m:sup>
+                        </m:sSubSup>
+                      </m:num>
+                      <m:den>
+                        <m:sSubSup>
+                          <m:sSubSupPr>
+                            <m:ctrlPr>
+                              <a:rPr lang="en-US" i="1">
+                                <a:latin typeface="Cambria Math"/>
+                              </a:rPr>
+                            </m:ctrlPr>
+                          </m:sSubSupPr>
+                          <m:e>
+                            <m:r>
+                              <a:rPr lang="en-US" i="1">
+                                <a:latin typeface="Cambria Math"/>
+                              </a:rPr>
+                              <m:t>𝑈</m:t>
+                            </m:r>
+                          </m:e>
+                          <m:sub>
+                            <m:r>
+                              <a:rPr lang="en-US" i="1">
+                                <a:latin typeface="Cambria Math"/>
+                              </a:rPr>
+                              <m:t>𝑅</m:t>
+                            </m:r>
+                            <m:r>
+                              <a:rPr lang="en-US" i="1">
+                                <a:latin typeface="Cambria Math"/>
+                              </a:rPr>
+                              <m:t>,</m:t>
+                            </m:r>
+                            <m:r>
+                              <a:rPr lang="is-IS" i="1">
+                                <a:latin typeface="Cambria Math" panose="02040503050406030204" pitchFamily="18" charset="0"/>
+                              </a:rPr>
+                              <m:t>𝐶</m:t>
+                            </m:r>
+                          </m:sub>
+                          <m:sup>
+                            <m:r>
+                              <a:rPr lang="en-US" i="1">
+                                <a:latin typeface="Cambria Math"/>
+                              </a:rPr>
+                              <m:t>∗</m:t>
+                            </m:r>
+                          </m:sup>
+                        </m:sSubSup>
+                      </m:den>
+                    </m:f>
+                  </m:oMath>
+                </a14:m>
+                <a:r>
+                  <a:rPr lang="en-US" dirty="0"/>
+                  <a:t> coconuts in exchange for one unit of shelter</a:t>
+                </a:r>
+              </a:p>
+              <a:p>
+                <a:pPr marL="514350" indent="-514350">
+                  <a:buFont typeface="+mj-lt"/>
+                  <a:buAutoNum type="alphaLcParenR"/>
+                </a:pPr>
+                <a:r>
+                  <a:rPr lang="en-US" dirty="0"/>
+                  <a:t>Friday better off giving up </a:t>
+                </a:r>
+                <a14:m>
+                  <m:oMath xmlns:m="http://schemas.openxmlformats.org/officeDocument/2006/math">
+                    <m:f>
+                      <m:fPr>
+                        <m:ctrlPr>
+                          <a:rPr lang="en-US" i="1">
+                            <a:latin typeface="Cambria Math" panose="02040503050406030204" pitchFamily="18" charset="0"/>
+                          </a:rPr>
+                        </m:ctrlPr>
+                      </m:fPr>
+                      <m:num>
+                        <m:sSubSup>
+                          <m:sSubSupPr>
+                            <m:ctrlPr>
+                              <a:rPr lang="en-US" i="1">
+                                <a:latin typeface="Cambria Math"/>
+                              </a:rPr>
+                            </m:ctrlPr>
+                          </m:sSubSupPr>
+                          <m:e>
+                            <m:r>
+                              <a:rPr lang="en-US" i="1">
+                                <a:latin typeface="Cambria Math"/>
+                              </a:rPr>
+                              <m:t>𝑈</m:t>
+                            </m:r>
+                          </m:e>
+                          <m:sub>
+                            <m:r>
+                              <a:rPr lang="en-US" i="1">
+                                <a:latin typeface="Cambria Math"/>
+                              </a:rPr>
+                              <m:t>𝑅</m:t>
+                            </m:r>
+                            <m:r>
+                              <a:rPr lang="en-US" i="1">
+                                <a:latin typeface="Cambria Math"/>
+                              </a:rPr>
+                              <m:t>,</m:t>
+                            </m:r>
+                            <m:r>
+                              <a:rPr lang="is-IS" i="1">
+                                <a:latin typeface="Cambria Math" panose="02040503050406030204" pitchFamily="18" charset="0"/>
+                              </a:rPr>
+                              <m:t>𝑆</m:t>
+                            </m:r>
+                          </m:sub>
+                          <m:sup>
+                            <m:r>
+                              <a:rPr lang="en-US" i="1">
+                                <a:latin typeface="Cambria Math"/>
+                              </a:rPr>
+                              <m:t>∗</m:t>
+                            </m:r>
+                          </m:sup>
+                        </m:sSubSup>
+                      </m:num>
+                      <m:den>
+                        <m:sSubSup>
+                          <m:sSubSupPr>
+                            <m:ctrlPr>
+                              <a:rPr lang="en-US" i="1">
+                                <a:latin typeface="Cambria Math"/>
+                              </a:rPr>
+                            </m:ctrlPr>
+                          </m:sSubSupPr>
+                          <m:e>
+                            <m:r>
+                              <a:rPr lang="en-US" i="1">
+                                <a:latin typeface="Cambria Math"/>
+                              </a:rPr>
+                              <m:t>𝑈</m:t>
+                            </m:r>
+                          </m:e>
+                          <m:sub>
+                            <m:r>
+                              <a:rPr lang="en-US" i="1">
+                                <a:latin typeface="Cambria Math"/>
+                              </a:rPr>
+                              <m:t>𝑅</m:t>
+                            </m:r>
+                            <m:r>
+                              <a:rPr lang="en-US" i="1">
+                                <a:latin typeface="Cambria Math"/>
+                              </a:rPr>
+                              <m:t>,</m:t>
+                            </m:r>
+                            <m:r>
+                              <a:rPr lang="is-IS" i="1">
+                                <a:latin typeface="Cambria Math" panose="02040503050406030204" pitchFamily="18" charset="0"/>
+                              </a:rPr>
+                              <m:t>𝐶</m:t>
+                            </m:r>
+                          </m:sub>
+                          <m:sup>
+                            <m:r>
+                              <a:rPr lang="en-US" i="1">
+                                <a:latin typeface="Cambria Math"/>
+                              </a:rPr>
+                              <m:t>∗</m:t>
+                            </m:r>
+                          </m:sup>
+                        </m:sSubSup>
+                      </m:den>
+                    </m:f>
+                  </m:oMath>
+                </a14:m>
+                <a:r>
+                  <a:rPr lang="en-US" dirty="0"/>
+                  <a:t> coconuts in exchange for one units of shelter</a:t>
+                </a:r>
+              </a:p>
+              <a:p>
+                <a:pPr marL="514350" indent="-514350">
+                  <a:buFont typeface="+mj-lt"/>
+                  <a:buAutoNum type="alphaLcParenR"/>
+                </a:pPr>
+                <a:r>
+                  <a:rPr lang="en-US" dirty="0"/>
+                  <a:t>I have no idea!</a:t>
+                </a:r>
+              </a:p>
+            </p:txBody>
+          </p:sp>
+        </mc:Choice>
+        <mc:Fallback xmlns="">
+          <p:sp>
+            <p:nvSpPr>
+              <p:cNvPr id="3" name="Content Placeholder 2">
+                <a:extLst>
+                  <a:ext uri="{FF2B5EF4-FFF2-40B4-BE49-F238E27FC236}">
+                    <a16:creationId xmlns:a16="http://schemas.microsoft.com/office/drawing/2014/main" id="{D64D9254-EA68-C36D-6664-EC6AB7A8A737}"/>
+                  </a:ext>
+                </a:extLst>
+              </p:cNvPr>
+              <p:cNvSpPr>
+                <a:spLocks noGrp="1" noRot="1" noChangeAspect="1" noMove="1" noResize="1" noEditPoints="1" noAdjustHandles="1" noChangeArrowheads="1" noChangeShapeType="1" noTextEdit="1"/>
+              </p:cNvSpPr>
+              <p:nvPr>
+                <p:ph idx="1"/>
+              </p:nvPr>
+            </p:nvSpPr>
+            <p:spPr>
+              <a:xfrm>
+                <a:off x="609600" y="1600201"/>
+                <a:ext cx="10972800" cy="4876799"/>
+              </a:xfrm>
+              <a:blipFill>
+                <a:blip r:embed="rId2"/>
+                <a:stretch>
+                  <a:fillRect l="-1444" b="-750"/>
+                </a:stretch>
+              </a:blipFill>
+            </p:spPr>
+            <p:txBody>
+              <a:bodyPr/>
+              <a:lstStyle/>
+              <a:p>
+                <a:r>
+                  <a:rPr lang="en-US">
+                    <a:noFill/>
+                  </a:rPr>
+                  <a:t> </a:t>
+                </a:r>
+              </a:p>
+            </p:txBody>
+          </p:sp>
+        </mc:Fallback>
+      </mc:AlternateContent>
+      <p:sp>
+        <p:nvSpPr>
+          <p:cNvPr id="4" name="Slide Number Placeholder 3">
+            <a:extLst>
+              <a:ext uri="{FF2B5EF4-FFF2-40B4-BE49-F238E27FC236}">
+                <a16:creationId xmlns:a16="http://schemas.microsoft.com/office/drawing/2014/main" id="{58F21693-6C62-6D72-FEE3-05B398B9A46B}"/>
+              </a:ext>
+            </a:extLst>
+          </p:cNvPr>
+          <p:cNvSpPr>
+            <a:spLocks noGrp="1"/>
+          </p:cNvSpPr>
+          <p:nvPr>
+            <p:ph type="sldNum" sz="quarter" idx="12"/>
+          </p:nvPr>
+        </p:nvSpPr>
+        <p:spPr/>
+        <p:txBody>
+          <a:bodyPr/>
+          <a:lstStyle/>
+          <a:p>
+            <a:fld id="{CFF8E9C2-617A-4D65-AFBD-F489864C0492}" type="slidenum">
+              <a:rPr lang="en-US" smtClean="0"/>
+              <a:pPr/>
+              <a:t>27</a:t>
+            </a:fld>
+            <a:endParaRPr lang="en-US"/>
+          </a:p>
+        </p:txBody>
+      </p:sp>
+    </p:spTree>
+    <p:extLst>
+      <p:ext uri="{BB962C8B-B14F-4D97-AF65-F5344CB8AC3E}">
+        <p14:creationId xmlns:p14="http://schemas.microsoft.com/office/powerpoint/2010/main" val="4054149278"/>
+      </p:ext>
+    </p:extLst>
+  </p:cSld>
+  <p:clrMapOvr>
+    <a:masterClrMapping/>
+  </p:clrMapOvr>
+</p:sld>
+</file>
+
+<file path=ppt/slides/slide28.xml><?xml version="1.0" encoding="utf-8"?>
 <p:sld xmlns:a="http://schemas.openxmlformats.org/drawingml/2006/main" xmlns:r="http://schemas.openxmlformats.org/officeDocument/2006/relationships" xmlns:p="http://schemas.openxmlformats.org/presentationml/2006/main">
   <p:cSld>
     <p:spTree>
@@ -17595,10 +18161,7 @@
                 </a:pPr>
                 <a14:m>
                   <m:oMathPara xmlns:m="http://schemas.openxmlformats.org/officeDocument/2006/math">
-                    <m:oMathParaPr>
-                      <m:jc m:val="centerGroup"/>
-                    </m:oMathParaPr>
-                    <m:oMath xmlns:m="http://schemas.openxmlformats.org/officeDocument/2006/math">
+                    <m:oMath>
                       <m:f>
                         <m:fPr>
                           <m:ctrlPr>
@@ -17671,7 +18234,7 @@
                         <m:sSubSupPr>
                           <m:ctrlPr>
                             <a:rPr lang="en-US" sz="2800" i="1">
-                              <a:latin typeface="Cambria Math" panose="02040503050406030204" pitchFamily="18" charset="0"/>
+                              <a:latin typeface="Cambria Math"/>
                             </a:rPr>
                           </m:ctrlPr>
                         </m:sSubSupPr>
@@ -17717,7 +18280,6 @@
                           <m:ctrlPr>
                             <a:rPr lang="en-US" sz="2800" i="1">
                               <a:latin typeface="Cambria Math" panose="02040503050406030204" pitchFamily="18" charset="0"/>
-                              <a:ea typeface="Cambria Math"/>
                             </a:rPr>
                           </m:ctrlPr>
                         </m:fPr>
@@ -17726,7 +18288,7 @@
                             <m:sSubSupPr>
                               <m:ctrlPr>
                                 <a:rPr lang="en-US" sz="2800" i="1">
-                                  <a:latin typeface="Cambria Math" panose="02040503050406030204" pitchFamily="18" charset="0"/>
+                                  <a:latin typeface="Cambria Math"/>
                                 </a:rPr>
                               </m:ctrlPr>
                             </m:sSubSupPr>
@@ -17773,7 +18335,7 @@
                             <m:sSubSupPr>
                               <m:ctrlPr>
                                 <a:rPr lang="en-US" sz="2800" i="1">
-                                  <a:latin typeface="Cambria Math" panose="02040503050406030204" pitchFamily="18" charset="0"/>
+                                  <a:latin typeface="Cambria Math"/>
                                 </a:rPr>
                               </m:ctrlPr>
                             </m:sSubSupPr>
@@ -17826,7 +18388,7 @@
                         <m:sSubSupPr>
                           <m:ctrlPr>
                             <a:rPr lang="en-US" sz="2800" i="1">
-                              <a:latin typeface="Cambria Math" panose="02040503050406030204" pitchFamily="18" charset="0"/>
+                              <a:latin typeface="Cambria Math"/>
                             </a:rPr>
                           </m:ctrlPr>
                         </m:sSubSupPr>
@@ -17896,10 +18458,7 @@
                 </a:pPr>
                 <a14:m>
                   <m:oMathPara xmlns:m="http://schemas.openxmlformats.org/officeDocument/2006/math">
-                    <m:oMathParaPr>
-                      <m:jc m:val="centerGroup"/>
-                    </m:oMathParaPr>
-                    <m:oMath xmlns:m="http://schemas.openxmlformats.org/officeDocument/2006/math">
+                    <m:oMath>
                       <m:f>
                         <m:fPr>
                           <m:ctrlPr>
@@ -17913,7 +18472,7 @@
                             <m:sSubSupPr>
                               <m:ctrlPr>
                                 <a:rPr lang="en-US" sz="2800" i="1">
-                                  <a:latin typeface="Cambria Math" panose="02040503050406030204" pitchFamily="18" charset="0"/>
+                                  <a:latin typeface="Cambria Math"/>
                                 </a:rPr>
                               </m:ctrlPr>
                             </m:sSubSupPr>
@@ -17960,7 +18519,7 @@
                             <m:sSubSupPr>
                               <m:ctrlPr>
                                 <a:rPr lang="en-US" sz="2800" i="1">
-                                  <a:latin typeface="Cambria Math" panose="02040503050406030204" pitchFamily="18" charset="0"/>
+                                  <a:latin typeface="Cambria Math"/>
                                 </a:rPr>
                               </m:ctrlPr>
                             </m:sSubSupPr>
@@ -18014,7 +18573,6 @@
                           <m:ctrlPr>
                             <a:rPr lang="en-US" sz="2800" i="1">
                               <a:latin typeface="Cambria Math" panose="02040503050406030204" pitchFamily="18" charset="0"/>
-                              <a:ea typeface="Cambria Math"/>
                             </a:rPr>
                           </m:ctrlPr>
                         </m:fPr>
@@ -18023,7 +18581,7 @@
                             <m:sSubSupPr>
                               <m:ctrlPr>
                                 <a:rPr lang="en-US" sz="2800" i="1">
-                                  <a:latin typeface="Cambria Math" panose="02040503050406030204" pitchFamily="18" charset="0"/>
+                                  <a:latin typeface="Cambria Math"/>
                                 </a:rPr>
                               </m:ctrlPr>
                             </m:sSubSupPr>
@@ -18070,7 +18628,7 @@
                             <m:sSubSupPr>
                               <m:ctrlPr>
                                 <a:rPr lang="en-US" sz="2800" i="1">
-                                  <a:latin typeface="Cambria Math" panose="02040503050406030204" pitchFamily="18" charset="0"/>
+                                  <a:latin typeface="Cambria Math"/>
                                 </a:rPr>
                               </m:ctrlPr>
                             </m:sSubSupPr>
@@ -18173,7 +18731,7 @@
             <a:fld id="{CFF8E9C2-617A-4D65-AFBD-F489864C0492}" type="slidenum">
               <a:rPr lang="en-US" smtClean="0"/>
               <a:pPr/>
-              <a:t>26</a:t>
+              <a:t>28</a:t>
             </a:fld>
             <a:endParaRPr lang="en-US"/>
           </a:p>
@@ -18192,7 +18750,7 @@
 </p:sld>
 </file>
 
-<file path=ppt/slides/slide27.xml><?xml version="1.0" encoding="utf-8"?>
+<file path=ppt/slides/slide29.xml><?xml version="1.0" encoding="utf-8"?>
 <p:sld xmlns:a="http://schemas.openxmlformats.org/drawingml/2006/main" xmlns:r="http://schemas.openxmlformats.org/officeDocument/2006/relationships" xmlns:p="http://schemas.openxmlformats.org/presentationml/2006/main">
   <p:cSld>
     <p:spTree>
@@ -18265,14 +18823,11 @@
                 </a:pPr>
                 <a14:m>
                   <m:oMathPara xmlns:m="http://schemas.openxmlformats.org/officeDocument/2006/math">
-                    <m:oMathParaPr>
-                      <m:jc m:val="centerGroup"/>
-                    </m:oMathParaPr>
-                    <m:oMath xmlns:m="http://schemas.openxmlformats.org/officeDocument/2006/math">
+                    <m:oMath>
                       <m:f>
                         <m:fPr>
                           <m:ctrlPr>
-                            <a:rPr lang="en-US" i="1" smtClean="0">
+                            <a:rPr lang="en-US" i="1">
                               <a:latin typeface="Cambria Math" panose="02040503050406030204" pitchFamily="18" charset="0"/>
                             </a:rPr>
                           </m:ctrlPr>
@@ -18282,7 +18837,7 @@
                             <m:sSubSupPr>
                               <m:ctrlPr>
                                 <a:rPr lang="en-US" i="1">
-                                  <a:latin typeface="Cambria Math" panose="02040503050406030204" pitchFamily="18" charset="0"/>
+                                  <a:latin typeface="Cambria Math"/>
                                 </a:rPr>
                               </m:ctrlPr>
                             </m:sSubSupPr>
@@ -18329,7 +18884,7 @@
                             <m:sSubSupPr>
                               <m:ctrlPr>
                                 <a:rPr lang="en-US" i="1">
-                                  <a:latin typeface="Cambria Math" panose="02040503050406030204" pitchFamily="18" charset="0"/>
+                                  <a:latin typeface="Cambria Math"/>
                                 </a:rPr>
                               </m:ctrlPr>
                             </m:sSubSupPr>
@@ -18383,7 +18938,6 @@
                           <m:ctrlPr>
                             <a:rPr lang="en-US" i="1">
                               <a:latin typeface="Cambria Math" panose="02040503050406030204" pitchFamily="18" charset="0"/>
-                              <a:ea typeface="Cambria Math"/>
                             </a:rPr>
                           </m:ctrlPr>
                         </m:fPr>
@@ -18392,7 +18946,7 @@
                             <m:sSubSupPr>
                               <m:ctrlPr>
                                 <a:rPr lang="en-US" i="1">
-                                  <a:latin typeface="Cambria Math" panose="02040503050406030204" pitchFamily="18" charset="0"/>
+                                  <a:latin typeface="Cambria Math"/>
                                 </a:rPr>
                               </m:ctrlPr>
                             </m:sSubSupPr>
@@ -18439,7 +18993,7 @@
                             <m:sSubSupPr>
                               <m:ctrlPr>
                                 <a:rPr lang="en-US" i="1">
-                                  <a:latin typeface="Cambria Math" panose="02040503050406030204" pitchFamily="18" charset="0"/>
+                                  <a:latin typeface="Cambria Math"/>
                                 </a:rPr>
                               </m:ctrlPr>
                             </m:sSubSupPr>
@@ -18494,7 +19048,7 @@
                       <m:sSubSupPr>
                         <m:ctrlPr>
                           <a:rPr lang="en-US" i="1">
-                            <a:latin typeface="Cambria Math" panose="02040503050406030204" pitchFamily="18" charset="0"/>
+                            <a:latin typeface="Cambria Math"/>
                           </a:rPr>
                         </m:ctrlPr>
                       </m:sSubSupPr>
@@ -18549,7 +19103,7 @@
                       <m:sSubSupPr>
                         <m:ctrlPr>
                           <a:rPr lang="en-US" i="1">
-                            <a:latin typeface="Cambria Math" panose="02040503050406030204" pitchFamily="18" charset="0"/>
+                            <a:latin typeface="Cambria Math"/>
                           </a:rPr>
                         </m:ctrlPr>
                       </m:sSubSupPr>
@@ -18614,7 +19168,7 @@
                       <m:sSubSupPr>
                         <m:ctrlPr>
                           <a:rPr lang="en-US" i="1">
-                            <a:latin typeface="Cambria Math" panose="02040503050406030204" pitchFamily="18" charset="0"/>
+                            <a:latin typeface="Cambria Math"/>
                           </a:rPr>
                         </m:ctrlPr>
                       </m:sSubSupPr>
@@ -18677,7 +19231,7 @@
                       <m:sSubSupPr>
                         <m:ctrlPr>
                           <a:rPr lang="en-US" i="1">
-                            <a:latin typeface="Cambria Math" panose="02040503050406030204" pitchFamily="18" charset="0"/>
+                            <a:latin typeface="Cambria Math"/>
                           </a:rPr>
                         </m:ctrlPr>
                       </m:sSubSupPr>
@@ -18736,7 +19290,7 @@
                       <m:sSubSupPr>
                         <m:ctrlPr>
                           <a:rPr lang="en-US" i="1">
-                            <a:latin typeface="Cambria Math" panose="02040503050406030204" pitchFamily="18" charset="0"/>
+                            <a:latin typeface="Cambria Math"/>
                           </a:rPr>
                         </m:ctrlPr>
                       </m:sSubSupPr>
@@ -18789,7 +19343,7 @@
                       <m:sSubSupPr>
                         <m:ctrlPr>
                           <a:rPr lang="en-US" i="1">
-                            <a:latin typeface="Cambria Math" panose="02040503050406030204" pitchFamily="18" charset="0"/>
+                            <a:latin typeface="Cambria Math"/>
                           </a:rPr>
                         </m:ctrlPr>
                       </m:sSubSupPr>
@@ -18852,7 +19406,7 @@
                       <m:sSubSupPr>
                         <m:ctrlPr>
                           <a:rPr lang="en-US" i="1">
-                            <a:latin typeface="Cambria Math" panose="02040503050406030204" pitchFamily="18" charset="0"/>
+                            <a:latin typeface="Cambria Math"/>
                           </a:rPr>
                         </m:ctrlPr>
                       </m:sSubSupPr>
@@ -18911,7 +19465,7 @@
                       <m:sSubSupPr>
                         <m:ctrlPr>
                           <a:rPr lang="en-US" i="1">
-                            <a:latin typeface="Cambria Math" panose="02040503050406030204" pitchFamily="18" charset="0"/>
+                            <a:latin typeface="Cambria Math"/>
                           </a:rPr>
                         </m:ctrlPr>
                       </m:sSubSupPr>
@@ -19030,7 +19584,7 @@
               <a:pPr>
                 <a:defRPr/>
               </a:pPr>
-              <a:t>27</a:t>
+              <a:t>29</a:t>
             </a:fld>
             <a:endParaRPr lang="en-US" dirty="0"/>
           </a:p>
@@ -19306,7 +19860,311 @@
 </p:sld>
 </file>
 
-<file path=ppt/slides/slide28.xml><?xml version="1.0" encoding="utf-8"?>
+<file path=ppt/slides/slide3.xml><?xml version="1.0" encoding="utf-8"?>
+<p:sld xmlns:a="http://schemas.openxmlformats.org/drawingml/2006/main" xmlns:r="http://schemas.openxmlformats.org/officeDocument/2006/relationships" xmlns:p="http://schemas.openxmlformats.org/presentationml/2006/main">
+  <p:cSld>
+    <p:spTree>
+      <p:nvGrpSpPr>
+        <p:cNvPr id="1" name=""/>
+        <p:cNvGrpSpPr/>
+        <p:nvPr/>
+      </p:nvGrpSpPr>
+      <p:grpSpPr>
+        <a:xfrm>
+          <a:off x="0" y="0"/>
+          <a:ext cx="0" cy="0"/>
+          <a:chOff x="0" y="0"/>
+          <a:chExt cx="0" cy="0"/>
+        </a:xfrm>
+      </p:grpSpPr>
+      <p:sp>
+        <p:nvSpPr>
+          <p:cNvPr id="2" name="Title 1"/>
+          <p:cNvSpPr>
+            <a:spLocks noGrp="1"/>
+          </p:cNvSpPr>
+          <p:nvPr>
+            <p:ph type="title"/>
+          </p:nvPr>
+        </p:nvSpPr>
+        <p:spPr/>
+        <p:txBody>
+          <a:bodyPr/>
+          <a:lstStyle/>
+          <a:p>
+            <a:r>
+              <a:rPr lang="en-US" dirty="0"/>
+              <a:t>Designing Utopia</a:t>
+            </a:r>
+          </a:p>
+        </p:txBody>
+      </p:sp>
+      <p:sp>
+        <p:nvSpPr>
+          <p:cNvPr id="3" name="Content Placeholder 2"/>
+          <p:cNvSpPr>
+            <a:spLocks noGrp="1"/>
+          </p:cNvSpPr>
+          <p:nvPr>
+            <p:ph idx="1"/>
+          </p:nvPr>
+        </p:nvSpPr>
+        <p:spPr>
+          <a:xfrm>
+            <a:off x="609600" y="1676400"/>
+            <a:ext cx="10972800" cy="5045075"/>
+          </a:xfrm>
+        </p:spPr>
+        <p:txBody>
+          <a:bodyPr>
+            <a:normAutofit/>
+          </a:bodyPr>
+          <a:lstStyle/>
+          <a:p>
+            <a:r>
+              <a:rPr lang="en-US" dirty="0"/>
+              <a:t>Our goal: Design a government – laws, regulation and institutions – that is </a:t>
+            </a:r>
+            <a:r>
+              <a:rPr lang="en-US" dirty="0">
+                <a:solidFill>
+                  <a:schemeClr val="accent2"/>
+                </a:solidFill>
+              </a:rPr>
+              <a:t>as good as possible</a:t>
+            </a:r>
+            <a:r>
+              <a:rPr lang="en-US" dirty="0"/>
+              <a:t> in terms of generating material well-being</a:t>
+            </a:r>
+          </a:p>
+          <a:p>
+            <a:pPr marL="457200" indent="-457200"/>
+            <a:r>
+              <a:rPr lang="en-US" dirty="0"/>
+              <a:t>Two challenges:</a:t>
+            </a:r>
+          </a:p>
+          <a:p>
+            <a:pPr lvl="1"/>
+            <a:r>
+              <a:rPr lang="en-US" b="1" dirty="0"/>
+              <a:t>Information challenge</a:t>
+            </a:r>
+            <a:r>
+              <a:rPr lang="en-US" dirty="0"/>
+              <a:t>: How do we figure out what to produce, </a:t>
+            </a:r>
+            <a:br>
+              <a:rPr lang="en-US" dirty="0"/>
+            </a:br>
+            <a:r>
+              <a:rPr lang="en-US" dirty="0"/>
+              <a:t>who should produce it, and who should consume it? </a:t>
+            </a:r>
+          </a:p>
+          <a:p>
+            <a:pPr lvl="1"/>
+            <a:r>
+              <a:rPr lang="en-US" b="1" dirty="0"/>
+              <a:t>Incentive challenge</a:t>
+            </a:r>
+            <a:r>
+              <a:rPr lang="en-US" dirty="0"/>
+              <a:t>: Even if we know what needs to be done, </a:t>
+            </a:r>
+            <a:br>
+              <a:rPr lang="en-US" dirty="0"/>
+            </a:br>
+            <a:r>
+              <a:rPr lang="en-US" dirty="0"/>
+              <a:t>how do we get people to do these things?</a:t>
+            </a:r>
+          </a:p>
+          <a:p>
+            <a:endParaRPr lang="en-US" dirty="0"/>
+          </a:p>
+        </p:txBody>
+      </p:sp>
+      <p:sp>
+        <p:nvSpPr>
+          <p:cNvPr id="4" name="Slide Number Placeholder 3"/>
+          <p:cNvSpPr>
+            <a:spLocks noGrp="1"/>
+          </p:cNvSpPr>
+          <p:nvPr>
+            <p:ph type="sldNum" sz="quarter" idx="12"/>
+          </p:nvPr>
+        </p:nvSpPr>
+        <p:spPr/>
+        <p:txBody>
+          <a:bodyPr/>
+          <a:lstStyle/>
+          <a:p>
+            <a:fld id="{CFF8E9C2-617A-4D65-AFBD-F489864C0492}" type="slidenum">
+              <a:rPr lang="en-US" smtClean="0"/>
+              <a:pPr/>
+              <a:t>3</a:t>
+            </a:fld>
+            <a:endParaRPr lang="en-US" dirty="0"/>
+          </a:p>
+        </p:txBody>
+      </p:sp>
+    </p:spTree>
+    <p:extLst>
+      <p:ext uri="{BB962C8B-B14F-4D97-AF65-F5344CB8AC3E}">
+        <p14:creationId xmlns:p14="http://schemas.microsoft.com/office/powerpoint/2010/main" val="1179380788"/>
+      </p:ext>
+    </p:extLst>
+  </p:cSld>
+  <p:clrMapOvr>
+    <a:masterClrMapping/>
+  </p:clrMapOvr>
+  <p:timing>
+    <p:tnLst>
+      <p:par>
+        <p:cTn id="1" dur="indefinite" restart="never" nodeType="tmRoot">
+          <p:childTnLst>
+            <p:seq concurrent="1" nextAc="seek">
+              <p:cTn id="2" dur="indefinite" nodeType="mainSeq">
+                <p:childTnLst>
+                  <p:par>
+                    <p:cTn id="3" fill="hold">
+                      <p:stCondLst>
+                        <p:cond delay="indefinite"/>
+                      </p:stCondLst>
+                      <p:childTnLst>
+                        <p:par>
+                          <p:cTn id="4" fill="hold">
+                            <p:stCondLst>
+                              <p:cond delay="0"/>
+                            </p:stCondLst>
+                            <p:childTnLst>
+                              <p:par>
+                                <p:cTn id="5" presetID="1" presetClass="entr" presetSubtype="0" fill="hold" nodeType="clickEffect">
+                                  <p:stCondLst>
+                                    <p:cond delay="0"/>
+                                  </p:stCondLst>
+                                  <p:childTnLst>
+                                    <p:set>
+                                      <p:cBhvr>
+                                        <p:cTn id="6" dur="1" fill="hold">
+                                          <p:stCondLst>
+                                            <p:cond delay="0"/>
+                                          </p:stCondLst>
+                                        </p:cTn>
+                                        <p:tgtEl>
+                                          <p:spTgt spid="3">
+                                            <p:txEl>
+                                              <p:pRg st="1" end="1"/>
+                                            </p:txEl>
+                                          </p:spTgt>
+                                        </p:tgtEl>
+                                        <p:attrNameLst>
+                                          <p:attrName>style.visibility</p:attrName>
+                                        </p:attrNameLst>
+                                      </p:cBhvr>
+                                      <p:to>
+                                        <p:strVal val="visible"/>
+                                      </p:to>
+                                    </p:set>
+                                  </p:childTnLst>
+                                </p:cTn>
+                              </p:par>
+                              <p:par>
+                                <p:cTn id="7" presetID="1" presetClass="entr" presetSubtype="0" fill="hold" nodeType="withEffect">
+                                  <p:stCondLst>
+                                    <p:cond delay="0"/>
+                                  </p:stCondLst>
+                                  <p:childTnLst>
+                                    <p:set>
+                                      <p:cBhvr>
+                                        <p:cTn id="8" dur="1" fill="hold">
+                                          <p:stCondLst>
+                                            <p:cond delay="0"/>
+                                          </p:stCondLst>
+                                        </p:cTn>
+                                        <p:tgtEl>
+                                          <p:spTgt spid="3">
+                                            <p:txEl>
+                                              <p:pRg st="2" end="2"/>
+                                            </p:txEl>
+                                          </p:spTgt>
+                                        </p:tgtEl>
+                                        <p:attrNameLst>
+                                          <p:attrName>style.visibility</p:attrName>
+                                        </p:attrNameLst>
+                                      </p:cBhvr>
+                                      <p:to>
+                                        <p:strVal val="visible"/>
+                                      </p:to>
+                                    </p:set>
+                                  </p:childTnLst>
+                                </p:cTn>
+                              </p:par>
+                              <p:par>
+                                <p:cTn id="9" presetID="1" presetClass="entr" presetSubtype="0" fill="hold" nodeType="withEffect">
+                                  <p:stCondLst>
+                                    <p:cond delay="0"/>
+                                  </p:stCondLst>
+                                  <p:childTnLst>
+                                    <p:set>
+                                      <p:cBhvr>
+                                        <p:cTn id="10" dur="1" fill="hold">
+                                          <p:stCondLst>
+                                            <p:cond delay="0"/>
+                                          </p:stCondLst>
+                                        </p:cTn>
+                                        <p:tgtEl>
+                                          <p:spTgt spid="3">
+                                            <p:txEl>
+                                              <p:pRg st="3" end="3"/>
+                                            </p:txEl>
+                                          </p:spTgt>
+                                        </p:tgtEl>
+                                        <p:attrNameLst>
+                                          <p:attrName>style.visibility</p:attrName>
+                                        </p:attrNameLst>
+                                      </p:cBhvr>
+                                      <p:to>
+                                        <p:strVal val="visible"/>
+                                      </p:to>
+                                    </p:set>
+                                  </p:childTnLst>
+                                </p:cTn>
+                              </p:par>
+                            </p:childTnLst>
+                          </p:cTn>
+                        </p:par>
+                      </p:childTnLst>
+                    </p:cTn>
+                  </p:par>
+                </p:childTnLst>
+              </p:cTn>
+              <p:prevCondLst>
+                <p:cond evt="onPrev" delay="0">
+                  <p:tgtEl>
+                    <p:sldTgt/>
+                  </p:tgtEl>
+                </p:cond>
+              </p:prevCondLst>
+              <p:nextCondLst>
+                <p:cond evt="onNext" delay="0">
+                  <p:tgtEl>
+                    <p:sldTgt/>
+                  </p:tgtEl>
+                </p:cond>
+              </p:nextCondLst>
+            </p:seq>
+          </p:childTnLst>
+        </p:cTn>
+      </p:par>
+    </p:tnLst>
+  </p:timing>
+</p:sld>
+</file>
+
+<file path=ppt/slides/slide30.xml><?xml version="1.0" encoding="utf-8"?>
 <p:sld xmlns:a="http://schemas.openxmlformats.org/drawingml/2006/main" xmlns:r="http://schemas.openxmlformats.org/officeDocument/2006/relationships" xmlns:p="http://schemas.openxmlformats.org/presentationml/2006/main">
   <p:cSld>
     <p:spTree>
@@ -19379,14 +20237,11 @@
                 </a:pPr>
                 <a14:m>
                   <m:oMathPara xmlns:m="http://schemas.openxmlformats.org/officeDocument/2006/math">
-                    <m:oMathParaPr>
-                      <m:jc m:val="centerGroup"/>
-                    </m:oMathParaPr>
-                    <m:oMath xmlns:m="http://schemas.openxmlformats.org/officeDocument/2006/math">
+                    <m:oMath>
                       <m:f>
                         <m:fPr>
                           <m:ctrlPr>
-                            <a:rPr lang="en-US" i="1" smtClean="0">
+                            <a:rPr lang="en-US" i="1">
                               <a:latin typeface="Cambria Math" panose="02040503050406030204" pitchFamily="18" charset="0"/>
                             </a:rPr>
                           </m:ctrlPr>
@@ -19396,7 +20251,7 @@
                             <m:sSubSupPr>
                               <m:ctrlPr>
                                 <a:rPr lang="en-US" i="1">
-                                  <a:latin typeface="Cambria Math" panose="02040503050406030204" pitchFamily="18" charset="0"/>
+                                  <a:latin typeface="Cambria Math"/>
                                 </a:rPr>
                               </m:ctrlPr>
                             </m:sSubSupPr>
@@ -19443,7 +20298,7 @@
                             <m:sSubSupPr>
                               <m:ctrlPr>
                                 <a:rPr lang="en-US" i="1">
-                                  <a:latin typeface="Cambria Math" panose="02040503050406030204" pitchFamily="18" charset="0"/>
+                                  <a:latin typeface="Cambria Math"/>
                                 </a:rPr>
                               </m:ctrlPr>
                             </m:sSubSupPr>
@@ -19497,7 +20352,6 @@
                           <m:ctrlPr>
                             <a:rPr lang="en-US" i="1">
                               <a:latin typeface="Cambria Math" panose="02040503050406030204" pitchFamily="18" charset="0"/>
-                              <a:ea typeface="Cambria Math"/>
                             </a:rPr>
                           </m:ctrlPr>
                         </m:fPr>
@@ -19506,7 +20360,7 @@
                             <m:sSubSupPr>
                               <m:ctrlPr>
                                 <a:rPr lang="en-US" i="1">
-                                  <a:latin typeface="Cambria Math" panose="02040503050406030204" pitchFamily="18" charset="0"/>
+                                  <a:latin typeface="Cambria Math"/>
                                 </a:rPr>
                               </m:ctrlPr>
                             </m:sSubSupPr>
@@ -19553,7 +20407,7 @@
                             <m:sSubSupPr>
                               <m:ctrlPr>
                                 <a:rPr lang="en-US" i="1">
-                                  <a:latin typeface="Cambria Math" panose="02040503050406030204" pitchFamily="18" charset="0"/>
+                                  <a:latin typeface="Cambria Math"/>
                                 </a:rPr>
                               </m:ctrlPr>
                             </m:sSubSupPr>
@@ -19624,7 +20478,7 @@
                       <m:sSubSupPr>
                         <m:ctrlPr>
                           <a:rPr lang="en-US" i="1">
-                            <a:latin typeface="Cambria Math" panose="02040503050406030204" pitchFamily="18" charset="0"/>
+                            <a:latin typeface="Cambria Math"/>
                           </a:rPr>
                         </m:ctrlPr>
                       </m:sSubSupPr>
@@ -19675,7 +20529,7 @@
                       <m:sSubSupPr>
                         <m:ctrlPr>
                           <a:rPr lang="en-US" i="1">
-                            <a:latin typeface="Cambria Math" panose="02040503050406030204" pitchFamily="18" charset="0"/>
+                            <a:latin typeface="Cambria Math"/>
                           </a:rPr>
                         </m:ctrlPr>
                       </m:sSubSupPr>
@@ -19728,7 +20582,7 @@
                       <m:sSubSupPr>
                         <m:ctrlPr>
                           <a:rPr lang="en-US" i="1">
-                            <a:latin typeface="Cambria Math" panose="02040503050406030204" pitchFamily="18" charset="0"/>
+                            <a:latin typeface="Cambria Math"/>
                           </a:rPr>
                         </m:ctrlPr>
                       </m:sSubSupPr>
@@ -19779,7 +20633,7 @@
                       <m:sSubSupPr>
                         <m:ctrlPr>
                           <a:rPr lang="en-US" i="1">
-                            <a:latin typeface="Cambria Math" panose="02040503050406030204" pitchFamily="18" charset="0"/>
+                            <a:latin typeface="Cambria Math"/>
                           </a:rPr>
                         </m:ctrlPr>
                       </m:sSubSupPr>
@@ -19900,7 +20754,7 @@
               <a:pPr>
                 <a:defRPr/>
               </a:pPr>
-              <a:t>28</a:t>
+              <a:t>30</a:t>
             </a:fld>
             <a:endParaRPr lang="en-US" dirty="0"/>
           </a:p>
@@ -20096,7 +20950,7 @@
 </p:sld>
 </file>
 
-<file path=ppt/slides/slide29.xml><?xml version="1.0" encoding="utf-8"?>
+<file path=ppt/slides/slide31.xml><?xml version="1.0" encoding="utf-8"?>
 <p:sld xmlns:a="http://schemas.openxmlformats.org/drawingml/2006/main" xmlns:r="http://schemas.openxmlformats.org/officeDocument/2006/relationships" xmlns:p="http://schemas.openxmlformats.org/presentationml/2006/main">
   <p:cSld>
     <p:spTree>
@@ -20190,7 +21044,7 @@
                       <m:sSubSupPr>
                         <m:ctrlPr>
                           <a:rPr lang="en-US" i="1">
-                            <a:latin typeface="Cambria Math" panose="02040503050406030204" pitchFamily="18" charset="0"/>
+                            <a:latin typeface="Cambria Math"/>
                           </a:rPr>
                         </m:ctrlPr>
                       </m:sSubSupPr>
@@ -20242,8 +21096,8 @@
                     <m:sSub>
                       <m:sSubPr>
                         <m:ctrlPr>
-                          <a:rPr lang="en-US" i="1" smtClean="0">
-                            <a:latin typeface="Cambria Math" panose="02040503050406030204" pitchFamily="18" charset="0"/>
+                          <a:rPr lang="en-US" b="0" i="1" smtClean="0">
+                            <a:latin typeface="Cambria Math"/>
                           </a:rPr>
                         </m:ctrlPr>
                       </m:sSubPr>
@@ -20359,7 +21213,7 @@
             <a:fld id="{CFF8E9C2-617A-4D65-AFBD-F489864C0492}" type="slidenum">
               <a:rPr lang="en-US" smtClean="0"/>
               <a:pPr/>
-              <a:t>29</a:t>
+              <a:t>31</a:t>
             </a:fld>
             <a:endParaRPr lang="en-US" dirty="0"/>
           </a:p>
@@ -20392,15 +21246,12 @@
                 <a:pPr/>
                 <a14:m>
                   <m:oMathPara xmlns:m="http://schemas.openxmlformats.org/officeDocument/2006/math">
-                    <m:oMathParaPr>
-                      <m:jc m:val="centerGroup"/>
-                    </m:oMathParaPr>
-                    <m:oMath xmlns:m="http://schemas.openxmlformats.org/officeDocument/2006/math">
+                    <m:oMath>
                       <m:sSubSup>
                         <m:sSubSupPr>
                           <m:ctrlPr>
                             <a:rPr lang="en-US" sz="3200" i="1">
-                              <a:latin typeface="Cambria Math" panose="02040503050406030204" pitchFamily="18" charset="0"/>
+                              <a:latin typeface="Cambria Math"/>
                             </a:rPr>
                           </m:ctrlPr>
                         </m:sSubSupPr>
@@ -20445,7 +21296,7 @@
                         <m:sSubSupPr>
                           <m:ctrlPr>
                             <a:rPr lang="en-US" sz="3200" i="1">
-                              <a:latin typeface="Cambria Math" panose="02040503050406030204" pitchFamily="18" charset="0"/>
+                              <a:latin typeface="Cambria Math"/>
                             </a:rPr>
                           </m:ctrlPr>
                         </m:sSubSupPr>
@@ -20560,15 +21411,12 @@
                 <a:pPr/>
                 <a14:m>
                   <m:oMathPara xmlns:m="http://schemas.openxmlformats.org/officeDocument/2006/math">
-                    <m:oMathParaPr>
-                      <m:jc m:val="centerGroup"/>
-                    </m:oMathParaPr>
-                    <m:oMath xmlns:m="http://schemas.openxmlformats.org/officeDocument/2006/math">
+                    <m:oMath>
                       <m:sSubSup>
                         <m:sSubSupPr>
                           <m:ctrlPr>
                             <a:rPr lang="en-US" sz="3200" i="1">
-                              <a:latin typeface="Cambria Math" panose="02040503050406030204" pitchFamily="18" charset="0"/>
+                              <a:latin typeface="Cambria Math"/>
                             </a:rPr>
                           </m:ctrlPr>
                         </m:sSubSupPr>
@@ -20683,10 +21531,7 @@
                 <a:pPr/>
                 <a14:m>
                   <m:oMathPara xmlns:m="http://schemas.openxmlformats.org/officeDocument/2006/math">
-                    <m:oMathParaPr>
-                      <m:jc m:val="centerGroup"/>
-                    </m:oMathParaPr>
-                    <m:oMath xmlns:m="http://schemas.openxmlformats.org/officeDocument/2006/math">
+                    <m:oMath>
                       <m:f>
                         <m:fPr>
                           <m:ctrlPr>
@@ -20700,7 +21545,7 @@
                             <m:sSubSupPr>
                               <m:ctrlPr>
                                 <a:rPr lang="en-US" sz="3200" i="1">
-                                  <a:latin typeface="Cambria Math" panose="02040503050406030204" pitchFamily="18" charset="0"/>
+                                  <a:latin typeface="Cambria Math"/>
                                 </a:rPr>
                               </m:ctrlPr>
                             </m:sSubSupPr>
@@ -20747,7 +21592,7 @@
                             <m:sSubSupPr>
                               <m:ctrlPr>
                                 <a:rPr lang="en-US" sz="3200" i="1">
-                                  <a:latin typeface="Cambria Math" panose="02040503050406030204" pitchFamily="18" charset="0"/>
+                                  <a:latin typeface="Cambria Math"/>
                                 </a:rPr>
                               </m:ctrlPr>
                             </m:sSubSupPr>
@@ -20800,7 +21645,7 @@
                         <m:sSubSupPr>
                           <m:ctrlPr>
                             <a:rPr lang="en-US" sz="3200" i="1">
-                              <a:latin typeface="Cambria Math" panose="02040503050406030204" pitchFamily="18" charset="0"/>
+                              <a:latin typeface="Cambria Math"/>
                             </a:rPr>
                           </m:ctrlPr>
                         </m:sSubSupPr>
@@ -20924,7 +21769,7 @@
                       <m:sSubSupPr>
                         <m:ctrlPr>
                           <a:rPr lang="en-US" sz="3200" i="1">
-                            <a:latin typeface="Cambria Math" panose="02040503050406030204" pitchFamily="18" charset="0"/>
+                            <a:latin typeface="Cambria Math"/>
                           </a:rPr>
                         </m:ctrlPr>
                       </m:sSubSupPr>
@@ -20969,7 +21814,7 @@
                       <m:sSubSupPr>
                         <m:ctrlPr>
                           <a:rPr lang="en-US" sz="3200" i="1">
-                            <a:latin typeface="Cambria Math" panose="02040503050406030204" pitchFamily="18" charset="0"/>
+                            <a:latin typeface="Cambria Math"/>
                           </a:rPr>
                         </m:ctrlPr>
                       </m:sSubSupPr>
@@ -21022,7 +21867,7 @@
                       <m:sSubSupPr>
                         <m:ctrlPr>
                           <a:rPr lang="en-US" sz="3200" i="1">
-                            <a:latin typeface="Cambria Math" panose="02040503050406030204" pitchFamily="18" charset="0"/>
+                            <a:latin typeface="Cambria Math"/>
                           </a:rPr>
                         </m:ctrlPr>
                       </m:sSubSupPr>
@@ -21634,311 +22479,7 @@
 </p:sld>
 </file>
 
-<file path=ppt/slides/slide3.xml><?xml version="1.0" encoding="utf-8"?>
-<p:sld xmlns:a="http://schemas.openxmlformats.org/drawingml/2006/main" xmlns:r="http://schemas.openxmlformats.org/officeDocument/2006/relationships" xmlns:p="http://schemas.openxmlformats.org/presentationml/2006/main">
-  <p:cSld>
-    <p:spTree>
-      <p:nvGrpSpPr>
-        <p:cNvPr id="1" name=""/>
-        <p:cNvGrpSpPr/>
-        <p:nvPr/>
-      </p:nvGrpSpPr>
-      <p:grpSpPr>
-        <a:xfrm>
-          <a:off x="0" y="0"/>
-          <a:ext cx="0" cy="0"/>
-          <a:chOff x="0" y="0"/>
-          <a:chExt cx="0" cy="0"/>
-        </a:xfrm>
-      </p:grpSpPr>
-      <p:sp>
-        <p:nvSpPr>
-          <p:cNvPr id="2" name="Title 1"/>
-          <p:cNvSpPr>
-            <a:spLocks noGrp="1"/>
-          </p:cNvSpPr>
-          <p:nvPr>
-            <p:ph type="title"/>
-          </p:nvPr>
-        </p:nvSpPr>
-        <p:spPr/>
-        <p:txBody>
-          <a:bodyPr/>
-          <a:lstStyle/>
-          <a:p>
-            <a:r>
-              <a:rPr lang="en-US" dirty="0"/>
-              <a:t>Designing Utopia</a:t>
-            </a:r>
-          </a:p>
-        </p:txBody>
-      </p:sp>
-      <p:sp>
-        <p:nvSpPr>
-          <p:cNvPr id="3" name="Content Placeholder 2"/>
-          <p:cNvSpPr>
-            <a:spLocks noGrp="1"/>
-          </p:cNvSpPr>
-          <p:nvPr>
-            <p:ph idx="1"/>
-          </p:nvPr>
-        </p:nvSpPr>
-        <p:spPr>
-          <a:xfrm>
-            <a:off x="609600" y="1676400"/>
-            <a:ext cx="10972800" cy="5045075"/>
-          </a:xfrm>
-        </p:spPr>
-        <p:txBody>
-          <a:bodyPr>
-            <a:normAutofit/>
-          </a:bodyPr>
-          <a:lstStyle/>
-          <a:p>
-            <a:r>
-              <a:rPr lang="en-US" dirty="0"/>
-              <a:t>Our goal: Design a government – laws, regulation and institutions – that is </a:t>
-            </a:r>
-            <a:r>
-              <a:rPr lang="en-US" dirty="0">
-                <a:solidFill>
-                  <a:schemeClr val="accent2"/>
-                </a:solidFill>
-              </a:rPr>
-              <a:t>as good as possible</a:t>
-            </a:r>
-            <a:r>
-              <a:rPr lang="en-US" dirty="0"/>
-              <a:t> in terms of generating material well-being</a:t>
-            </a:r>
-          </a:p>
-          <a:p>
-            <a:pPr marL="457200" indent="-457200"/>
-            <a:r>
-              <a:rPr lang="en-US" dirty="0"/>
-              <a:t>Two challenges:</a:t>
-            </a:r>
-          </a:p>
-          <a:p>
-            <a:pPr lvl="1"/>
-            <a:r>
-              <a:rPr lang="en-US" b="1" dirty="0"/>
-              <a:t>Information challenge</a:t>
-            </a:r>
-            <a:r>
-              <a:rPr lang="en-US" dirty="0"/>
-              <a:t>: How do we figure out what to produce, </a:t>
-            </a:r>
-            <a:br>
-              <a:rPr lang="en-US" dirty="0"/>
-            </a:br>
-            <a:r>
-              <a:rPr lang="en-US" dirty="0"/>
-              <a:t>who should produce it, and who should consume it? </a:t>
-            </a:r>
-          </a:p>
-          <a:p>
-            <a:pPr lvl="1"/>
-            <a:r>
-              <a:rPr lang="en-US" b="1" dirty="0"/>
-              <a:t>Incentive challenge</a:t>
-            </a:r>
-            <a:r>
-              <a:rPr lang="en-US" dirty="0"/>
-              <a:t>: Even if we know what needs to be done, </a:t>
-            </a:r>
-            <a:br>
-              <a:rPr lang="en-US" dirty="0"/>
-            </a:br>
-            <a:r>
-              <a:rPr lang="en-US" dirty="0"/>
-              <a:t>how do we get people to do these things?</a:t>
-            </a:r>
-          </a:p>
-          <a:p>
-            <a:endParaRPr lang="en-US" dirty="0"/>
-          </a:p>
-        </p:txBody>
-      </p:sp>
-      <p:sp>
-        <p:nvSpPr>
-          <p:cNvPr id="4" name="Slide Number Placeholder 3"/>
-          <p:cNvSpPr>
-            <a:spLocks noGrp="1"/>
-          </p:cNvSpPr>
-          <p:nvPr>
-            <p:ph type="sldNum" sz="quarter" idx="12"/>
-          </p:nvPr>
-        </p:nvSpPr>
-        <p:spPr/>
-        <p:txBody>
-          <a:bodyPr/>
-          <a:lstStyle/>
-          <a:p>
-            <a:fld id="{CFF8E9C2-617A-4D65-AFBD-F489864C0492}" type="slidenum">
-              <a:rPr lang="en-US" smtClean="0"/>
-              <a:pPr/>
-              <a:t>3</a:t>
-            </a:fld>
-            <a:endParaRPr lang="en-US" dirty="0"/>
-          </a:p>
-        </p:txBody>
-      </p:sp>
-    </p:spTree>
-    <p:extLst>
-      <p:ext uri="{BB962C8B-B14F-4D97-AF65-F5344CB8AC3E}">
-        <p14:creationId xmlns:p14="http://schemas.microsoft.com/office/powerpoint/2010/main" val="1179380788"/>
-      </p:ext>
-    </p:extLst>
-  </p:cSld>
-  <p:clrMapOvr>
-    <a:masterClrMapping/>
-  </p:clrMapOvr>
-  <p:timing>
-    <p:tnLst>
-      <p:par>
-        <p:cTn id="1" dur="indefinite" restart="never" nodeType="tmRoot">
-          <p:childTnLst>
-            <p:seq concurrent="1" nextAc="seek">
-              <p:cTn id="2" dur="indefinite" nodeType="mainSeq">
-                <p:childTnLst>
-                  <p:par>
-                    <p:cTn id="3" fill="hold">
-                      <p:stCondLst>
-                        <p:cond delay="indefinite"/>
-                      </p:stCondLst>
-                      <p:childTnLst>
-                        <p:par>
-                          <p:cTn id="4" fill="hold">
-                            <p:stCondLst>
-                              <p:cond delay="0"/>
-                            </p:stCondLst>
-                            <p:childTnLst>
-                              <p:par>
-                                <p:cTn id="5" presetID="1" presetClass="entr" presetSubtype="0" fill="hold" nodeType="clickEffect">
-                                  <p:stCondLst>
-                                    <p:cond delay="0"/>
-                                  </p:stCondLst>
-                                  <p:childTnLst>
-                                    <p:set>
-                                      <p:cBhvr>
-                                        <p:cTn id="6" dur="1" fill="hold">
-                                          <p:stCondLst>
-                                            <p:cond delay="0"/>
-                                          </p:stCondLst>
-                                        </p:cTn>
-                                        <p:tgtEl>
-                                          <p:spTgt spid="3">
-                                            <p:txEl>
-                                              <p:pRg st="1" end="1"/>
-                                            </p:txEl>
-                                          </p:spTgt>
-                                        </p:tgtEl>
-                                        <p:attrNameLst>
-                                          <p:attrName>style.visibility</p:attrName>
-                                        </p:attrNameLst>
-                                      </p:cBhvr>
-                                      <p:to>
-                                        <p:strVal val="visible"/>
-                                      </p:to>
-                                    </p:set>
-                                  </p:childTnLst>
-                                </p:cTn>
-                              </p:par>
-                              <p:par>
-                                <p:cTn id="7" presetID="1" presetClass="entr" presetSubtype="0" fill="hold" nodeType="withEffect">
-                                  <p:stCondLst>
-                                    <p:cond delay="0"/>
-                                  </p:stCondLst>
-                                  <p:childTnLst>
-                                    <p:set>
-                                      <p:cBhvr>
-                                        <p:cTn id="8" dur="1" fill="hold">
-                                          <p:stCondLst>
-                                            <p:cond delay="0"/>
-                                          </p:stCondLst>
-                                        </p:cTn>
-                                        <p:tgtEl>
-                                          <p:spTgt spid="3">
-                                            <p:txEl>
-                                              <p:pRg st="2" end="2"/>
-                                            </p:txEl>
-                                          </p:spTgt>
-                                        </p:tgtEl>
-                                        <p:attrNameLst>
-                                          <p:attrName>style.visibility</p:attrName>
-                                        </p:attrNameLst>
-                                      </p:cBhvr>
-                                      <p:to>
-                                        <p:strVal val="visible"/>
-                                      </p:to>
-                                    </p:set>
-                                  </p:childTnLst>
-                                </p:cTn>
-                              </p:par>
-                              <p:par>
-                                <p:cTn id="9" presetID="1" presetClass="entr" presetSubtype="0" fill="hold" nodeType="withEffect">
-                                  <p:stCondLst>
-                                    <p:cond delay="0"/>
-                                  </p:stCondLst>
-                                  <p:childTnLst>
-                                    <p:set>
-                                      <p:cBhvr>
-                                        <p:cTn id="10" dur="1" fill="hold">
-                                          <p:stCondLst>
-                                            <p:cond delay="0"/>
-                                          </p:stCondLst>
-                                        </p:cTn>
-                                        <p:tgtEl>
-                                          <p:spTgt spid="3">
-                                            <p:txEl>
-                                              <p:pRg st="3" end="3"/>
-                                            </p:txEl>
-                                          </p:spTgt>
-                                        </p:tgtEl>
-                                        <p:attrNameLst>
-                                          <p:attrName>style.visibility</p:attrName>
-                                        </p:attrNameLst>
-                                      </p:cBhvr>
-                                      <p:to>
-                                        <p:strVal val="visible"/>
-                                      </p:to>
-                                    </p:set>
-                                  </p:childTnLst>
-                                </p:cTn>
-                              </p:par>
-                            </p:childTnLst>
-                          </p:cTn>
-                        </p:par>
-                      </p:childTnLst>
-                    </p:cTn>
-                  </p:par>
-                </p:childTnLst>
-              </p:cTn>
-              <p:prevCondLst>
-                <p:cond evt="onPrev" delay="0">
-                  <p:tgtEl>
-                    <p:sldTgt/>
-                  </p:tgtEl>
-                </p:cond>
-              </p:prevCondLst>
-              <p:nextCondLst>
-                <p:cond evt="onNext" delay="0">
-                  <p:tgtEl>
-                    <p:sldTgt/>
-                  </p:tgtEl>
-                </p:cond>
-              </p:nextCondLst>
-            </p:seq>
-          </p:childTnLst>
-        </p:cTn>
-      </p:par>
-    </p:tnLst>
-  </p:timing>
-</p:sld>
-</file>
-
-<file path=ppt/slides/slide30.xml><?xml version="1.0" encoding="utf-8"?>
+<file path=ppt/slides/slide32.xml><?xml version="1.0" encoding="utf-8"?>
 <p:sld xmlns:a="http://schemas.openxmlformats.org/drawingml/2006/main" xmlns:r="http://schemas.openxmlformats.org/officeDocument/2006/relationships" xmlns:p="http://schemas.openxmlformats.org/presentationml/2006/main">
   <p:cSld>
     <p:spTree>
@@ -22011,10 +22552,7 @@
                 </a:pPr>
                 <a14:m>
                   <m:oMathPara xmlns:m="http://schemas.openxmlformats.org/officeDocument/2006/math">
-                    <m:oMathParaPr>
-                      <m:jc m:val="centerGroup"/>
-                    </m:oMathParaPr>
-                    <m:oMath xmlns:m="http://schemas.openxmlformats.org/officeDocument/2006/math">
+                    <m:oMath>
                       <m:f>
                         <m:fPr>
                           <m:ctrlPr>
@@ -22028,7 +22566,7 @@
                             <m:sSubSupPr>
                               <m:ctrlPr>
                                 <a:rPr lang="en-US" i="1">
-                                  <a:latin typeface="Cambria Math" panose="02040503050406030204" pitchFamily="18" charset="0"/>
+                                  <a:latin typeface="Cambria Math"/>
                                 </a:rPr>
                               </m:ctrlPr>
                             </m:sSubSupPr>
@@ -22075,7 +22613,7 @@
                             <m:sSubSupPr>
                               <m:ctrlPr>
                                 <a:rPr lang="en-US" i="1">
-                                  <a:latin typeface="Cambria Math" panose="02040503050406030204" pitchFamily="18" charset="0"/>
+                                  <a:latin typeface="Cambria Math"/>
                                 </a:rPr>
                               </m:ctrlPr>
                             </m:sSubSupPr>
@@ -22128,7 +22666,7 @@
                         <m:sSubSupPr>
                           <m:ctrlPr>
                             <a:rPr lang="en-US" i="1">
-                              <a:latin typeface="Cambria Math" panose="02040503050406030204" pitchFamily="18" charset="0"/>
+                              <a:latin typeface="Cambria Math"/>
                             </a:rPr>
                           </m:ctrlPr>
                         </m:sSubSupPr>
@@ -22206,7 +22744,7 @@
                           <m:sSubSupPr>
                             <m:ctrlPr>
                               <a:rPr lang="en-US" i="1">
-                                <a:latin typeface="Cambria Math" panose="02040503050406030204" pitchFamily="18" charset="0"/>
+                                <a:latin typeface="Cambria Math"/>
                               </a:rPr>
                             </m:ctrlPr>
                           </m:sSubSupPr>
@@ -22253,7 +22791,7 @@
                           <m:sSubSupPr>
                             <m:ctrlPr>
                               <a:rPr lang="en-US" i="1">
-                                <a:latin typeface="Cambria Math" panose="02040503050406030204" pitchFamily="18" charset="0"/>
+                                <a:latin typeface="Cambria Math"/>
                               </a:rPr>
                             </m:ctrlPr>
                           </m:sSubSupPr>
@@ -22306,7 +22844,7 @@
                       <m:sSubSupPr>
                         <m:ctrlPr>
                           <a:rPr lang="en-US" i="1">
-                            <a:latin typeface="Cambria Math" panose="02040503050406030204" pitchFamily="18" charset="0"/>
+                            <a:latin typeface="Cambria Math"/>
                           </a:rPr>
                         </m:ctrlPr>
                       </m:sSubSupPr>
@@ -22365,7 +22903,7 @@
                       <m:sSubSupPr>
                         <m:ctrlPr>
                           <a:rPr lang="en-US" i="1">
-                            <a:latin typeface="Cambria Math" panose="02040503050406030204" pitchFamily="18" charset="0"/>
+                            <a:latin typeface="Cambria Math"/>
                           </a:rPr>
                         </m:ctrlPr>
                       </m:sSubSupPr>
@@ -22418,7 +22956,7 @@
                       <m:sSubSupPr>
                         <m:ctrlPr>
                           <a:rPr lang="en-US" i="1">
-                            <a:latin typeface="Cambria Math" panose="02040503050406030204" pitchFamily="18" charset="0"/>
+                            <a:latin typeface="Cambria Math"/>
                           </a:rPr>
                         </m:ctrlPr>
                       </m:sSubSupPr>
@@ -22469,7 +23007,7 @@
                       <m:sSubSupPr>
                         <m:ctrlPr>
                           <a:rPr lang="en-US" i="1">
-                            <a:latin typeface="Cambria Math" panose="02040503050406030204" pitchFamily="18" charset="0"/>
+                            <a:latin typeface="Cambria Math"/>
                           </a:rPr>
                         </m:ctrlPr>
                       </m:sSubSupPr>
@@ -22584,7 +23122,7 @@
               <a:pPr>
                 <a:defRPr/>
               </a:pPr>
-              <a:t>30</a:t>
+              <a:t>32</a:t>
             </a:fld>
             <a:endParaRPr lang="en-US" dirty="0"/>
           </a:p>
@@ -22780,7 +23318,7 @@
 </p:sld>
 </file>
 
-<file path=ppt/slides/slide31.xml><?xml version="1.0" encoding="utf-8"?>
+<file path=ppt/slides/slide33.xml><?xml version="1.0" encoding="utf-8"?>
 <p:sld xmlns:a="http://schemas.openxmlformats.org/drawingml/2006/main" xmlns:r="http://schemas.openxmlformats.org/officeDocument/2006/relationships" xmlns:p="http://schemas.openxmlformats.org/presentationml/2006/main">
   <p:cSld>
     <p:spTree>
@@ -22891,7 +23429,7 @@
             <a:fld id="{CFF8E9C2-617A-4D65-AFBD-F489864C0492}" type="slidenum">
               <a:rPr lang="en-US" smtClean="0"/>
               <a:pPr/>
-              <a:t>31</a:t>
+              <a:t>33</a:t>
             </a:fld>
             <a:endParaRPr lang="en-US"/>
           </a:p>
@@ -22910,7 +23448,7 @@
 </p:sld>
 </file>
 
-<file path=ppt/slides/slide32.xml><?xml version="1.0" encoding="utf-8"?>
+<file path=ppt/slides/slide34.xml><?xml version="1.0" encoding="utf-8"?>
 <p:sld xmlns:a="http://schemas.openxmlformats.org/drawingml/2006/main" xmlns:r="http://schemas.openxmlformats.org/officeDocument/2006/relationships" xmlns:p="http://schemas.openxmlformats.org/presentationml/2006/main">
   <p:cSld>
     <p:spTree>
@@ -23014,7 +23552,7 @@
             <a:fld id="{CFF8E9C2-617A-4D65-AFBD-F489864C0492}" type="slidenum">
               <a:rPr lang="en-US" smtClean="0"/>
               <a:pPr/>
-              <a:t>32</a:t>
+              <a:t>34</a:t>
             </a:fld>
             <a:endParaRPr lang="en-US"/>
           </a:p>
@@ -23210,7 +23748,7 @@
 </p:sld>
 </file>
 
-<file path=ppt/slides/slide33.xml><?xml version="1.0" encoding="utf-8"?>
+<file path=ppt/slides/slide35.xml><?xml version="1.0" encoding="utf-8"?>
 <p:sld xmlns:a="http://schemas.openxmlformats.org/drawingml/2006/main" xmlns:r="http://schemas.openxmlformats.org/officeDocument/2006/relationships" xmlns:p="http://schemas.openxmlformats.org/presentationml/2006/main">
   <p:cSld>
     <p:spTree>
@@ -23324,7 +23862,7 @@
                       <m:sSubSupPr>
                         <m:ctrlPr>
                           <a:rPr lang="en-US" i="1">
-                            <a:latin typeface="Cambria Math" panose="02040503050406030204" pitchFamily="18" charset="0"/>
+                            <a:latin typeface="Cambria Math"/>
                           </a:rPr>
                         </m:ctrlPr>
                       </m:sSubSupPr>
@@ -23369,7 +23907,7 @@
                       <m:sSubSupPr>
                         <m:ctrlPr>
                           <a:rPr lang="en-US" i="1">
-                            <a:latin typeface="Cambria Math" panose="02040503050406030204" pitchFamily="18" charset="0"/>
+                            <a:latin typeface="Cambria Math"/>
                           </a:rPr>
                         </m:ctrlPr>
                       </m:sSubSupPr>
@@ -23429,7 +23967,7 @@
                           <m:sSubSupPr>
                             <m:ctrlPr>
                               <a:rPr lang="en-US" i="1">
-                                <a:latin typeface="Cambria Math" panose="02040503050406030204" pitchFamily="18" charset="0"/>
+                                <a:latin typeface="Cambria Math"/>
                               </a:rPr>
                             </m:ctrlPr>
                           </m:sSubSupPr>
@@ -23527,7 +24065,7 @@
                           <m:sSubSupPr>
                             <m:ctrlPr>
                               <a:rPr lang="en-US" i="1">
-                                <a:latin typeface="Cambria Math" panose="02040503050406030204" pitchFamily="18" charset="0"/>
+                                <a:latin typeface="Cambria Math"/>
                               </a:rPr>
                             </m:ctrlPr>
                           </m:sSubSupPr>
@@ -23574,7 +24112,7 @@
                           <m:sSubSupPr>
                             <m:ctrlPr>
                               <a:rPr lang="en-US" i="1">
-                                <a:latin typeface="Cambria Math" panose="02040503050406030204" pitchFamily="18" charset="0"/>
+                                <a:latin typeface="Cambria Math"/>
                               </a:rPr>
                             </m:ctrlPr>
                           </m:sSubSupPr>
@@ -23636,7 +24174,7 @@
                           <m:sSubSupPr>
                             <m:ctrlPr>
                               <a:rPr lang="en-US" i="1">
-                                <a:latin typeface="Cambria Math" panose="02040503050406030204" pitchFamily="18" charset="0"/>
+                                <a:latin typeface="Cambria Math"/>
                               </a:rPr>
                             </m:ctrlPr>
                           </m:sSubSupPr>
@@ -23683,7 +24221,7 @@
                           <m:sSubSupPr>
                             <m:ctrlPr>
                               <a:rPr lang="en-US" i="1">
-                                <a:latin typeface="Cambria Math" panose="02040503050406030204" pitchFamily="18" charset="0"/>
+                                <a:latin typeface="Cambria Math"/>
                               </a:rPr>
                             </m:ctrlPr>
                           </m:sSubSupPr>
@@ -23801,7 +24339,7 @@
             <a:fld id="{CFF8E9C2-617A-4D65-AFBD-F489864C0492}" type="slidenum">
               <a:rPr lang="en-US" smtClean="0"/>
               <a:pPr/>
-              <a:t>33</a:t>
+              <a:t>35</a:t>
             </a:fld>
             <a:endParaRPr lang="en-US"/>
           </a:p>
@@ -23834,15 +24372,12 @@
                 <a:pPr/>
                 <a14:m>
                   <m:oMathPara xmlns:m="http://schemas.openxmlformats.org/officeDocument/2006/math">
-                    <m:oMathParaPr>
-                      <m:jc m:val="centerGroup"/>
-                    </m:oMathParaPr>
-                    <m:oMath xmlns:m="http://schemas.openxmlformats.org/officeDocument/2006/math">
+                    <m:oMath>
                       <m:sSubSup>
                         <m:sSubSupPr>
                           <m:ctrlPr>
                             <a:rPr lang="en-US" sz="3200" i="1">
-                              <a:latin typeface="Cambria Math" panose="02040503050406030204" pitchFamily="18" charset="0"/>
+                              <a:latin typeface="Cambria Math"/>
                             </a:rPr>
                           </m:ctrlPr>
                         </m:sSubSupPr>
@@ -23887,7 +24422,7 @@
                         <m:sSubSupPr>
                           <m:ctrlPr>
                             <a:rPr lang="en-US" sz="3200" i="1">
-                              <a:latin typeface="Cambria Math" panose="02040503050406030204" pitchFamily="18" charset="0"/>
+                              <a:latin typeface="Cambria Math"/>
                             </a:rPr>
                           </m:ctrlPr>
                         </m:sSubSupPr>
@@ -24002,10 +24537,7 @@
                 <a:pPr/>
                 <a14:m>
                   <m:oMathPara xmlns:m="http://schemas.openxmlformats.org/officeDocument/2006/math">
-                    <m:oMathParaPr>
-                      <m:jc m:val="centerGroup"/>
-                    </m:oMathParaPr>
-                    <m:oMath xmlns:m="http://schemas.openxmlformats.org/officeDocument/2006/math">
+                    <m:oMath>
                       <m:sSubSup>
                         <m:sSubSupPr>
                           <m:ctrlPr>
@@ -24019,7 +24551,7 @@
                             <m:sSubSupPr>
                               <m:ctrlPr>
                                 <a:rPr lang="en-US" sz="3200" i="1">
-                                  <a:latin typeface="Cambria Math" panose="02040503050406030204" pitchFamily="18" charset="0"/>
+                                  <a:latin typeface="Cambria Math"/>
                                 </a:rPr>
                               </m:ctrlPr>
                             </m:sSubSupPr>
@@ -24378,7 +24910,7 @@
 </p:sld>
 </file>
 
-<file path=ppt/slides/slide34.xml><?xml version="1.0" encoding="utf-8"?>
+<file path=ppt/slides/slide36.xml><?xml version="1.0" encoding="utf-8"?>
 <p:sld xmlns:a="http://schemas.openxmlformats.org/drawingml/2006/main" xmlns:r="http://schemas.openxmlformats.org/officeDocument/2006/relationships" xmlns:p="http://schemas.openxmlformats.org/presentationml/2006/main">
   <p:cSld>
     <p:spTree>
@@ -24502,7 +25034,7 @@
               <a:pPr>
                 <a:defRPr/>
               </a:pPr>
-              <a:t>34</a:t>
+              <a:t>36</a:t>
             </a:fld>
             <a:endParaRPr lang="en-US" dirty="0"/>
           </a:p>
@@ -24600,7 +25132,7 @@
 </p:sld>
 </file>
 
-<file path=ppt/slides/slide35.xml><?xml version="1.0" encoding="utf-8"?>
+<file path=ppt/slides/slide37.xml><?xml version="1.0" encoding="utf-8"?>
 <p:sld xmlns:a="http://schemas.openxmlformats.org/drawingml/2006/main" xmlns:r="http://schemas.openxmlformats.org/officeDocument/2006/relationships" xmlns:p="http://schemas.openxmlformats.org/presentationml/2006/main">
   <p:cSld>
     <p:spTree>
@@ -24674,10 +25206,7 @@
                 </a:pPr>
                 <a14:m>
                   <m:oMathPara xmlns:m="http://schemas.openxmlformats.org/officeDocument/2006/math">
-                    <m:oMathParaPr>
-                      <m:jc m:val="centerGroup"/>
-                    </m:oMathParaPr>
-                    <m:oMath xmlns:m="http://schemas.openxmlformats.org/officeDocument/2006/math">
+                    <m:oMath>
                       <m:f>
                         <m:fPr>
                           <m:ctrlPr>
@@ -24691,7 +25220,7 @@
                             <m:sSubSupPr>
                               <m:ctrlPr>
                                 <a:rPr lang="en-US" i="1">
-                                  <a:latin typeface="Cambria Math" panose="02040503050406030204" pitchFamily="18" charset="0"/>
+                                  <a:latin typeface="Cambria Math"/>
                                 </a:rPr>
                               </m:ctrlPr>
                             </m:sSubSupPr>
@@ -24738,7 +25267,7 @@
                             <m:sSubSupPr>
                               <m:ctrlPr>
                                 <a:rPr lang="en-US" i="1">
-                                  <a:latin typeface="Cambria Math" panose="02040503050406030204" pitchFamily="18" charset="0"/>
+                                  <a:latin typeface="Cambria Math"/>
                                 </a:rPr>
                               </m:ctrlPr>
                             </m:sSubSupPr>
@@ -24792,7 +25321,6 @@
                           <m:ctrlPr>
                             <a:rPr lang="en-US" i="1">
                               <a:latin typeface="Cambria Math" panose="02040503050406030204" pitchFamily="18" charset="0"/>
-                              <a:ea typeface="Cambria Math"/>
                             </a:rPr>
                           </m:ctrlPr>
                         </m:fPr>
@@ -24801,7 +25329,7 @@
                             <m:sSubSupPr>
                               <m:ctrlPr>
                                 <a:rPr lang="en-US" i="1">
-                                  <a:latin typeface="Cambria Math" panose="02040503050406030204" pitchFamily="18" charset="0"/>
+                                  <a:latin typeface="Cambria Math"/>
                                 </a:rPr>
                               </m:ctrlPr>
                             </m:sSubSupPr>
@@ -24848,7 +25376,7 @@
                             <m:sSubSupPr>
                               <m:ctrlPr>
                                 <a:rPr lang="en-US" i="1">
-                                  <a:latin typeface="Cambria Math" panose="02040503050406030204" pitchFamily="18" charset="0"/>
+                                  <a:latin typeface="Cambria Math"/>
                                 </a:rPr>
                               </m:ctrlPr>
                             </m:sSubSupPr>
@@ -24911,10 +25439,7 @@
                 </a:pPr>
                 <a14:m>
                   <m:oMathPara xmlns:m="http://schemas.openxmlformats.org/officeDocument/2006/math">
-                    <m:oMathParaPr>
-                      <m:jc m:val="centerGroup"/>
-                    </m:oMathParaPr>
-                    <m:oMath xmlns:m="http://schemas.openxmlformats.org/officeDocument/2006/math">
+                    <m:oMath>
                       <m:f>
                         <m:fPr>
                           <m:ctrlPr>
@@ -24928,7 +25453,7 @@
                             <m:sSubSupPr>
                               <m:ctrlPr>
                                 <a:rPr lang="en-US" i="1">
-                                  <a:latin typeface="Cambria Math" panose="02040503050406030204" pitchFamily="18" charset="0"/>
+                                  <a:latin typeface="Cambria Math"/>
                                 </a:rPr>
                               </m:ctrlPr>
                             </m:sSubSupPr>
@@ -24975,7 +25500,7 @@
                             <m:sSubSupPr>
                               <m:ctrlPr>
                                 <a:rPr lang="en-US" i="1">
-                                  <a:latin typeface="Cambria Math" panose="02040503050406030204" pitchFamily="18" charset="0"/>
+                                  <a:latin typeface="Cambria Math"/>
                                 </a:rPr>
                               </m:ctrlPr>
                             </m:sSubSupPr>
@@ -25028,7 +25553,7 @@
                         <m:sSubSupPr>
                           <m:ctrlPr>
                             <a:rPr lang="en-US" i="1">
-                              <a:latin typeface="Cambria Math" panose="02040503050406030204" pitchFamily="18" charset="0"/>
+                              <a:latin typeface="Cambria Math"/>
                             </a:rPr>
                           </m:ctrlPr>
                         </m:sSubSupPr>
@@ -25161,10 +25686,7 @@
                 </a:pPr>
                 <a14:m>
                   <m:oMathPara xmlns:m="http://schemas.openxmlformats.org/officeDocument/2006/math">
-                    <m:oMathParaPr>
-                      <m:jc m:val="centerGroup"/>
-                    </m:oMathParaPr>
-                    <m:oMath xmlns:m="http://schemas.openxmlformats.org/officeDocument/2006/math">
+                    <m:oMath>
                       <m:f>
                         <m:fPr>
                           <m:ctrlPr>
@@ -25178,7 +25700,7 @@
                             <m:sSubSupPr>
                               <m:ctrlPr>
                                 <a:rPr lang="en-US" i="1">
-                                  <a:latin typeface="Cambria Math" panose="02040503050406030204" pitchFamily="18" charset="0"/>
+                                  <a:latin typeface="Cambria Math"/>
                                 </a:rPr>
                               </m:ctrlPr>
                             </m:sSubSupPr>
@@ -25225,7 +25747,7 @@
                             <m:sSubSupPr>
                               <m:ctrlPr>
                                 <a:rPr lang="en-US" i="1">
-                                  <a:latin typeface="Cambria Math" panose="02040503050406030204" pitchFamily="18" charset="0"/>
+                                  <a:latin typeface="Cambria Math"/>
                                 </a:rPr>
                               </m:ctrlPr>
                             </m:sSubSupPr>
@@ -25287,7 +25809,7 @@
                             <m:sSubSupPr>
                               <m:ctrlPr>
                                 <a:rPr lang="en-US" i="1">
-                                  <a:latin typeface="Cambria Math" panose="02040503050406030204" pitchFamily="18" charset="0"/>
+                                  <a:latin typeface="Cambria Math"/>
                                 </a:rPr>
                               </m:ctrlPr>
                             </m:sSubSupPr>
@@ -25334,7 +25856,7 @@
                             <m:sSubSupPr>
                               <m:ctrlPr>
                                 <a:rPr lang="en-US" i="1">
-                                  <a:latin typeface="Cambria Math" panose="02040503050406030204" pitchFamily="18" charset="0"/>
+                                  <a:latin typeface="Cambria Math"/>
                                 </a:rPr>
                               </m:ctrlPr>
                             </m:sSubSupPr>
@@ -25448,7 +25970,7 @@
               <a:pPr>
                 <a:defRPr/>
               </a:pPr>
-              <a:t>35</a:t>
+              <a:t>37</a:t>
             </a:fld>
             <a:endParaRPr lang="en-US" dirty="0"/>
           </a:p>
@@ -25688,7 +26210,7 @@
 </p:sld>
 </file>
 
-<file path=ppt/slides/slide36.xml><?xml version="1.0" encoding="utf-8"?>
+<file path=ppt/slides/slide38.xml><?xml version="1.0" encoding="utf-8"?>
 <p:sld xmlns:a="http://schemas.openxmlformats.org/drawingml/2006/main" xmlns:r="http://schemas.openxmlformats.org/officeDocument/2006/relationships" xmlns:p="http://schemas.openxmlformats.org/presentationml/2006/main">
   <p:cSld>
     <p:spTree>
@@ -25816,7 +26338,7 @@
             <a:fld id="{CFF8E9C2-617A-4D65-AFBD-F489864C0492}" type="slidenum">
               <a:rPr lang="en-US" smtClean="0"/>
               <a:pPr/>
-              <a:t>36</a:t>
+              <a:t>38</a:t>
             </a:fld>
             <a:endParaRPr lang="en-US"/>
           </a:p>
@@ -26043,7 +26565,7 @@
 </p:sld>
 </file>
 
-<file path=ppt/slides/slide37.xml><?xml version="1.0" encoding="utf-8"?>
+<file path=ppt/slides/slide39.xml><?xml version="1.0" encoding="utf-8"?>
 <p:sld xmlns:a="http://schemas.openxmlformats.org/drawingml/2006/main" xmlns:r="http://schemas.openxmlformats.org/officeDocument/2006/relationships" xmlns:p="http://schemas.openxmlformats.org/presentationml/2006/main">
   <p:cSld>
     <p:spTree>
@@ -26200,7 +26722,7 @@
               <a:pPr>
                 <a:defRPr/>
               </a:pPr>
-              <a:t>37</a:t>
+              <a:t>39</a:t>
             </a:fld>
             <a:endParaRPr lang="en-US" dirty="0"/>
           </a:p>
@@ -26298,7 +26820,387 @@
 </p:sld>
 </file>
 
-<file path=ppt/slides/slide38.xml><?xml version="1.0" encoding="utf-8"?>
+<file path=ppt/slides/slide4.xml><?xml version="1.0" encoding="utf-8"?>
+<p:sld xmlns:a="http://schemas.openxmlformats.org/drawingml/2006/main" xmlns:r="http://schemas.openxmlformats.org/officeDocument/2006/relationships" xmlns:p="http://schemas.openxmlformats.org/presentationml/2006/main">
+  <p:cSld>
+    <p:spTree>
+      <p:nvGrpSpPr>
+        <p:cNvPr id="1" name=""/>
+        <p:cNvGrpSpPr/>
+        <p:nvPr/>
+      </p:nvGrpSpPr>
+      <p:grpSpPr>
+        <a:xfrm>
+          <a:off x="0" y="0"/>
+          <a:ext cx="0" cy="0"/>
+          <a:chOff x="0" y="0"/>
+          <a:chExt cx="0" cy="0"/>
+        </a:xfrm>
+      </p:grpSpPr>
+      <p:sp>
+        <p:nvSpPr>
+          <p:cNvPr id="2" name="Title 1"/>
+          <p:cNvSpPr>
+            <a:spLocks noGrp="1"/>
+          </p:cNvSpPr>
+          <p:nvPr>
+            <p:ph type="title"/>
+          </p:nvPr>
+        </p:nvSpPr>
+        <p:spPr/>
+        <p:txBody>
+          <a:bodyPr>
+            <a:normAutofit/>
+          </a:bodyPr>
+          <a:lstStyle/>
+          <a:p>
+            <a:r>
+              <a:rPr lang="en-US" dirty="0"/>
+              <a:t>Different Ways to Organize Societies</a:t>
+            </a:r>
+          </a:p>
+        </p:txBody>
+      </p:sp>
+      <p:sp>
+        <p:nvSpPr>
+          <p:cNvPr id="3" name="Content Placeholder 2"/>
+          <p:cNvSpPr>
+            <a:spLocks noGrp="1"/>
+          </p:cNvSpPr>
+          <p:nvPr>
+            <p:ph idx="1"/>
+          </p:nvPr>
+        </p:nvSpPr>
+        <p:spPr>
+          <a:xfrm>
+            <a:off x="609600" y="1595887"/>
+            <a:ext cx="10972800" cy="5257800"/>
+          </a:xfrm>
+        </p:spPr>
+        <p:txBody>
+          <a:bodyPr>
+            <a:normAutofit/>
+          </a:bodyPr>
+          <a:lstStyle/>
+          <a:p>
+            <a:r>
+              <a:rPr lang="en-US" dirty="0"/>
+              <a:t>Families / Villages / Tribes</a:t>
+            </a:r>
+          </a:p>
+          <a:p>
+            <a:pPr lvl="1"/>
+            <a:r>
+              <a:rPr lang="en-US" dirty="0"/>
+              <a:t>Kin-based altruism, tit-for-tat, loyalty to group</a:t>
+            </a:r>
+          </a:p>
+          <a:p>
+            <a:pPr lvl="1"/>
+            <a:r>
+              <a:rPr lang="en-US" dirty="0"/>
+              <a:t>Respect for authority and existing hierarchies</a:t>
+            </a:r>
+          </a:p>
+          <a:p>
+            <a:r>
+              <a:rPr lang="en-US" dirty="0"/>
+              <a:t>Larger societies:</a:t>
+            </a:r>
+          </a:p>
+          <a:p>
+            <a:pPr lvl="1"/>
+            <a:r>
+              <a:rPr lang="en-US" dirty="0"/>
+              <a:t>Raw coercion, respect for authority and existing hierarchies</a:t>
+            </a:r>
+          </a:p>
+          <a:p>
+            <a:pPr lvl="1"/>
+            <a:r>
+              <a:rPr lang="en-US" dirty="0"/>
+              <a:t>Society very rigid / No solution to information challenge</a:t>
+            </a:r>
+          </a:p>
+          <a:p>
+            <a:r>
+              <a:rPr lang="en-US" dirty="0"/>
+              <a:t>Is there another way?</a:t>
+            </a:r>
+          </a:p>
+          <a:p>
+            <a:pPr lvl="1"/>
+            <a:r>
+              <a:rPr lang="en-US" dirty="0"/>
+              <a:t>Central planning? Something else?</a:t>
+            </a:r>
+          </a:p>
+        </p:txBody>
+      </p:sp>
+      <p:sp>
+        <p:nvSpPr>
+          <p:cNvPr id="4" name="Slide Number Placeholder 3"/>
+          <p:cNvSpPr>
+            <a:spLocks noGrp="1"/>
+          </p:cNvSpPr>
+          <p:nvPr>
+            <p:ph type="sldNum" sz="quarter" idx="12"/>
+          </p:nvPr>
+        </p:nvSpPr>
+        <p:spPr>
+          <a:xfrm>
+            <a:off x="8077200" y="6339098"/>
+            <a:ext cx="2133600" cy="365125"/>
+          </a:xfrm>
+        </p:spPr>
+        <p:txBody>
+          <a:bodyPr/>
+          <a:lstStyle/>
+          <a:p>
+            <a:fld id="{CFF8E9C2-617A-4D65-AFBD-F489864C0492}" type="slidenum">
+              <a:rPr lang="en-US" smtClean="0"/>
+              <a:pPr/>
+              <a:t>4</a:t>
+            </a:fld>
+            <a:endParaRPr lang="en-US"/>
+          </a:p>
+        </p:txBody>
+      </p:sp>
+    </p:spTree>
+    <p:extLst>
+      <p:ext uri="{BB962C8B-B14F-4D97-AF65-F5344CB8AC3E}">
+        <p14:creationId xmlns:p14="http://schemas.microsoft.com/office/powerpoint/2010/main" val="2039319211"/>
+      </p:ext>
+    </p:extLst>
+  </p:cSld>
+  <p:clrMapOvr>
+    <a:masterClrMapping/>
+  </p:clrMapOvr>
+  <p:timing>
+    <p:tnLst>
+      <p:par>
+        <p:cTn id="1" dur="indefinite" restart="never" nodeType="tmRoot">
+          <p:childTnLst>
+            <p:seq concurrent="1" nextAc="seek">
+              <p:cTn id="2" dur="indefinite" nodeType="mainSeq">
+                <p:childTnLst>
+                  <p:par>
+                    <p:cTn id="3" fill="hold">
+                      <p:stCondLst>
+                        <p:cond delay="indefinite"/>
+                      </p:stCondLst>
+                      <p:childTnLst>
+                        <p:par>
+                          <p:cTn id="4" fill="hold">
+                            <p:stCondLst>
+                              <p:cond delay="0"/>
+                            </p:stCondLst>
+                            <p:childTnLst>
+                              <p:par>
+                                <p:cTn id="5" presetID="1" presetClass="entr" presetSubtype="0" fill="hold" nodeType="clickEffect">
+                                  <p:stCondLst>
+                                    <p:cond delay="0"/>
+                                  </p:stCondLst>
+                                  <p:childTnLst>
+                                    <p:set>
+                                      <p:cBhvr>
+                                        <p:cTn id="6" dur="1" fill="hold">
+                                          <p:stCondLst>
+                                            <p:cond delay="0"/>
+                                          </p:stCondLst>
+                                        </p:cTn>
+                                        <p:tgtEl>
+                                          <p:spTgt spid="3">
+                                            <p:txEl>
+                                              <p:pRg st="3" end="3"/>
+                                            </p:txEl>
+                                          </p:spTgt>
+                                        </p:tgtEl>
+                                        <p:attrNameLst>
+                                          <p:attrName>style.visibility</p:attrName>
+                                        </p:attrNameLst>
+                                      </p:cBhvr>
+                                      <p:to>
+                                        <p:strVal val="visible"/>
+                                      </p:to>
+                                    </p:set>
+                                  </p:childTnLst>
+                                </p:cTn>
+                              </p:par>
+                              <p:par>
+                                <p:cTn id="7" presetID="1" presetClass="entr" presetSubtype="0" fill="hold" nodeType="withEffect">
+                                  <p:stCondLst>
+                                    <p:cond delay="0"/>
+                                  </p:stCondLst>
+                                  <p:childTnLst>
+                                    <p:set>
+                                      <p:cBhvr>
+                                        <p:cTn id="8" dur="1" fill="hold">
+                                          <p:stCondLst>
+                                            <p:cond delay="0"/>
+                                          </p:stCondLst>
+                                        </p:cTn>
+                                        <p:tgtEl>
+                                          <p:spTgt spid="3">
+                                            <p:txEl>
+                                              <p:pRg st="4" end="4"/>
+                                            </p:txEl>
+                                          </p:spTgt>
+                                        </p:tgtEl>
+                                        <p:attrNameLst>
+                                          <p:attrName>style.visibility</p:attrName>
+                                        </p:attrNameLst>
+                                      </p:cBhvr>
+                                      <p:to>
+                                        <p:strVal val="visible"/>
+                                      </p:to>
+                                    </p:set>
+                                  </p:childTnLst>
+                                </p:cTn>
+                              </p:par>
+                              <p:par>
+                                <p:cTn id="9" presetID="1" presetClass="entr" presetSubtype="0" fill="hold" nodeType="withEffect">
+                                  <p:stCondLst>
+                                    <p:cond delay="0"/>
+                                  </p:stCondLst>
+                                  <p:childTnLst>
+                                    <p:set>
+                                      <p:cBhvr>
+                                        <p:cTn id="10" dur="1" fill="hold">
+                                          <p:stCondLst>
+                                            <p:cond delay="0"/>
+                                          </p:stCondLst>
+                                        </p:cTn>
+                                        <p:tgtEl>
+                                          <p:spTgt spid="3">
+                                            <p:txEl>
+                                              <p:pRg st="5" end="5"/>
+                                            </p:txEl>
+                                          </p:spTgt>
+                                        </p:tgtEl>
+                                        <p:attrNameLst>
+                                          <p:attrName>style.visibility</p:attrName>
+                                        </p:attrNameLst>
+                                      </p:cBhvr>
+                                      <p:to>
+                                        <p:strVal val="visible"/>
+                                      </p:to>
+                                    </p:set>
+                                  </p:childTnLst>
+                                </p:cTn>
+                              </p:par>
+                            </p:childTnLst>
+                          </p:cTn>
+                        </p:par>
+                      </p:childTnLst>
+                    </p:cTn>
+                  </p:par>
+                  <p:par>
+                    <p:cTn id="11" fill="hold">
+                      <p:stCondLst>
+                        <p:cond delay="indefinite"/>
+                      </p:stCondLst>
+                      <p:childTnLst>
+                        <p:par>
+                          <p:cTn id="12" fill="hold">
+                            <p:stCondLst>
+                              <p:cond delay="0"/>
+                            </p:stCondLst>
+                            <p:childTnLst>
+                              <p:par>
+                                <p:cTn id="13" presetID="1" presetClass="entr" presetSubtype="0" fill="hold" nodeType="clickEffect">
+                                  <p:stCondLst>
+                                    <p:cond delay="0"/>
+                                  </p:stCondLst>
+                                  <p:childTnLst>
+                                    <p:set>
+                                      <p:cBhvr>
+                                        <p:cTn id="14" dur="1" fill="hold">
+                                          <p:stCondLst>
+                                            <p:cond delay="0"/>
+                                          </p:stCondLst>
+                                        </p:cTn>
+                                        <p:tgtEl>
+                                          <p:spTgt spid="3">
+                                            <p:txEl>
+                                              <p:pRg st="6" end="6"/>
+                                            </p:txEl>
+                                          </p:spTgt>
+                                        </p:tgtEl>
+                                        <p:attrNameLst>
+                                          <p:attrName>style.visibility</p:attrName>
+                                        </p:attrNameLst>
+                                      </p:cBhvr>
+                                      <p:to>
+                                        <p:strVal val="visible"/>
+                                      </p:to>
+                                    </p:set>
+                                  </p:childTnLst>
+                                </p:cTn>
+                              </p:par>
+                              <p:par>
+                                <p:cTn id="15" presetID="1" presetClass="entr" presetSubtype="0" fill="hold" nodeType="withEffect">
+                                  <p:stCondLst>
+                                    <p:cond delay="0"/>
+                                  </p:stCondLst>
+                                  <p:childTnLst>
+                                    <p:set>
+                                      <p:cBhvr>
+                                        <p:cTn id="16" dur="1" fill="hold">
+                                          <p:stCondLst>
+                                            <p:cond delay="0"/>
+                                          </p:stCondLst>
+                                        </p:cTn>
+                                        <p:tgtEl>
+                                          <p:spTgt spid="3">
+                                            <p:txEl>
+                                              <p:pRg st="7" end="7"/>
+                                            </p:txEl>
+                                          </p:spTgt>
+                                        </p:tgtEl>
+                                        <p:attrNameLst>
+                                          <p:attrName>style.visibility</p:attrName>
+                                        </p:attrNameLst>
+                                      </p:cBhvr>
+                                      <p:to>
+                                        <p:strVal val="visible"/>
+                                      </p:to>
+                                    </p:set>
+                                  </p:childTnLst>
+                                </p:cTn>
+                              </p:par>
+                            </p:childTnLst>
+                          </p:cTn>
+                        </p:par>
+                      </p:childTnLst>
+                    </p:cTn>
+                  </p:par>
+                </p:childTnLst>
+              </p:cTn>
+              <p:prevCondLst>
+                <p:cond evt="onPrev" delay="0">
+                  <p:tgtEl>
+                    <p:sldTgt/>
+                  </p:tgtEl>
+                </p:cond>
+              </p:prevCondLst>
+              <p:nextCondLst>
+                <p:cond evt="onNext" delay="0">
+                  <p:tgtEl>
+                    <p:sldTgt/>
+                  </p:tgtEl>
+                </p:cond>
+              </p:nextCondLst>
+            </p:seq>
+          </p:childTnLst>
+        </p:cTn>
+      </p:par>
+    </p:tnLst>
+  </p:timing>
+</p:sld>
+</file>
+
+<file path=ppt/slides/slide40.xml><?xml version="1.0" encoding="utf-8"?>
 <p:sld xmlns:a="http://schemas.openxmlformats.org/drawingml/2006/main" xmlns:r="http://schemas.openxmlformats.org/officeDocument/2006/relationships" xmlns:p="http://schemas.openxmlformats.org/presentationml/2006/main">
   <p:cSld>
     <p:spTree>
@@ -26372,7 +27274,7 @@
                       <m:sSubSupPr>
                         <m:ctrlPr>
                           <a:rPr lang="en-US" i="1">
-                            <a:latin typeface="Cambria Math" panose="02040503050406030204" pitchFamily="18" charset="0"/>
+                            <a:latin typeface="Cambria Math"/>
                           </a:rPr>
                         </m:ctrlPr>
                       </m:sSubSupPr>
@@ -26416,7 +27318,7 @@
                       <m:sSubSupPr>
                         <m:ctrlPr>
                           <a:rPr lang="en-US" i="1">
-                            <a:latin typeface="Cambria Math" panose="02040503050406030204" pitchFamily="18" charset="0"/>
+                            <a:latin typeface="Cambria Math"/>
                           </a:rPr>
                         </m:ctrlPr>
                       </m:sSubSupPr>
@@ -26508,16 +27410,12 @@
                 </a:pPr>
                 <a14:m>
                   <m:oMathPara xmlns:m="http://schemas.openxmlformats.org/officeDocument/2006/math">
-                    <m:oMathParaPr>
-                      <m:jc m:val="centerGroup"/>
-                    </m:oMathParaPr>
-                    <m:oMath xmlns:m="http://schemas.openxmlformats.org/officeDocument/2006/math">
+                    <m:oMath>
                       <m:f>
                         <m:fPr>
                           <m:ctrlPr>
                             <a:rPr lang="en-US" i="1">
                               <a:latin typeface="Cambria Math" panose="02040503050406030204" pitchFamily="18" charset="0"/>
-                              <a:ea typeface="Cambria Math"/>
                             </a:rPr>
                           </m:ctrlPr>
                         </m:fPr>
@@ -26526,7 +27424,7 @@
                             <m:sSubSupPr>
                               <m:ctrlPr>
                                 <a:rPr lang="en-US" i="1">
-                                  <a:latin typeface="Cambria Math" panose="02040503050406030204" pitchFamily="18" charset="0"/>
+                                  <a:latin typeface="Cambria Math"/>
                                 </a:rPr>
                               </m:ctrlPr>
                             </m:sSubSupPr>
@@ -26566,7 +27464,7 @@
                             <m:sSubSupPr>
                               <m:ctrlPr>
                                 <a:rPr lang="en-US" i="1">
-                                  <a:latin typeface="Cambria Math" panose="02040503050406030204" pitchFamily="18" charset="0"/>
+                                  <a:latin typeface="Cambria Math"/>
                                 </a:rPr>
                               </m:ctrlPr>
                             </m:sSubSupPr>
@@ -26691,7 +27589,7 @@
               <a:pPr>
                 <a:defRPr/>
               </a:pPr>
-              <a:t>38</a:t>
+              <a:t>40</a:t>
             </a:fld>
             <a:endParaRPr lang="en-US" dirty="0"/>
           </a:p>
@@ -26921,7 +27819,7 @@
 </p:sld>
 </file>
 
-<file path=ppt/slides/slide39.xml><?xml version="1.0" encoding="utf-8"?>
+<file path=ppt/slides/slide41.xml><?xml version="1.0" encoding="utf-8"?>
 <p:sld xmlns:a="http://schemas.openxmlformats.org/drawingml/2006/main" xmlns:r="http://schemas.openxmlformats.org/officeDocument/2006/relationships" xmlns:p="http://schemas.openxmlformats.org/presentationml/2006/main">
   <p:cSld>
     <p:spTree>
@@ -27002,16 +27900,12 @@
                 </a:pPr>
                 <a14:m>
                   <m:oMathPara xmlns:m="http://schemas.openxmlformats.org/officeDocument/2006/math">
-                    <m:oMathParaPr>
-                      <m:jc m:val="centerGroup"/>
-                    </m:oMathParaPr>
-                    <m:oMath xmlns:m="http://schemas.openxmlformats.org/officeDocument/2006/math">
+                    <m:oMath>
                       <m:f>
                         <m:fPr>
                           <m:ctrlPr>
                             <a:rPr lang="en-US" i="1">
                               <a:latin typeface="Cambria Math" panose="02040503050406030204" pitchFamily="18" charset="0"/>
-                              <a:ea typeface="Cambria Math"/>
                             </a:rPr>
                           </m:ctrlPr>
                         </m:fPr>
@@ -27020,7 +27914,7 @@
                             <m:sSubSupPr>
                               <m:ctrlPr>
                                 <a:rPr lang="en-US" i="1">
-                                  <a:latin typeface="Cambria Math" panose="02040503050406030204" pitchFamily="18" charset="0"/>
+                                  <a:latin typeface="Cambria Math"/>
                                 </a:rPr>
                               </m:ctrlPr>
                             </m:sSubSupPr>
@@ -27060,7 +27954,7 @@
                             <m:sSubSupPr>
                               <m:ctrlPr>
                                 <a:rPr lang="en-US" i="1">
-                                  <a:latin typeface="Cambria Math" panose="02040503050406030204" pitchFamily="18" charset="0"/>
+                                  <a:latin typeface="Cambria Math"/>
                                 </a:rPr>
                               </m:ctrlPr>
                             </m:sSubSupPr>
@@ -27125,10 +28019,7 @@
                 </a:pPr>
                 <a14:m>
                   <m:oMathPara xmlns:m="http://schemas.openxmlformats.org/officeDocument/2006/math">
-                    <m:oMathParaPr>
-                      <m:jc m:val="centerGroup"/>
-                    </m:oMathParaPr>
-                    <m:oMath xmlns:m="http://schemas.openxmlformats.org/officeDocument/2006/math">
+                    <m:oMath>
                       <m:f>
                         <m:fPr>
                           <m:ctrlPr>
@@ -27142,7 +28033,7 @@
                             <m:sSubSupPr>
                               <m:ctrlPr>
                                 <a:rPr lang="en-US" i="1">
-                                  <a:latin typeface="Cambria Math" panose="02040503050406030204" pitchFamily="18" charset="0"/>
+                                  <a:latin typeface="Cambria Math"/>
                                 </a:rPr>
                               </m:ctrlPr>
                             </m:sSubSupPr>
@@ -27182,7 +28073,7 @@
                             <m:sSubSupPr>
                               <m:ctrlPr>
                                 <a:rPr lang="en-US" i="1">
-                                  <a:latin typeface="Cambria Math" panose="02040503050406030204" pitchFamily="18" charset="0"/>
+                                  <a:latin typeface="Cambria Math"/>
                                 </a:rPr>
                               </m:ctrlPr>
                             </m:sSubSupPr>
@@ -27241,7 +28132,6 @@
                           <m:ctrlPr>
                             <a:rPr lang="en-US" i="1">
                               <a:latin typeface="Cambria Math" panose="02040503050406030204" pitchFamily="18" charset="0"/>
-                              <a:ea typeface="Cambria Math"/>
                             </a:rPr>
                           </m:ctrlPr>
                         </m:fPr>
@@ -27250,7 +28140,7 @@
                             <m:sSubSupPr>
                               <m:ctrlPr>
                                 <a:rPr lang="en-US" i="1">
-                                  <a:latin typeface="Cambria Math" panose="02040503050406030204" pitchFamily="18" charset="0"/>
+                                  <a:latin typeface="Cambria Math"/>
                                 </a:rPr>
                               </m:ctrlPr>
                             </m:sSubSupPr>
@@ -27290,7 +28180,7 @@
                             <m:sSubSupPr>
                               <m:ctrlPr>
                                 <a:rPr lang="en-US" i="1">
-                                  <a:latin typeface="Cambria Math" panose="02040503050406030204" pitchFamily="18" charset="0"/>
+                                  <a:latin typeface="Cambria Math"/>
                                 </a:rPr>
                               </m:ctrlPr>
                             </m:sSubSupPr>
@@ -27407,7 +28297,7 @@
               <a:pPr>
                 <a:defRPr/>
               </a:pPr>
-              <a:t>39</a:t>
+              <a:t>41</a:t>
             </a:fld>
             <a:endParaRPr lang="en-US" dirty="0"/>
           </a:p>
@@ -27683,387 +28573,7 @@
 </p:sld>
 </file>
 
-<file path=ppt/slides/slide4.xml><?xml version="1.0" encoding="utf-8"?>
-<p:sld xmlns:a="http://schemas.openxmlformats.org/drawingml/2006/main" xmlns:r="http://schemas.openxmlformats.org/officeDocument/2006/relationships" xmlns:p="http://schemas.openxmlformats.org/presentationml/2006/main">
-  <p:cSld>
-    <p:spTree>
-      <p:nvGrpSpPr>
-        <p:cNvPr id="1" name=""/>
-        <p:cNvGrpSpPr/>
-        <p:nvPr/>
-      </p:nvGrpSpPr>
-      <p:grpSpPr>
-        <a:xfrm>
-          <a:off x="0" y="0"/>
-          <a:ext cx="0" cy="0"/>
-          <a:chOff x="0" y="0"/>
-          <a:chExt cx="0" cy="0"/>
-        </a:xfrm>
-      </p:grpSpPr>
-      <p:sp>
-        <p:nvSpPr>
-          <p:cNvPr id="2" name="Title 1"/>
-          <p:cNvSpPr>
-            <a:spLocks noGrp="1"/>
-          </p:cNvSpPr>
-          <p:nvPr>
-            <p:ph type="title"/>
-          </p:nvPr>
-        </p:nvSpPr>
-        <p:spPr/>
-        <p:txBody>
-          <a:bodyPr>
-            <a:normAutofit/>
-          </a:bodyPr>
-          <a:lstStyle/>
-          <a:p>
-            <a:r>
-              <a:rPr lang="en-US" dirty="0"/>
-              <a:t>Different Ways to Organize Societies</a:t>
-            </a:r>
-          </a:p>
-        </p:txBody>
-      </p:sp>
-      <p:sp>
-        <p:nvSpPr>
-          <p:cNvPr id="3" name="Content Placeholder 2"/>
-          <p:cNvSpPr>
-            <a:spLocks noGrp="1"/>
-          </p:cNvSpPr>
-          <p:nvPr>
-            <p:ph idx="1"/>
-          </p:nvPr>
-        </p:nvSpPr>
-        <p:spPr>
-          <a:xfrm>
-            <a:off x="609600" y="1595887"/>
-            <a:ext cx="10972800" cy="5257800"/>
-          </a:xfrm>
-        </p:spPr>
-        <p:txBody>
-          <a:bodyPr>
-            <a:normAutofit/>
-          </a:bodyPr>
-          <a:lstStyle/>
-          <a:p>
-            <a:r>
-              <a:rPr lang="en-US" dirty="0"/>
-              <a:t>Families / Villages / Tribes</a:t>
-            </a:r>
-          </a:p>
-          <a:p>
-            <a:pPr lvl="1"/>
-            <a:r>
-              <a:rPr lang="en-US" dirty="0"/>
-              <a:t>Kin-based altruism, tit-for-tat, loyalty to group</a:t>
-            </a:r>
-          </a:p>
-          <a:p>
-            <a:pPr lvl="1"/>
-            <a:r>
-              <a:rPr lang="en-US" dirty="0"/>
-              <a:t>Respect for authority and existing hierarchies</a:t>
-            </a:r>
-          </a:p>
-          <a:p>
-            <a:r>
-              <a:rPr lang="en-US" dirty="0"/>
-              <a:t>Larger societies:</a:t>
-            </a:r>
-          </a:p>
-          <a:p>
-            <a:pPr lvl="1"/>
-            <a:r>
-              <a:rPr lang="en-US" dirty="0"/>
-              <a:t>Raw coercion, respect for authority and existing hierarchies</a:t>
-            </a:r>
-          </a:p>
-          <a:p>
-            <a:pPr lvl="1"/>
-            <a:r>
-              <a:rPr lang="en-US" dirty="0"/>
-              <a:t>Society very rigid / No solution to information challenge</a:t>
-            </a:r>
-          </a:p>
-          <a:p>
-            <a:r>
-              <a:rPr lang="en-US" dirty="0"/>
-              <a:t>Is there another way?</a:t>
-            </a:r>
-          </a:p>
-          <a:p>
-            <a:pPr lvl="1"/>
-            <a:r>
-              <a:rPr lang="en-US" dirty="0"/>
-              <a:t>Central planning? Something else?</a:t>
-            </a:r>
-          </a:p>
-        </p:txBody>
-      </p:sp>
-      <p:sp>
-        <p:nvSpPr>
-          <p:cNvPr id="4" name="Slide Number Placeholder 3"/>
-          <p:cNvSpPr>
-            <a:spLocks noGrp="1"/>
-          </p:cNvSpPr>
-          <p:nvPr>
-            <p:ph type="sldNum" sz="quarter" idx="12"/>
-          </p:nvPr>
-        </p:nvSpPr>
-        <p:spPr>
-          <a:xfrm>
-            <a:off x="8077200" y="6339098"/>
-            <a:ext cx="2133600" cy="365125"/>
-          </a:xfrm>
-        </p:spPr>
-        <p:txBody>
-          <a:bodyPr/>
-          <a:lstStyle/>
-          <a:p>
-            <a:fld id="{CFF8E9C2-617A-4D65-AFBD-F489864C0492}" type="slidenum">
-              <a:rPr lang="en-US" smtClean="0"/>
-              <a:pPr/>
-              <a:t>4</a:t>
-            </a:fld>
-            <a:endParaRPr lang="en-US"/>
-          </a:p>
-        </p:txBody>
-      </p:sp>
-    </p:spTree>
-    <p:extLst>
-      <p:ext uri="{BB962C8B-B14F-4D97-AF65-F5344CB8AC3E}">
-        <p14:creationId xmlns:p14="http://schemas.microsoft.com/office/powerpoint/2010/main" val="2039319211"/>
-      </p:ext>
-    </p:extLst>
-  </p:cSld>
-  <p:clrMapOvr>
-    <a:masterClrMapping/>
-  </p:clrMapOvr>
-  <p:timing>
-    <p:tnLst>
-      <p:par>
-        <p:cTn id="1" dur="indefinite" restart="never" nodeType="tmRoot">
-          <p:childTnLst>
-            <p:seq concurrent="1" nextAc="seek">
-              <p:cTn id="2" dur="indefinite" nodeType="mainSeq">
-                <p:childTnLst>
-                  <p:par>
-                    <p:cTn id="3" fill="hold">
-                      <p:stCondLst>
-                        <p:cond delay="indefinite"/>
-                      </p:stCondLst>
-                      <p:childTnLst>
-                        <p:par>
-                          <p:cTn id="4" fill="hold">
-                            <p:stCondLst>
-                              <p:cond delay="0"/>
-                            </p:stCondLst>
-                            <p:childTnLst>
-                              <p:par>
-                                <p:cTn id="5" presetID="1" presetClass="entr" presetSubtype="0" fill="hold" nodeType="clickEffect">
-                                  <p:stCondLst>
-                                    <p:cond delay="0"/>
-                                  </p:stCondLst>
-                                  <p:childTnLst>
-                                    <p:set>
-                                      <p:cBhvr>
-                                        <p:cTn id="6" dur="1" fill="hold">
-                                          <p:stCondLst>
-                                            <p:cond delay="0"/>
-                                          </p:stCondLst>
-                                        </p:cTn>
-                                        <p:tgtEl>
-                                          <p:spTgt spid="3">
-                                            <p:txEl>
-                                              <p:pRg st="3" end="3"/>
-                                            </p:txEl>
-                                          </p:spTgt>
-                                        </p:tgtEl>
-                                        <p:attrNameLst>
-                                          <p:attrName>style.visibility</p:attrName>
-                                        </p:attrNameLst>
-                                      </p:cBhvr>
-                                      <p:to>
-                                        <p:strVal val="visible"/>
-                                      </p:to>
-                                    </p:set>
-                                  </p:childTnLst>
-                                </p:cTn>
-                              </p:par>
-                              <p:par>
-                                <p:cTn id="7" presetID="1" presetClass="entr" presetSubtype="0" fill="hold" nodeType="withEffect">
-                                  <p:stCondLst>
-                                    <p:cond delay="0"/>
-                                  </p:stCondLst>
-                                  <p:childTnLst>
-                                    <p:set>
-                                      <p:cBhvr>
-                                        <p:cTn id="8" dur="1" fill="hold">
-                                          <p:stCondLst>
-                                            <p:cond delay="0"/>
-                                          </p:stCondLst>
-                                        </p:cTn>
-                                        <p:tgtEl>
-                                          <p:spTgt spid="3">
-                                            <p:txEl>
-                                              <p:pRg st="4" end="4"/>
-                                            </p:txEl>
-                                          </p:spTgt>
-                                        </p:tgtEl>
-                                        <p:attrNameLst>
-                                          <p:attrName>style.visibility</p:attrName>
-                                        </p:attrNameLst>
-                                      </p:cBhvr>
-                                      <p:to>
-                                        <p:strVal val="visible"/>
-                                      </p:to>
-                                    </p:set>
-                                  </p:childTnLst>
-                                </p:cTn>
-                              </p:par>
-                              <p:par>
-                                <p:cTn id="9" presetID="1" presetClass="entr" presetSubtype="0" fill="hold" nodeType="withEffect">
-                                  <p:stCondLst>
-                                    <p:cond delay="0"/>
-                                  </p:stCondLst>
-                                  <p:childTnLst>
-                                    <p:set>
-                                      <p:cBhvr>
-                                        <p:cTn id="10" dur="1" fill="hold">
-                                          <p:stCondLst>
-                                            <p:cond delay="0"/>
-                                          </p:stCondLst>
-                                        </p:cTn>
-                                        <p:tgtEl>
-                                          <p:spTgt spid="3">
-                                            <p:txEl>
-                                              <p:pRg st="5" end="5"/>
-                                            </p:txEl>
-                                          </p:spTgt>
-                                        </p:tgtEl>
-                                        <p:attrNameLst>
-                                          <p:attrName>style.visibility</p:attrName>
-                                        </p:attrNameLst>
-                                      </p:cBhvr>
-                                      <p:to>
-                                        <p:strVal val="visible"/>
-                                      </p:to>
-                                    </p:set>
-                                  </p:childTnLst>
-                                </p:cTn>
-                              </p:par>
-                            </p:childTnLst>
-                          </p:cTn>
-                        </p:par>
-                      </p:childTnLst>
-                    </p:cTn>
-                  </p:par>
-                  <p:par>
-                    <p:cTn id="11" fill="hold">
-                      <p:stCondLst>
-                        <p:cond delay="indefinite"/>
-                      </p:stCondLst>
-                      <p:childTnLst>
-                        <p:par>
-                          <p:cTn id="12" fill="hold">
-                            <p:stCondLst>
-                              <p:cond delay="0"/>
-                            </p:stCondLst>
-                            <p:childTnLst>
-                              <p:par>
-                                <p:cTn id="13" presetID="1" presetClass="entr" presetSubtype="0" fill="hold" nodeType="clickEffect">
-                                  <p:stCondLst>
-                                    <p:cond delay="0"/>
-                                  </p:stCondLst>
-                                  <p:childTnLst>
-                                    <p:set>
-                                      <p:cBhvr>
-                                        <p:cTn id="14" dur="1" fill="hold">
-                                          <p:stCondLst>
-                                            <p:cond delay="0"/>
-                                          </p:stCondLst>
-                                        </p:cTn>
-                                        <p:tgtEl>
-                                          <p:spTgt spid="3">
-                                            <p:txEl>
-                                              <p:pRg st="6" end="6"/>
-                                            </p:txEl>
-                                          </p:spTgt>
-                                        </p:tgtEl>
-                                        <p:attrNameLst>
-                                          <p:attrName>style.visibility</p:attrName>
-                                        </p:attrNameLst>
-                                      </p:cBhvr>
-                                      <p:to>
-                                        <p:strVal val="visible"/>
-                                      </p:to>
-                                    </p:set>
-                                  </p:childTnLst>
-                                </p:cTn>
-                              </p:par>
-                              <p:par>
-                                <p:cTn id="15" presetID="1" presetClass="entr" presetSubtype="0" fill="hold" nodeType="withEffect">
-                                  <p:stCondLst>
-                                    <p:cond delay="0"/>
-                                  </p:stCondLst>
-                                  <p:childTnLst>
-                                    <p:set>
-                                      <p:cBhvr>
-                                        <p:cTn id="16" dur="1" fill="hold">
-                                          <p:stCondLst>
-                                            <p:cond delay="0"/>
-                                          </p:stCondLst>
-                                        </p:cTn>
-                                        <p:tgtEl>
-                                          <p:spTgt spid="3">
-                                            <p:txEl>
-                                              <p:pRg st="7" end="7"/>
-                                            </p:txEl>
-                                          </p:spTgt>
-                                        </p:tgtEl>
-                                        <p:attrNameLst>
-                                          <p:attrName>style.visibility</p:attrName>
-                                        </p:attrNameLst>
-                                      </p:cBhvr>
-                                      <p:to>
-                                        <p:strVal val="visible"/>
-                                      </p:to>
-                                    </p:set>
-                                  </p:childTnLst>
-                                </p:cTn>
-                              </p:par>
-                            </p:childTnLst>
-                          </p:cTn>
-                        </p:par>
-                      </p:childTnLst>
-                    </p:cTn>
-                  </p:par>
-                </p:childTnLst>
-              </p:cTn>
-              <p:prevCondLst>
-                <p:cond evt="onPrev" delay="0">
-                  <p:tgtEl>
-                    <p:sldTgt/>
-                  </p:tgtEl>
-                </p:cond>
-              </p:prevCondLst>
-              <p:nextCondLst>
-                <p:cond evt="onNext" delay="0">
-                  <p:tgtEl>
-                    <p:sldTgt/>
-                  </p:tgtEl>
-                </p:cond>
-              </p:nextCondLst>
-            </p:seq>
-          </p:childTnLst>
-        </p:cTn>
-      </p:par>
-    </p:tnLst>
-  </p:timing>
-</p:sld>
-</file>
-
-<file path=ppt/slides/slide40.xml><?xml version="1.0" encoding="utf-8"?>
+<file path=ppt/slides/slide42.xml><?xml version="1.0" encoding="utf-8"?>
 <p:sld xmlns:a="http://schemas.openxmlformats.org/drawingml/2006/main" xmlns:r="http://schemas.openxmlformats.org/officeDocument/2006/relationships" xmlns:p="http://schemas.openxmlformats.org/presentationml/2006/main">
   <p:cSld>
     <p:spTree>
@@ -28196,7 +28706,7 @@
                           <m:sSubSupPr>
                             <m:ctrlPr>
                               <a:rPr lang="en-US" i="1">
-                                <a:latin typeface="Cambria Math" panose="02040503050406030204" pitchFamily="18" charset="0"/>
+                                <a:latin typeface="Cambria Math"/>
                               </a:rPr>
                             </m:ctrlPr>
                           </m:sSubSupPr>
@@ -28236,7 +28746,7 @@
                           <m:sSubSupPr>
                             <m:ctrlPr>
                               <a:rPr lang="en-US" i="1">
-                                <a:latin typeface="Cambria Math" panose="02040503050406030204" pitchFamily="18" charset="0"/>
+                                <a:latin typeface="Cambria Math"/>
                               </a:rPr>
                             </m:ctrlPr>
                           </m:sSubSupPr>
@@ -28382,7 +28892,7 @@
                           <m:sSubSupPr>
                             <m:ctrlPr>
                               <a:rPr lang="en-US" i="1">
-                                <a:latin typeface="Cambria Math" panose="02040503050406030204" pitchFamily="18" charset="0"/>
+                                <a:latin typeface="Cambria Math"/>
                               </a:rPr>
                             </m:ctrlPr>
                           </m:sSubSupPr>
@@ -28422,7 +28932,7 @@
                           <m:sSubSupPr>
                             <m:ctrlPr>
                               <a:rPr lang="en-US" i="1">
-                                <a:latin typeface="Cambria Math" panose="02040503050406030204" pitchFamily="18" charset="0"/>
+                                <a:latin typeface="Cambria Math"/>
                               </a:rPr>
                             </m:ctrlPr>
                           </m:sSubSupPr>
@@ -28506,7 +29016,7 @@
                       <m:sSubSupPr>
                         <m:ctrlPr>
                           <a:rPr lang="en-US" i="1">
-                            <a:latin typeface="Cambria Math" panose="02040503050406030204" pitchFamily="18" charset="0"/>
+                            <a:latin typeface="Cambria Math"/>
                           </a:rPr>
                         </m:ctrlPr>
                       </m:sSubSupPr>
@@ -28586,7 +29096,7 @@
                       <m:sSubSupPr>
                         <m:ctrlPr>
                           <a:rPr lang="en-US" i="1">
-                            <a:latin typeface="Cambria Math" panose="02040503050406030204" pitchFamily="18" charset="0"/>
+                            <a:latin typeface="Cambria Math"/>
                           </a:rPr>
                         </m:ctrlPr>
                       </m:sSubSupPr>
@@ -28697,7 +29207,7 @@
               <a:pPr>
                 <a:defRPr/>
               </a:pPr>
-              <a:t>40</a:t>
+              <a:t>42</a:t>
             </a:fld>
             <a:endParaRPr lang="en-US" dirty="0"/>
           </a:p>
@@ -29200,7 +29710,7 @@
 </p:sld>
 </file>
 
-<file path=ppt/slides/slide41.xml><?xml version="1.0" encoding="utf-8"?>
+<file path=ppt/slides/slide43.xml><?xml version="1.0" encoding="utf-8"?>
 <p:sld xmlns:a="http://schemas.openxmlformats.org/drawingml/2006/main" xmlns:r="http://schemas.openxmlformats.org/officeDocument/2006/relationships" xmlns:p="http://schemas.openxmlformats.org/presentationml/2006/main">
   <p:cSld>
     <p:spTree>
@@ -29272,10 +29782,7 @@
                 </a:pPr>
                 <a14:m>
                   <m:oMathPara xmlns:m="http://schemas.openxmlformats.org/officeDocument/2006/math">
-                    <m:oMathParaPr>
-                      <m:jc m:val="centerGroup"/>
-                    </m:oMathParaPr>
-                    <m:oMath xmlns:m="http://schemas.openxmlformats.org/officeDocument/2006/math">
+                    <m:oMath>
                       <m:f>
                         <m:fPr>
                           <m:ctrlPr>
@@ -29289,7 +29796,7 @@
                             <m:sSubSupPr>
                               <m:ctrlPr>
                                 <a:rPr lang="en-US" i="1">
-                                  <a:latin typeface="Cambria Math" panose="02040503050406030204" pitchFamily="18" charset="0"/>
+                                  <a:latin typeface="Cambria Math"/>
                                 </a:rPr>
                               </m:ctrlPr>
                             </m:sSubSupPr>
@@ -29329,7 +29836,7 @@
                             <m:sSubSupPr>
                               <m:ctrlPr>
                                 <a:rPr lang="en-US" i="1">
-                                  <a:latin typeface="Cambria Math" panose="02040503050406030204" pitchFamily="18" charset="0"/>
+                                  <a:latin typeface="Cambria Math"/>
                                 </a:rPr>
                               </m:ctrlPr>
                             </m:sSubSupPr>
@@ -29387,7 +29894,7 @@
                         <m:sSubSupPr>
                           <m:ctrlPr>
                             <a:rPr lang="en-US" i="1">
-                              <a:latin typeface="Cambria Math" panose="02040503050406030204" pitchFamily="18" charset="0"/>
+                              <a:latin typeface="Cambria Math"/>
                             </a:rPr>
                           </m:ctrlPr>
                         </m:sSubSupPr>
@@ -29499,7 +30006,7 @@
               <a:pPr>
                 <a:defRPr/>
               </a:pPr>
-              <a:t>41</a:t>
+              <a:t>43</a:t>
             </a:fld>
             <a:endParaRPr lang="en-US" dirty="0"/>
           </a:p>
@@ -29518,7 +30025,7 @@
 </p:sld>
 </file>
 
-<file path=ppt/slides/slide42.xml><?xml version="1.0" encoding="utf-8"?>
+<file path=ppt/slides/slide44.xml><?xml version="1.0" encoding="utf-8"?>
 <p:sld xmlns:a="http://schemas.openxmlformats.org/drawingml/2006/main" xmlns:r="http://schemas.openxmlformats.org/officeDocument/2006/relationships" xmlns:p="http://schemas.openxmlformats.org/presentationml/2006/main">
   <p:cSld>
     <p:spTree>
@@ -29610,8 +30117,8 @@
                     <m:sSubSup>
                       <m:sSubSupPr>
                         <m:ctrlPr>
-                          <a:rPr lang="en-US" i="1" smtClean="0">
-                            <a:latin typeface="Cambria Math" panose="02040503050406030204" pitchFamily="18" charset="0"/>
+                          <a:rPr lang="en-US" b="0" i="1" smtClean="0">
+                            <a:latin typeface="Cambria Math"/>
                           </a:rPr>
                         </m:ctrlPr>
                       </m:sSubSupPr>
@@ -29678,8 +30185,8 @@
                     <m:sSubSup>
                       <m:sSubSupPr>
                         <m:ctrlPr>
-                          <a:rPr lang="en-US" i="1">
-                            <a:latin typeface="Cambria Math" panose="02040503050406030204" pitchFamily="18" charset="0"/>
+                          <a:rPr lang="en-US" b="0" i="1" smtClean="0">
+                            <a:latin typeface="Cambria Math"/>
                           </a:rPr>
                         </m:ctrlPr>
                       </m:sSubSupPr>
@@ -29809,10 +30316,7 @@
                 </a:pPr>
                 <a14:m>
                   <m:oMathPara xmlns:m="http://schemas.openxmlformats.org/officeDocument/2006/math">
-                    <m:oMathParaPr>
-                      <m:jc m:val="centerGroup"/>
-                    </m:oMathParaPr>
-                    <m:oMath xmlns:m="http://schemas.openxmlformats.org/officeDocument/2006/math">
+                    <m:oMath>
                       <m:r>
                         <a:rPr lang="en-US" i="1">
                           <a:latin typeface="Cambria Math"/>
@@ -29823,7 +30327,7 @@
                         <m:sSubSupPr>
                           <m:ctrlPr>
                             <a:rPr lang="en-US" i="1">
-                              <a:latin typeface="Cambria Math" panose="02040503050406030204" pitchFamily="18" charset="0"/>
+                              <a:latin typeface="Cambria Math"/>
                             </a:rPr>
                           </m:ctrlPr>
                         </m:sSubSupPr>
@@ -29867,7 +30371,7 @@
                         <m:sSubSupPr>
                           <m:ctrlPr>
                             <a:rPr lang="en-US" i="1">
-                              <a:latin typeface="Cambria Math" panose="02040503050406030204" pitchFamily="18" charset="0"/>
+                              <a:latin typeface="Cambria Math"/>
                             </a:rPr>
                           </m:ctrlPr>
                         </m:sSubSupPr>
@@ -29912,10 +30416,7 @@
                 </a:pPr>
                 <a14:m>
                   <m:oMathPara xmlns:m="http://schemas.openxmlformats.org/officeDocument/2006/math">
-                    <m:oMathParaPr>
-                      <m:jc m:val="centerGroup"/>
-                    </m:oMathParaPr>
-                    <m:oMath xmlns:m="http://schemas.openxmlformats.org/officeDocument/2006/math">
+                    <m:oMath>
                       <m:r>
                         <a:rPr lang="en-US" i="1">
                           <a:latin typeface="Cambria Math"/>
@@ -29928,7 +30429,6 @@
                           <m:ctrlPr>
                             <a:rPr lang="en-US" i="1">
                               <a:latin typeface="Cambria Math" panose="02040503050406030204" pitchFamily="18" charset="0"/>
-                              <a:ea typeface="Cambria Math"/>
                             </a:rPr>
                           </m:ctrlPr>
                         </m:fPr>
@@ -29937,7 +30437,7 @@
                             <m:sSubSupPr>
                               <m:ctrlPr>
                                 <a:rPr lang="en-US" i="1">
-                                  <a:latin typeface="Cambria Math" panose="02040503050406030204" pitchFamily="18" charset="0"/>
+                                  <a:latin typeface="Cambria Math"/>
                                 </a:rPr>
                               </m:ctrlPr>
                             </m:sSubSupPr>
@@ -29977,7 +30477,7 @@
                             <m:sSubSupPr>
                               <m:ctrlPr>
                                 <a:rPr lang="en-US" i="1">
-                                  <a:latin typeface="Cambria Math" panose="02040503050406030204" pitchFamily="18" charset="0"/>
+                                  <a:latin typeface="Cambria Math"/>
                                 </a:rPr>
                               </m:ctrlPr>
                             </m:sSubSupPr>
@@ -30017,7 +30517,7 @@
                         <m:sSubSupPr>
                           <m:ctrlPr>
                             <a:rPr lang="en-US" i="1">
-                              <a:latin typeface="Cambria Math" panose="02040503050406030204" pitchFamily="18" charset="0"/>
+                              <a:latin typeface="Cambria Math"/>
                             </a:rPr>
                           </m:ctrlPr>
                         </m:sSubSupPr>
@@ -30061,7 +30561,7 @@
                         <m:sSubSupPr>
                           <m:ctrlPr>
                             <a:rPr lang="en-US" i="1">
-                              <a:latin typeface="Cambria Math" panose="02040503050406030204" pitchFamily="18" charset="0"/>
+                              <a:latin typeface="Cambria Math"/>
                             </a:rPr>
                           </m:ctrlPr>
                         </m:sSubSupPr>
@@ -30106,10 +30606,7 @@
                 </a:pPr>
                 <a14:m>
                   <m:oMathPara xmlns:m="http://schemas.openxmlformats.org/officeDocument/2006/math">
-                    <m:oMathParaPr>
-                      <m:jc m:val="centerGroup"/>
-                    </m:oMathParaPr>
-                    <m:oMath xmlns:m="http://schemas.openxmlformats.org/officeDocument/2006/math">
+                    <m:oMath>
                       <m:r>
                         <a:rPr lang="en-US" i="1">
                           <a:latin typeface="Cambria Math"/>
@@ -30122,7 +30619,6 @@
                           <m:ctrlPr>
                             <a:rPr lang="en-US" i="1">
                               <a:latin typeface="Cambria Math" panose="02040503050406030204" pitchFamily="18" charset="0"/>
-                              <a:ea typeface="Cambria Math"/>
                             </a:rPr>
                           </m:ctrlPr>
                         </m:fPr>
@@ -30131,7 +30627,7 @@
                             <m:sSubSupPr>
                               <m:ctrlPr>
                                 <a:rPr lang="en-US" i="1">
-                                  <a:latin typeface="Cambria Math" panose="02040503050406030204" pitchFamily="18" charset="0"/>
+                                  <a:latin typeface="Cambria Math"/>
                                 </a:rPr>
                               </m:ctrlPr>
                             </m:sSubSupPr>
@@ -30171,7 +30667,7 @@
                             <m:sSubSupPr>
                               <m:ctrlPr>
                                 <a:rPr lang="en-US" i="1">
-                                  <a:latin typeface="Cambria Math" panose="02040503050406030204" pitchFamily="18" charset="0"/>
+                                  <a:latin typeface="Cambria Math"/>
                                 </a:rPr>
                               </m:ctrlPr>
                             </m:sSubSupPr>
@@ -30226,7 +30722,7 @@
                             <m:sSubSupPr>
                               <m:ctrlPr>
                                 <a:rPr lang="en-US" i="1">
-                                  <a:latin typeface="Cambria Math" panose="02040503050406030204" pitchFamily="18" charset="0"/>
+                                  <a:latin typeface="Cambria Math"/>
                                 </a:rPr>
                               </m:ctrlPr>
                             </m:sSubSupPr>
@@ -30266,7 +30762,7 @@
                             <m:sSubSupPr>
                               <m:ctrlPr>
                                 <a:rPr lang="en-US" i="1">
-                                  <a:latin typeface="Cambria Math" panose="02040503050406030204" pitchFamily="18" charset="0"/>
+                                  <a:latin typeface="Cambria Math"/>
                                 </a:rPr>
                               </m:ctrlPr>
                             </m:sSubSupPr>
@@ -30386,7 +30882,7 @@
               <a:pPr>
                 <a:defRPr/>
               </a:pPr>
-              <a:t>42</a:t>
+              <a:t>44</a:t>
             </a:fld>
             <a:endParaRPr lang="en-US" dirty="0"/>
           </a:p>
@@ -30791,7 +31287,7 @@
 </p:sld>
 </file>
 
-<file path=ppt/slides/slide43.xml><?xml version="1.0" encoding="utf-8"?>
+<file path=ppt/slides/slide45.xml><?xml version="1.0" encoding="utf-8"?>
 <p:sld xmlns:a="http://schemas.openxmlformats.org/drawingml/2006/main" xmlns:r="http://schemas.openxmlformats.org/officeDocument/2006/relationships" xmlns:p="http://schemas.openxmlformats.org/presentationml/2006/main">
   <p:cSld>
     <p:spTree>
@@ -30867,10 +31363,7 @@
                 </a:pPr>
                 <a14:m>
                   <m:oMathPara xmlns:m="http://schemas.openxmlformats.org/officeDocument/2006/math">
-                    <m:oMathParaPr>
-                      <m:jc m:val="centerGroup"/>
-                    </m:oMathParaPr>
-                    <m:oMath xmlns:m="http://schemas.openxmlformats.org/officeDocument/2006/math">
+                    <m:oMath>
                       <m:f>
                         <m:fPr>
                           <m:ctrlPr>
@@ -30884,7 +31377,7 @@
                             <m:sSubSupPr>
                               <m:ctrlPr>
                                 <a:rPr lang="en-US" i="1">
-                                  <a:latin typeface="Cambria Math" panose="02040503050406030204" pitchFamily="18" charset="0"/>
+                                  <a:latin typeface="Cambria Math"/>
                                 </a:rPr>
                               </m:ctrlPr>
                             </m:sSubSupPr>
@@ -30924,7 +31417,7 @@
                             <m:sSubSupPr>
                               <m:ctrlPr>
                                 <a:rPr lang="en-US" i="1">
-                                  <a:latin typeface="Cambria Math" panose="02040503050406030204" pitchFamily="18" charset="0"/>
+                                  <a:latin typeface="Cambria Math"/>
                                 </a:rPr>
                               </m:ctrlPr>
                             </m:sSubSupPr>
@@ -30983,7 +31476,6 @@
                           <m:ctrlPr>
                             <a:rPr lang="en-US" i="1">
                               <a:latin typeface="Cambria Math" panose="02040503050406030204" pitchFamily="18" charset="0"/>
-                              <a:ea typeface="Cambria Math"/>
                             </a:rPr>
                           </m:ctrlPr>
                         </m:fPr>
@@ -30992,7 +31484,7 @@
                             <m:sSubSupPr>
                               <m:ctrlPr>
                                 <a:rPr lang="en-US" i="1">
-                                  <a:latin typeface="Cambria Math" panose="02040503050406030204" pitchFamily="18" charset="0"/>
+                                  <a:latin typeface="Cambria Math"/>
                                 </a:rPr>
                               </m:ctrlPr>
                             </m:sSubSupPr>
@@ -31032,7 +31524,7 @@
                             <m:sSubSupPr>
                               <m:ctrlPr>
                                 <a:rPr lang="en-US" i="1">
-                                  <a:latin typeface="Cambria Math" panose="02040503050406030204" pitchFamily="18" charset="0"/>
+                                  <a:latin typeface="Cambria Math"/>
                                 </a:rPr>
                               </m:ctrlPr>
                             </m:sSubSupPr>
@@ -31085,10 +31577,7 @@
                 </a:pPr>
                 <a14:m>
                   <m:oMathPara xmlns:m="http://schemas.openxmlformats.org/officeDocument/2006/math">
-                    <m:oMathParaPr>
-                      <m:jc m:val="centerGroup"/>
-                    </m:oMathParaPr>
-                    <m:oMath xmlns:m="http://schemas.openxmlformats.org/officeDocument/2006/math">
+                    <m:oMath>
                       <m:f>
                         <m:fPr>
                           <m:ctrlPr>
@@ -31102,7 +31591,7 @@
                             <m:sSubSupPr>
                               <m:ctrlPr>
                                 <a:rPr lang="en-US" i="1">
-                                  <a:latin typeface="Cambria Math" panose="02040503050406030204" pitchFamily="18" charset="0"/>
+                                  <a:latin typeface="Cambria Math"/>
                                 </a:rPr>
                               </m:ctrlPr>
                             </m:sSubSupPr>
@@ -31142,7 +31631,7 @@
                             <m:sSubSupPr>
                               <m:ctrlPr>
                                 <a:rPr lang="en-US" i="1">
-                                  <a:latin typeface="Cambria Math" panose="02040503050406030204" pitchFamily="18" charset="0"/>
+                                  <a:latin typeface="Cambria Math"/>
                                 </a:rPr>
                               </m:ctrlPr>
                             </m:sSubSupPr>
@@ -31200,7 +31689,7 @@
                         <m:sSubSupPr>
                           <m:ctrlPr>
                             <a:rPr lang="en-US" i="1">
-                              <a:latin typeface="Cambria Math" panose="02040503050406030204" pitchFamily="18" charset="0"/>
+                              <a:latin typeface="Cambria Math"/>
                             </a:rPr>
                           </m:ctrlPr>
                         </m:sSubSupPr>
@@ -31251,10 +31740,7 @@
                 </a:pPr>
                 <a14:m>
                   <m:oMathPara xmlns:m="http://schemas.openxmlformats.org/officeDocument/2006/math">
-                    <m:oMathParaPr>
-                      <m:jc m:val="centerGroup"/>
-                    </m:oMathParaPr>
-                    <m:oMath xmlns:m="http://schemas.openxmlformats.org/officeDocument/2006/math">
+                    <m:oMath>
                       <m:r>
                         <a:rPr lang="en-US" i="1">
                           <a:latin typeface="Cambria Math"/>
@@ -31265,7 +31751,7 @@
                         <m:sSubSupPr>
                           <m:ctrlPr>
                             <a:rPr lang="en-US" i="1">
-                              <a:latin typeface="Cambria Math" panose="02040503050406030204" pitchFamily="18" charset="0"/>
+                              <a:latin typeface="Cambria Math"/>
                             </a:rPr>
                           </m:ctrlPr>
                         </m:sSubSupPr>
@@ -31321,7 +31807,7 @@
                         <m:sSubSupPr>
                           <m:ctrlPr>
                             <a:rPr lang="en-US" i="1">
-                              <a:latin typeface="Cambria Math" panose="02040503050406030204" pitchFamily="18" charset="0"/>
+                              <a:latin typeface="Cambria Math"/>
                             </a:rPr>
                           </m:ctrlPr>
                         </m:sSubSupPr>
@@ -31366,7 +31852,6 @@
                           <m:ctrlPr>
                             <a:rPr lang="en-US" i="1">
                               <a:latin typeface="Cambria Math" panose="02040503050406030204" pitchFamily="18" charset="0"/>
-                              <a:ea typeface="Cambria Math"/>
                             </a:rPr>
                           </m:ctrlPr>
                         </m:fPr>
@@ -31375,7 +31860,7 @@
                             <m:sSubSupPr>
                               <m:ctrlPr>
                                 <a:rPr lang="en-US" i="1">
-                                  <a:latin typeface="Cambria Math" panose="02040503050406030204" pitchFamily="18" charset="0"/>
+                                  <a:latin typeface="Cambria Math"/>
                                 </a:rPr>
                               </m:ctrlPr>
                             </m:sSubSupPr>
@@ -31415,7 +31900,7 @@
                             <m:sSubSupPr>
                               <m:ctrlPr>
                                 <a:rPr lang="en-US" i="1">
-                                  <a:latin typeface="Cambria Math" panose="02040503050406030204" pitchFamily="18" charset="0"/>
+                                  <a:latin typeface="Cambria Math"/>
                                 </a:rPr>
                               </m:ctrlPr>
                             </m:sSubSupPr>
@@ -31470,7 +31955,7 @@
                             <m:sSubSupPr>
                               <m:ctrlPr>
                                 <a:rPr lang="en-US" i="1">
-                                  <a:latin typeface="Cambria Math" panose="02040503050406030204" pitchFamily="18" charset="0"/>
+                                  <a:latin typeface="Cambria Math"/>
                                 </a:rPr>
                               </m:ctrlPr>
                             </m:sSubSupPr>
@@ -31510,7 +31995,7 @@
                             <m:sSubSupPr>
                               <m:ctrlPr>
                                 <a:rPr lang="en-US" i="1">
-                                  <a:latin typeface="Cambria Math" panose="02040503050406030204" pitchFamily="18" charset="0"/>
+                                  <a:latin typeface="Cambria Math"/>
                                 </a:rPr>
                               </m:ctrlPr>
                             </m:sSubSupPr>
@@ -31615,7 +32100,7 @@
               <a:pPr>
                 <a:defRPr/>
               </a:pPr>
-              <a:t>43</a:t>
+              <a:t>45</a:t>
             </a:fld>
             <a:endParaRPr lang="en-US" dirty="0"/>
           </a:p>
@@ -31904,7 +32389,7 @@
 </p:sld>
 </file>
 
-<file path=ppt/slides/slide44.xml><?xml version="1.0" encoding="utf-8"?>
+<file path=ppt/slides/slide46.xml><?xml version="1.0" encoding="utf-8"?>
 <p:sld xmlns:a="http://schemas.openxmlformats.org/drawingml/2006/main" xmlns:r="http://schemas.openxmlformats.org/officeDocument/2006/relationships" xmlns:p="http://schemas.openxmlformats.org/presentationml/2006/main">
   <p:cSld>
     <p:spTree>
@@ -32081,7 +32566,7 @@
               <a:pPr>
                 <a:defRPr/>
               </a:pPr>
-              <a:t>44</a:t>
+              <a:t>46</a:t>
             </a:fld>
             <a:endParaRPr lang="en-US" dirty="0"/>
           </a:p>
@@ -32406,7 +32891,7 @@
 </p:sld>
 </file>
 
-<file path=ppt/slides/slide45.xml><?xml version="1.0" encoding="utf-8"?>
+<file path=ppt/slides/slide47.xml><?xml version="1.0" encoding="utf-8"?>
 <p:sld xmlns:a="http://schemas.openxmlformats.org/drawingml/2006/main" xmlns:r="http://schemas.openxmlformats.org/officeDocument/2006/relationships" xmlns:p="http://schemas.openxmlformats.org/presentationml/2006/main">
   <p:cSld>
     <p:spTree>
@@ -32522,7 +33007,7 @@
               <a:pPr>
                 <a:defRPr/>
               </a:pPr>
-              <a:t>45</a:t>
+              <a:t>47</a:t>
             </a:fld>
             <a:endParaRPr lang="en-US" dirty="0"/>
           </a:p>
@@ -32749,7 +33234,7 @@
 </p:sld>
 </file>
 
-<file path=ppt/slides/slide46.xml><?xml version="1.0" encoding="utf-8"?>
+<file path=ppt/slides/slide48.xml><?xml version="1.0" encoding="utf-8"?>
 <p:sld xmlns:a="http://schemas.openxmlformats.org/drawingml/2006/main" xmlns:r="http://schemas.openxmlformats.org/officeDocument/2006/relationships" xmlns:p="http://schemas.openxmlformats.org/presentationml/2006/main">
   <p:cSld>
     <p:spTree>
@@ -32835,7 +33320,7 @@
             <a:fld id="{CFF8E9C2-617A-4D65-AFBD-F489864C0492}" type="slidenum">
               <a:rPr lang="en-US" smtClean="0"/>
               <a:pPr/>
-              <a:t>46</a:t>
+              <a:t>48</a:t>
             </a:fld>
             <a:endParaRPr lang="en-US"/>
           </a:p>
@@ -32854,7 +33339,7 @@
 </p:sld>
 </file>
 
-<file path=ppt/slides/slide47.xml><?xml version="1.0" encoding="utf-8"?>
+<file path=ppt/slides/slide49.xml><?xml version="1.0" encoding="utf-8"?>
 <p:sld xmlns:a="http://schemas.openxmlformats.org/drawingml/2006/main" xmlns:r="http://schemas.openxmlformats.org/officeDocument/2006/relationships" xmlns:p="http://schemas.openxmlformats.org/presentationml/2006/main">
   <p:cSld>
     <p:spTree>
@@ -32917,7 +33402,7 @@
           <a:p>
             <a:r>
               <a:rPr lang="en-US" dirty="0"/>
-              <a:t>With competitive markets and well defined property rights: </a:t>
+              <a:t>With competitive markets and well-defined property rights: </a:t>
             </a:r>
             <a:br>
               <a:rPr lang="en-US" dirty="0"/>
@@ -32957,14 +33442,7 @@
             <a:pPr lvl="1"/>
             <a:r>
               <a:rPr lang="en-US" dirty="0"/>
-              <a:t>Competition between firms bids wage up to </a:t>
-            </a:r>
-            <a:br>
-              <a:rPr lang="en-US" dirty="0"/>
-            </a:br>
-            <a:r>
-              <a:rPr lang="en-US" dirty="0"/>
-              <a:t>marginal product</a:t>
+              <a:t>Competition between firms bids wage up to marginal product</a:t>
             </a:r>
           </a:p>
           <a:p>
@@ -32999,7 +33477,7 @@
               <a:pPr>
                 <a:defRPr/>
               </a:pPr>
-              <a:t>47</a:t>
+              <a:t>49</a:t>
             </a:fld>
             <a:endParaRPr lang="en-US" dirty="0"/>
           </a:p>
@@ -33306,400 +33784,6 @@
 </p:sld>
 </file>
 
-<file path=ppt/slides/slide48.xml><?xml version="1.0" encoding="utf-8"?>
-<p:sld xmlns:a="http://schemas.openxmlformats.org/drawingml/2006/main" xmlns:r="http://schemas.openxmlformats.org/officeDocument/2006/relationships" xmlns:p="http://schemas.openxmlformats.org/presentationml/2006/main">
-  <p:cSld>
-    <p:spTree>
-      <p:nvGrpSpPr>
-        <p:cNvPr id="1" name=""/>
-        <p:cNvGrpSpPr/>
-        <p:nvPr/>
-      </p:nvGrpSpPr>
-      <p:grpSpPr>
-        <a:xfrm>
-          <a:off x="0" y="0"/>
-          <a:ext cx="0" cy="0"/>
-          <a:chOff x="0" y="0"/>
-          <a:chExt cx="0" cy="0"/>
-        </a:xfrm>
-      </p:grpSpPr>
-      <p:sp>
-        <p:nvSpPr>
-          <p:cNvPr id="2" name="Title 1"/>
-          <p:cNvSpPr>
-            <a:spLocks noGrp="1"/>
-          </p:cNvSpPr>
-          <p:nvPr>
-            <p:ph type="title"/>
-          </p:nvPr>
-        </p:nvSpPr>
-        <p:spPr/>
-        <p:txBody>
-          <a:bodyPr>
-            <a:normAutofit/>
-          </a:bodyPr>
-          <a:lstStyle/>
-          <a:p>
-            <a:r>
-              <a:rPr lang="en-US" dirty="0"/>
-              <a:t>Implications for Role of Government?</a:t>
-            </a:r>
-          </a:p>
-        </p:txBody>
-      </p:sp>
-      <p:sp>
-        <p:nvSpPr>
-          <p:cNvPr id="3" name="Content Placeholder 2"/>
-          <p:cNvSpPr>
-            <a:spLocks noGrp="1"/>
-          </p:cNvSpPr>
-          <p:nvPr>
-            <p:ph idx="1"/>
-          </p:nvPr>
-        </p:nvSpPr>
-        <p:spPr>
-          <a:xfrm>
-            <a:off x="609600" y="1752601"/>
-            <a:ext cx="10972800" cy="4373563"/>
-          </a:xfrm>
-        </p:spPr>
-        <p:txBody>
-          <a:bodyPr/>
-          <a:lstStyle/>
-          <a:p>
-            <a:r>
-              <a:rPr lang="en-US" dirty="0"/>
-              <a:t>If markets are “complete” and “perfect”, and property rights are well defined and </a:t>
-            </a:r>
-            <a:r>
-              <a:rPr lang="en-US" dirty="0" err="1"/>
-              <a:t>costlessly</a:t>
-            </a:r>
-            <a:r>
-              <a:rPr lang="en-US" dirty="0"/>
-              <a:t> enforceable, </a:t>
-            </a:r>
-            <a:r>
-              <a:rPr lang="en-US" i="1" dirty="0"/>
-              <a:t>laissez faire </a:t>
-            </a:r>
-            <a:r>
-              <a:rPr lang="en-US" dirty="0"/>
-              <a:t>government  policy yields a Pareto efficient outcome</a:t>
-            </a:r>
-          </a:p>
-          <a:p>
-            <a:endParaRPr lang="en-US" dirty="0"/>
-          </a:p>
-          <a:p>
-            <a:r>
-              <a:rPr lang="en-US" dirty="0"/>
-              <a:t>Even if we are concerned with redistribution, the </a:t>
-            </a:r>
-            <a:r>
-              <a:rPr lang="en-US" i="1" dirty="0"/>
-              <a:t>only</a:t>
-            </a:r>
-            <a:r>
-              <a:rPr lang="en-US" dirty="0"/>
-              <a:t> necessary government policy is an initial redistribution of wealth. (Second Welfare Theorem discussed in chapter)</a:t>
-            </a:r>
-          </a:p>
-        </p:txBody>
-      </p:sp>
-      <p:sp>
-        <p:nvSpPr>
-          <p:cNvPr id="4" name="Slide Number Placeholder 3"/>
-          <p:cNvSpPr>
-            <a:spLocks noGrp="1"/>
-          </p:cNvSpPr>
-          <p:nvPr>
-            <p:ph type="sldNum" sz="quarter" idx="12"/>
-          </p:nvPr>
-        </p:nvSpPr>
-        <p:spPr/>
-        <p:txBody>
-          <a:bodyPr/>
-          <a:lstStyle/>
-          <a:p>
-            <a:fld id="{CFF8E9C2-617A-4D65-AFBD-F489864C0492}" type="slidenum">
-              <a:rPr lang="en-US" smtClean="0"/>
-              <a:pPr/>
-              <a:t>48</a:t>
-            </a:fld>
-            <a:endParaRPr lang="en-US"/>
-          </a:p>
-        </p:txBody>
-      </p:sp>
-    </p:spTree>
-    <p:extLst>
-      <p:ext uri="{BB962C8B-B14F-4D97-AF65-F5344CB8AC3E}">
-        <p14:creationId xmlns:p14="http://schemas.microsoft.com/office/powerpoint/2010/main" val="3828229179"/>
-      </p:ext>
-    </p:extLst>
-  </p:cSld>
-  <p:clrMapOvr>
-    <a:masterClrMapping/>
-  </p:clrMapOvr>
-  <p:timing>
-    <p:tnLst>
-      <p:par>
-        <p:cTn id="1" dur="indefinite" restart="never" nodeType="tmRoot">
-          <p:childTnLst>
-            <p:seq concurrent="1" nextAc="seek">
-              <p:cTn id="2" dur="indefinite" nodeType="mainSeq">
-                <p:childTnLst>
-                  <p:par>
-                    <p:cTn id="3" fill="hold">
-                      <p:stCondLst>
-                        <p:cond delay="indefinite"/>
-                      </p:stCondLst>
-                      <p:childTnLst>
-                        <p:par>
-                          <p:cTn id="4" fill="hold">
-                            <p:stCondLst>
-                              <p:cond delay="0"/>
-                            </p:stCondLst>
-                            <p:childTnLst>
-                              <p:par>
-                                <p:cTn id="5" presetID="1" presetClass="entr" presetSubtype="0" fill="hold" nodeType="clickEffect">
-                                  <p:stCondLst>
-                                    <p:cond delay="0"/>
-                                  </p:stCondLst>
-                                  <p:childTnLst>
-                                    <p:set>
-                                      <p:cBhvr>
-                                        <p:cTn id="6" dur="1" fill="hold">
-                                          <p:stCondLst>
-                                            <p:cond delay="0"/>
-                                          </p:stCondLst>
-                                        </p:cTn>
-                                        <p:tgtEl>
-                                          <p:spTgt spid="3">
-                                            <p:txEl>
-                                              <p:pRg st="0" end="0"/>
-                                            </p:txEl>
-                                          </p:spTgt>
-                                        </p:tgtEl>
-                                        <p:attrNameLst>
-                                          <p:attrName>style.visibility</p:attrName>
-                                        </p:attrNameLst>
-                                      </p:cBhvr>
-                                      <p:to>
-                                        <p:strVal val="visible"/>
-                                      </p:to>
-                                    </p:set>
-                                  </p:childTnLst>
-                                </p:cTn>
-                              </p:par>
-                            </p:childTnLst>
-                          </p:cTn>
-                        </p:par>
-                      </p:childTnLst>
-                    </p:cTn>
-                  </p:par>
-                  <p:par>
-                    <p:cTn id="7" fill="hold">
-                      <p:stCondLst>
-                        <p:cond delay="indefinite"/>
-                      </p:stCondLst>
-                      <p:childTnLst>
-                        <p:par>
-                          <p:cTn id="8" fill="hold">
-                            <p:stCondLst>
-                              <p:cond delay="0"/>
-                            </p:stCondLst>
-                            <p:childTnLst>
-                              <p:par>
-                                <p:cTn id="9" presetID="1" presetClass="entr" presetSubtype="0" fill="hold" nodeType="clickEffect">
-                                  <p:stCondLst>
-                                    <p:cond delay="0"/>
-                                  </p:stCondLst>
-                                  <p:childTnLst>
-                                    <p:set>
-                                      <p:cBhvr>
-                                        <p:cTn id="10" dur="1" fill="hold">
-                                          <p:stCondLst>
-                                            <p:cond delay="0"/>
-                                          </p:stCondLst>
-                                        </p:cTn>
-                                        <p:tgtEl>
-                                          <p:spTgt spid="3">
-                                            <p:txEl>
-                                              <p:pRg st="2" end="2"/>
-                                            </p:txEl>
-                                          </p:spTgt>
-                                        </p:tgtEl>
-                                        <p:attrNameLst>
-                                          <p:attrName>style.visibility</p:attrName>
-                                        </p:attrNameLst>
-                                      </p:cBhvr>
-                                      <p:to>
-                                        <p:strVal val="visible"/>
-                                      </p:to>
-                                    </p:set>
-                                  </p:childTnLst>
-                                </p:cTn>
-                              </p:par>
-                            </p:childTnLst>
-                          </p:cTn>
-                        </p:par>
-                      </p:childTnLst>
-                    </p:cTn>
-                  </p:par>
-                </p:childTnLst>
-              </p:cTn>
-              <p:prevCondLst>
-                <p:cond evt="onPrev" delay="0">
-                  <p:tgtEl>
-                    <p:sldTgt/>
-                  </p:tgtEl>
-                </p:cond>
-              </p:prevCondLst>
-              <p:nextCondLst>
-                <p:cond evt="onNext" delay="0">
-                  <p:tgtEl>
-                    <p:sldTgt/>
-                  </p:tgtEl>
-                </p:cond>
-              </p:nextCondLst>
-            </p:seq>
-          </p:childTnLst>
-        </p:cTn>
-      </p:par>
-    </p:tnLst>
-  </p:timing>
-</p:sld>
-</file>
-
-<file path=ppt/slides/slide49.xml><?xml version="1.0" encoding="utf-8"?>
-<p:sld xmlns:a="http://schemas.openxmlformats.org/drawingml/2006/main" xmlns:r="http://schemas.openxmlformats.org/officeDocument/2006/relationships" xmlns:p="http://schemas.openxmlformats.org/presentationml/2006/main">
-  <p:cSld>
-    <p:spTree>
-      <p:nvGrpSpPr>
-        <p:cNvPr id="1" name=""/>
-        <p:cNvGrpSpPr/>
-        <p:nvPr/>
-      </p:nvGrpSpPr>
-      <p:grpSpPr>
-        <a:xfrm>
-          <a:off x="0" y="0"/>
-          <a:ext cx="0" cy="0"/>
-          <a:chOff x="0" y="0"/>
-          <a:chExt cx="0" cy="0"/>
-        </a:xfrm>
-      </p:grpSpPr>
-      <p:sp>
-        <p:nvSpPr>
-          <p:cNvPr id="2" name="Title 1"/>
-          <p:cNvSpPr>
-            <a:spLocks noGrp="1"/>
-          </p:cNvSpPr>
-          <p:nvPr>
-            <p:ph type="title"/>
-          </p:nvPr>
-        </p:nvSpPr>
-        <p:spPr/>
-        <p:txBody>
-          <a:bodyPr/>
-          <a:lstStyle/>
-          <a:p>
-            <a:r>
-              <a:rPr lang="en-US" dirty="0"/>
-              <a:t>“Only”</a:t>
-            </a:r>
-          </a:p>
-        </p:txBody>
-      </p:sp>
-      <p:sp>
-        <p:nvSpPr>
-          <p:cNvPr id="3" name="Content Placeholder 2"/>
-          <p:cNvSpPr>
-            <a:spLocks noGrp="1"/>
-          </p:cNvSpPr>
-          <p:nvPr>
-            <p:ph idx="1"/>
-          </p:nvPr>
-        </p:nvSpPr>
-        <p:spPr>
-          <a:xfrm>
-            <a:off x="609600" y="1981201"/>
-            <a:ext cx="10972800" cy="4144963"/>
-          </a:xfrm>
-        </p:spPr>
-        <p:txBody>
-          <a:bodyPr/>
-          <a:lstStyle/>
-          <a:p>
-            <a:r>
-              <a:rPr lang="en-US" dirty="0"/>
-              <a:t>Low cost enforcement of property rights and contracts and maintenance of institutions needed for competitive markets </a:t>
-            </a:r>
-            <a:r>
-              <a:rPr lang="en-US" dirty="0">
-                <a:solidFill>
-                  <a:srgbClr val="C00000"/>
-                </a:solidFill>
-              </a:rPr>
-              <a:t>NOT easy</a:t>
-            </a:r>
-          </a:p>
-          <a:p>
-            <a:r>
-              <a:rPr lang="en-US" dirty="0"/>
-              <a:t>“Let the market take care of things” is an illusion. </a:t>
-            </a:r>
-          </a:p>
-          <a:p>
-            <a:r>
-              <a:rPr lang="en-US" dirty="0"/>
-              <a:t>Need to work hard to create maintain competitive markets</a:t>
-            </a:r>
-          </a:p>
-        </p:txBody>
-      </p:sp>
-      <p:sp>
-        <p:nvSpPr>
-          <p:cNvPr id="4" name="Slide Number Placeholder 3"/>
-          <p:cNvSpPr>
-            <a:spLocks noGrp="1"/>
-          </p:cNvSpPr>
-          <p:nvPr>
-            <p:ph type="sldNum" sz="quarter" idx="12"/>
-          </p:nvPr>
-        </p:nvSpPr>
-        <p:spPr/>
-        <p:txBody>
-          <a:bodyPr/>
-          <a:lstStyle/>
-          <a:p>
-            <a:pPr>
-              <a:defRPr/>
-            </a:pPr>
-            <a:fld id="{0B9AA5AD-3701-488D-8337-65701EB767E3}" type="slidenum">
-              <a:rPr lang="en-US" smtClean="0"/>
-              <a:pPr>
-                <a:defRPr/>
-              </a:pPr>
-              <a:t>49</a:t>
-            </a:fld>
-            <a:endParaRPr lang="en-US" dirty="0"/>
-          </a:p>
-        </p:txBody>
-      </p:sp>
-    </p:spTree>
-    <p:extLst>
-      <p:ext uri="{BB962C8B-B14F-4D97-AF65-F5344CB8AC3E}">
-        <p14:creationId xmlns:p14="http://schemas.microsoft.com/office/powerpoint/2010/main" val="167265696"/>
-      </p:ext>
-    </p:extLst>
-  </p:cSld>
-  <p:clrMapOvr>
-    <a:masterClrMapping/>
-  </p:clrMapOvr>
-</p:sld>
-</file>
-
 <file path=ppt/slides/slide5.xml><?xml version="1.0" encoding="utf-8"?>
 <p:sld xmlns:a="http://schemas.openxmlformats.org/drawingml/2006/main" xmlns:r="http://schemas.openxmlformats.org/officeDocument/2006/relationships" xmlns:p="http://schemas.openxmlformats.org/presentationml/2006/main">
   <p:cSld>
@@ -33981,6 +34065,400 @@
             <p:ph type="title"/>
           </p:nvPr>
         </p:nvSpPr>
+        <p:spPr/>
+        <p:txBody>
+          <a:bodyPr>
+            <a:normAutofit/>
+          </a:bodyPr>
+          <a:lstStyle/>
+          <a:p>
+            <a:r>
+              <a:rPr lang="en-US" dirty="0"/>
+              <a:t>Implications for Role of Government?</a:t>
+            </a:r>
+          </a:p>
+        </p:txBody>
+      </p:sp>
+      <p:sp>
+        <p:nvSpPr>
+          <p:cNvPr id="3" name="Content Placeholder 2"/>
+          <p:cNvSpPr>
+            <a:spLocks noGrp="1"/>
+          </p:cNvSpPr>
+          <p:nvPr>
+            <p:ph idx="1"/>
+          </p:nvPr>
+        </p:nvSpPr>
+        <p:spPr>
+          <a:xfrm>
+            <a:off x="609600" y="1752601"/>
+            <a:ext cx="10972800" cy="4373563"/>
+          </a:xfrm>
+        </p:spPr>
+        <p:txBody>
+          <a:bodyPr/>
+          <a:lstStyle/>
+          <a:p>
+            <a:r>
+              <a:rPr lang="en-US" dirty="0"/>
+              <a:t>If markets are “complete” and “perfect”, and property rights are well defined and </a:t>
+            </a:r>
+            <a:r>
+              <a:rPr lang="en-US" dirty="0" err="1"/>
+              <a:t>costlessly</a:t>
+            </a:r>
+            <a:r>
+              <a:rPr lang="en-US" dirty="0"/>
+              <a:t> enforceable, </a:t>
+            </a:r>
+            <a:r>
+              <a:rPr lang="en-US" i="1" dirty="0"/>
+              <a:t>laissez faire </a:t>
+            </a:r>
+            <a:r>
+              <a:rPr lang="en-US" dirty="0"/>
+              <a:t>government  policy yields a Pareto efficient outcome</a:t>
+            </a:r>
+          </a:p>
+          <a:p>
+            <a:endParaRPr lang="en-US" dirty="0"/>
+          </a:p>
+          <a:p>
+            <a:r>
+              <a:rPr lang="en-US" dirty="0"/>
+              <a:t>Even if we are concerned with redistribution, the </a:t>
+            </a:r>
+            <a:r>
+              <a:rPr lang="en-US" i="1" dirty="0"/>
+              <a:t>only</a:t>
+            </a:r>
+            <a:r>
+              <a:rPr lang="en-US" dirty="0"/>
+              <a:t> necessary government policy is an initial redistribution of wealth. (Second Welfare Theorem discussed in chapter)</a:t>
+            </a:r>
+          </a:p>
+        </p:txBody>
+      </p:sp>
+      <p:sp>
+        <p:nvSpPr>
+          <p:cNvPr id="4" name="Slide Number Placeholder 3"/>
+          <p:cNvSpPr>
+            <a:spLocks noGrp="1"/>
+          </p:cNvSpPr>
+          <p:nvPr>
+            <p:ph type="sldNum" sz="quarter" idx="12"/>
+          </p:nvPr>
+        </p:nvSpPr>
+        <p:spPr/>
+        <p:txBody>
+          <a:bodyPr/>
+          <a:lstStyle/>
+          <a:p>
+            <a:fld id="{CFF8E9C2-617A-4D65-AFBD-F489864C0492}" type="slidenum">
+              <a:rPr lang="en-US" smtClean="0"/>
+              <a:pPr/>
+              <a:t>50</a:t>
+            </a:fld>
+            <a:endParaRPr lang="en-US"/>
+          </a:p>
+        </p:txBody>
+      </p:sp>
+    </p:spTree>
+    <p:extLst>
+      <p:ext uri="{BB962C8B-B14F-4D97-AF65-F5344CB8AC3E}">
+        <p14:creationId xmlns:p14="http://schemas.microsoft.com/office/powerpoint/2010/main" val="3828229179"/>
+      </p:ext>
+    </p:extLst>
+  </p:cSld>
+  <p:clrMapOvr>
+    <a:masterClrMapping/>
+  </p:clrMapOvr>
+  <p:timing>
+    <p:tnLst>
+      <p:par>
+        <p:cTn id="1" dur="indefinite" restart="never" nodeType="tmRoot">
+          <p:childTnLst>
+            <p:seq concurrent="1" nextAc="seek">
+              <p:cTn id="2" dur="indefinite" nodeType="mainSeq">
+                <p:childTnLst>
+                  <p:par>
+                    <p:cTn id="3" fill="hold">
+                      <p:stCondLst>
+                        <p:cond delay="indefinite"/>
+                      </p:stCondLst>
+                      <p:childTnLst>
+                        <p:par>
+                          <p:cTn id="4" fill="hold">
+                            <p:stCondLst>
+                              <p:cond delay="0"/>
+                            </p:stCondLst>
+                            <p:childTnLst>
+                              <p:par>
+                                <p:cTn id="5" presetID="1" presetClass="entr" presetSubtype="0" fill="hold" nodeType="clickEffect">
+                                  <p:stCondLst>
+                                    <p:cond delay="0"/>
+                                  </p:stCondLst>
+                                  <p:childTnLst>
+                                    <p:set>
+                                      <p:cBhvr>
+                                        <p:cTn id="6" dur="1" fill="hold">
+                                          <p:stCondLst>
+                                            <p:cond delay="0"/>
+                                          </p:stCondLst>
+                                        </p:cTn>
+                                        <p:tgtEl>
+                                          <p:spTgt spid="3">
+                                            <p:txEl>
+                                              <p:pRg st="0" end="0"/>
+                                            </p:txEl>
+                                          </p:spTgt>
+                                        </p:tgtEl>
+                                        <p:attrNameLst>
+                                          <p:attrName>style.visibility</p:attrName>
+                                        </p:attrNameLst>
+                                      </p:cBhvr>
+                                      <p:to>
+                                        <p:strVal val="visible"/>
+                                      </p:to>
+                                    </p:set>
+                                  </p:childTnLst>
+                                </p:cTn>
+                              </p:par>
+                            </p:childTnLst>
+                          </p:cTn>
+                        </p:par>
+                      </p:childTnLst>
+                    </p:cTn>
+                  </p:par>
+                  <p:par>
+                    <p:cTn id="7" fill="hold">
+                      <p:stCondLst>
+                        <p:cond delay="indefinite"/>
+                      </p:stCondLst>
+                      <p:childTnLst>
+                        <p:par>
+                          <p:cTn id="8" fill="hold">
+                            <p:stCondLst>
+                              <p:cond delay="0"/>
+                            </p:stCondLst>
+                            <p:childTnLst>
+                              <p:par>
+                                <p:cTn id="9" presetID="1" presetClass="entr" presetSubtype="0" fill="hold" nodeType="clickEffect">
+                                  <p:stCondLst>
+                                    <p:cond delay="0"/>
+                                  </p:stCondLst>
+                                  <p:childTnLst>
+                                    <p:set>
+                                      <p:cBhvr>
+                                        <p:cTn id="10" dur="1" fill="hold">
+                                          <p:stCondLst>
+                                            <p:cond delay="0"/>
+                                          </p:stCondLst>
+                                        </p:cTn>
+                                        <p:tgtEl>
+                                          <p:spTgt spid="3">
+                                            <p:txEl>
+                                              <p:pRg st="2" end="2"/>
+                                            </p:txEl>
+                                          </p:spTgt>
+                                        </p:tgtEl>
+                                        <p:attrNameLst>
+                                          <p:attrName>style.visibility</p:attrName>
+                                        </p:attrNameLst>
+                                      </p:cBhvr>
+                                      <p:to>
+                                        <p:strVal val="visible"/>
+                                      </p:to>
+                                    </p:set>
+                                  </p:childTnLst>
+                                </p:cTn>
+                              </p:par>
+                            </p:childTnLst>
+                          </p:cTn>
+                        </p:par>
+                      </p:childTnLst>
+                    </p:cTn>
+                  </p:par>
+                </p:childTnLst>
+              </p:cTn>
+              <p:prevCondLst>
+                <p:cond evt="onPrev" delay="0">
+                  <p:tgtEl>
+                    <p:sldTgt/>
+                  </p:tgtEl>
+                </p:cond>
+              </p:prevCondLst>
+              <p:nextCondLst>
+                <p:cond evt="onNext" delay="0">
+                  <p:tgtEl>
+                    <p:sldTgt/>
+                  </p:tgtEl>
+                </p:cond>
+              </p:nextCondLst>
+            </p:seq>
+          </p:childTnLst>
+        </p:cTn>
+      </p:par>
+    </p:tnLst>
+  </p:timing>
+</p:sld>
+</file>
+
+<file path=ppt/slides/slide51.xml><?xml version="1.0" encoding="utf-8"?>
+<p:sld xmlns:a="http://schemas.openxmlformats.org/drawingml/2006/main" xmlns:r="http://schemas.openxmlformats.org/officeDocument/2006/relationships" xmlns:p="http://schemas.openxmlformats.org/presentationml/2006/main">
+  <p:cSld>
+    <p:spTree>
+      <p:nvGrpSpPr>
+        <p:cNvPr id="1" name=""/>
+        <p:cNvGrpSpPr/>
+        <p:nvPr/>
+      </p:nvGrpSpPr>
+      <p:grpSpPr>
+        <a:xfrm>
+          <a:off x="0" y="0"/>
+          <a:ext cx="0" cy="0"/>
+          <a:chOff x="0" y="0"/>
+          <a:chExt cx="0" cy="0"/>
+        </a:xfrm>
+      </p:grpSpPr>
+      <p:sp>
+        <p:nvSpPr>
+          <p:cNvPr id="2" name="Title 1"/>
+          <p:cNvSpPr>
+            <a:spLocks noGrp="1"/>
+          </p:cNvSpPr>
+          <p:nvPr>
+            <p:ph type="title"/>
+          </p:nvPr>
+        </p:nvSpPr>
+        <p:spPr/>
+        <p:txBody>
+          <a:bodyPr/>
+          <a:lstStyle/>
+          <a:p>
+            <a:r>
+              <a:rPr lang="en-US" dirty="0"/>
+              <a:t>“Only”</a:t>
+            </a:r>
+          </a:p>
+        </p:txBody>
+      </p:sp>
+      <p:sp>
+        <p:nvSpPr>
+          <p:cNvPr id="3" name="Content Placeholder 2"/>
+          <p:cNvSpPr>
+            <a:spLocks noGrp="1"/>
+          </p:cNvSpPr>
+          <p:nvPr>
+            <p:ph idx="1"/>
+          </p:nvPr>
+        </p:nvSpPr>
+        <p:spPr>
+          <a:xfrm>
+            <a:off x="609600" y="1981201"/>
+            <a:ext cx="10972800" cy="4144963"/>
+          </a:xfrm>
+        </p:spPr>
+        <p:txBody>
+          <a:bodyPr/>
+          <a:lstStyle/>
+          <a:p>
+            <a:r>
+              <a:rPr lang="en-US" dirty="0"/>
+              <a:t>Low cost enforcement of property rights and contracts and maintenance of institutions needed for competitive markets </a:t>
+            </a:r>
+            <a:r>
+              <a:rPr lang="en-US" dirty="0">
+                <a:solidFill>
+                  <a:srgbClr val="C00000"/>
+                </a:solidFill>
+              </a:rPr>
+              <a:t>NOT easy</a:t>
+            </a:r>
+          </a:p>
+          <a:p>
+            <a:r>
+              <a:rPr lang="en-US" dirty="0"/>
+              <a:t>“Let the market take care of things” is an illusion. </a:t>
+            </a:r>
+          </a:p>
+          <a:p>
+            <a:r>
+              <a:rPr lang="en-US" dirty="0"/>
+              <a:t>Need to work hard to create maintain competitive markets</a:t>
+            </a:r>
+          </a:p>
+        </p:txBody>
+      </p:sp>
+      <p:sp>
+        <p:nvSpPr>
+          <p:cNvPr id="4" name="Slide Number Placeholder 3"/>
+          <p:cNvSpPr>
+            <a:spLocks noGrp="1"/>
+          </p:cNvSpPr>
+          <p:nvPr>
+            <p:ph type="sldNum" sz="quarter" idx="12"/>
+          </p:nvPr>
+        </p:nvSpPr>
+        <p:spPr/>
+        <p:txBody>
+          <a:bodyPr/>
+          <a:lstStyle/>
+          <a:p>
+            <a:pPr>
+              <a:defRPr/>
+            </a:pPr>
+            <a:fld id="{0B9AA5AD-3701-488D-8337-65701EB767E3}" type="slidenum">
+              <a:rPr lang="en-US" smtClean="0"/>
+              <a:pPr>
+                <a:defRPr/>
+              </a:pPr>
+              <a:t>51</a:t>
+            </a:fld>
+            <a:endParaRPr lang="en-US" dirty="0"/>
+          </a:p>
+        </p:txBody>
+      </p:sp>
+    </p:spTree>
+    <p:extLst>
+      <p:ext uri="{BB962C8B-B14F-4D97-AF65-F5344CB8AC3E}">
+        <p14:creationId xmlns:p14="http://schemas.microsoft.com/office/powerpoint/2010/main" val="167265696"/>
+      </p:ext>
+    </p:extLst>
+  </p:cSld>
+  <p:clrMapOvr>
+    <a:masterClrMapping/>
+  </p:clrMapOvr>
+</p:sld>
+</file>
+
+<file path=ppt/slides/slide52.xml><?xml version="1.0" encoding="utf-8"?>
+<p:sld xmlns:a="http://schemas.openxmlformats.org/drawingml/2006/main" xmlns:r="http://schemas.openxmlformats.org/officeDocument/2006/relationships" xmlns:p="http://schemas.openxmlformats.org/presentationml/2006/main">
+  <p:cSld>
+    <p:spTree>
+      <p:nvGrpSpPr>
+        <p:cNvPr id="1" name=""/>
+        <p:cNvGrpSpPr/>
+        <p:nvPr/>
+      </p:nvGrpSpPr>
+      <p:grpSpPr>
+        <a:xfrm>
+          <a:off x="0" y="0"/>
+          <a:ext cx="0" cy="0"/>
+          <a:chOff x="0" y="0"/>
+          <a:chExt cx="0" cy="0"/>
+        </a:xfrm>
+      </p:grpSpPr>
+      <p:sp>
+        <p:nvSpPr>
+          <p:cNvPr id="2" name="Title 1"/>
+          <p:cNvSpPr>
+            <a:spLocks noGrp="1"/>
+          </p:cNvSpPr>
+          <p:nvPr>
+            <p:ph type="title"/>
+          </p:nvPr>
+        </p:nvSpPr>
         <p:spPr>
           <a:xfrm>
             <a:off x="1981200" y="0"/>
@@ -34115,14 +34593,7 @@
             <a:pPr marL="914400" lvl="1" indent="-514350"/>
             <a:r>
               <a:rPr lang="en-US" dirty="0"/>
-              <a:t>Also large institutional requirement </a:t>
-            </a:r>
-            <a:br>
-              <a:rPr lang="en-US" dirty="0"/>
-            </a:br>
-            <a:r>
-              <a:rPr lang="en-US" dirty="0"/>
-              <a:t>(enforcement of contracts)</a:t>
+              <a:t>Also large institutional requirement (enforcement of contracts)</a:t>
             </a:r>
             <a:endParaRPr lang="en-US" sz="1300" dirty="0"/>
           </a:p>
@@ -34153,7 +34624,7 @@
             <a:fld id="{CFF8E9C2-617A-4D65-AFBD-F489864C0492}" type="slidenum">
               <a:rPr lang="en-US" smtClean="0"/>
               <a:pPr/>
-              <a:t>50</a:t>
+              <a:t>52</a:t>
             </a:fld>
             <a:endParaRPr lang="en-US" dirty="0"/>
           </a:p>
@@ -34594,7 +35065,7 @@
 </p:sld>
 </file>
 
-<file path=ppt/slides/slide51.xml><?xml version="1.0" encoding="utf-8"?>
+<file path=ppt/slides/slide53.xml><?xml version="1.0" encoding="utf-8"?>
 <p:sld xmlns:a="http://schemas.openxmlformats.org/drawingml/2006/main" xmlns:r="http://schemas.openxmlformats.org/officeDocument/2006/relationships" xmlns:p="http://schemas.openxmlformats.org/presentationml/2006/main">
   <p:cSld>
     <p:spTree>
@@ -34717,7 +35188,7 @@
             <a:fld id="{CFF8E9C2-617A-4D65-AFBD-F489864C0492}" type="slidenum">
               <a:rPr lang="en-US" smtClean="0"/>
               <a:pPr/>
-              <a:t>51</a:t>
+              <a:t>53</a:t>
             </a:fld>
             <a:endParaRPr lang="en-US"/>
           </a:p>
@@ -34913,7 +35384,7 @@
 </p:sld>
 </file>
 
-<file path=ppt/slides/slide52.xml><?xml version="1.0" encoding="utf-8"?>
+<file path=ppt/slides/slide54.xml><?xml version="1.0" encoding="utf-8"?>
 <p:sld xmlns:a="http://schemas.openxmlformats.org/drawingml/2006/main" xmlns:r="http://schemas.openxmlformats.org/officeDocument/2006/relationships" xmlns:p="http://schemas.openxmlformats.org/presentationml/2006/main">
   <p:cSld>
     <p:spTree>
@@ -35033,7 +35504,7 @@
             <a:fld id="{CFF8E9C2-617A-4D65-AFBD-F489864C0492}" type="slidenum">
               <a:rPr lang="en-US" smtClean="0"/>
               <a:pPr/>
-              <a:t>52</a:t>
+              <a:t>54</a:t>
             </a:fld>
             <a:endParaRPr lang="en-US"/>
           </a:p>
@@ -36477,7 +36948,8 @@
                       <m:sSubPr>
                         <m:ctrlPr>
                           <a:rPr lang="en-US" i="1">
-                            <a:latin typeface="Cambria Math" panose="02040503050406030204" pitchFamily="18" charset="0"/>
+                            <a:latin typeface="Cambria Math"/>
+                            <a:ea typeface="Cambria Math"/>
                           </a:rPr>
                         </m:ctrlPr>
                       </m:sSubPr>
@@ -36512,7 +36984,8 @@
                       <m:sSubPr>
                         <m:ctrlPr>
                           <a:rPr lang="en-US" i="1">
-                            <a:latin typeface="Cambria Math" panose="02040503050406030204" pitchFamily="18" charset="0"/>
+                            <a:latin typeface="Cambria Math"/>
+                            <a:ea typeface="Cambria Math"/>
                           </a:rPr>
                         </m:ctrlPr>
                       </m:sSubPr>
@@ -36568,15 +37041,12 @@
                 </a:pPr>
                 <a14:m>
                   <m:oMathPara xmlns:m="http://schemas.openxmlformats.org/officeDocument/2006/math">
-                    <m:oMathParaPr>
-                      <m:jc m:val="centerGroup"/>
-                    </m:oMathParaPr>
-                    <m:oMath xmlns:m="http://schemas.openxmlformats.org/officeDocument/2006/math">
+                    <m:oMath>
                       <m:sSub>
                         <m:sSubPr>
                           <m:ctrlPr>
-                            <a:rPr lang="en-US" i="1" smtClean="0">
-                              <a:latin typeface="Cambria Math" panose="02040503050406030204" pitchFamily="18" charset="0"/>
+                            <a:rPr lang="en-US" b="0" i="1" smtClean="0">
+                              <a:latin typeface="Cambria Math"/>
                             </a:rPr>
                           </m:ctrlPr>
                         </m:sSubPr>
@@ -36641,7 +37111,7 @@
                             <m:sSubPr>
                               <m:ctrlPr>
                                 <a:rPr lang="en-US" b="0" i="1" smtClean="0">
-                                  <a:latin typeface="Cambria Math" panose="02040503050406030204" pitchFamily="18" charset="0"/>
+                                  <a:latin typeface="Cambria Math"/>
                                 </a:rPr>
                               </m:ctrlPr>
                             </m:sSubPr>
@@ -36672,7 +37142,7 @@
                             <m:sSubPr>
                               <m:ctrlPr>
                                 <a:rPr lang="en-US" b="0" i="1" smtClean="0">
-                                  <a:latin typeface="Cambria Math" panose="02040503050406030204" pitchFamily="18" charset="0"/>
+                                  <a:latin typeface="Cambria Math"/>
                                 </a:rPr>
                               </m:ctrlPr>
                             </m:sSubPr>
@@ -36713,15 +37183,12 @@
                 </a:pPr>
                 <a14:m>
                   <m:oMathPara xmlns:m="http://schemas.openxmlformats.org/officeDocument/2006/math">
-                    <m:oMathParaPr>
-                      <m:jc m:val="centerGroup"/>
-                    </m:oMathParaPr>
-                    <m:oMath xmlns:m="http://schemas.openxmlformats.org/officeDocument/2006/math">
+                    <m:oMath>
                       <m:sSub>
                         <m:sSubPr>
                           <m:ctrlPr>
                             <a:rPr lang="en-US" i="1">
-                              <a:latin typeface="Cambria Math" panose="02040503050406030204" pitchFamily="18" charset="0"/>
+                              <a:latin typeface="Cambria Math"/>
                             </a:rPr>
                           </m:ctrlPr>
                         </m:sSubPr>
@@ -36751,7 +37218,7 @@
                       <m:sSub>
                         <m:sSubPr>
                           <m:ctrlPr>
-                            <a:rPr lang="en-US" i="1">
+                            <a:rPr lang="en-US" b="0" i="1" smtClean="0">
                               <a:latin typeface="Cambria Math" panose="02040503050406030204" pitchFamily="18" charset="0"/>
                             </a:rPr>
                           </m:ctrlPr>
@@ -36786,7 +37253,7 @@
                             <m:sSubPr>
                               <m:ctrlPr>
                                 <a:rPr lang="en-US" i="1">
-                                  <a:latin typeface="Cambria Math" panose="02040503050406030204" pitchFamily="18" charset="0"/>
+                                  <a:latin typeface="Cambria Math"/>
                                 </a:rPr>
                               </m:ctrlPr>
                             </m:sSubPr>
@@ -36817,7 +37284,7 @@
                             <m:sSubPr>
                               <m:ctrlPr>
                                 <a:rPr lang="en-US" i="1">
-                                  <a:latin typeface="Cambria Math" panose="02040503050406030204" pitchFamily="18" charset="0"/>
+                                  <a:latin typeface="Cambria Math"/>
                                 </a:rPr>
                               </m:ctrlPr>
                             </m:sSubPr>
